--- a/P2Shield_TechKnights_BITSHIFT2026.pptx
+++ b/P2Shield_TechKnights_BITSHIFT2026.pptx
@@ -14004,7 +14004,7 @@
           <p:cNvPr id="3" name="Subtitle 2">
             <a:extLst>
               <a:ext uri="{FF2B5EF4-FFF2-40B4-BE49-F238E27FC236}">
-                <a16:creationId xmlns:a16="http://schemas.microsoft.com/office/drawing/2014/main" id="{B63A6EB4-967A-C0F7-2ED4-54207F23CABD}"/>
+                <a16:creationId xmlns:a16="http://schemas.microsoft.com/office/drawing/2014/main" id="{DEFC2EF7-2FE1-2365-C451-731DA6FA3F39}"/>
               </a:ext>
             </a:extLst>
           </p:cNvPr>
@@ -14029,7 +14029,7 @@
           <p:cNvPr id="4" name="TextBox 3">
             <a:extLst>
               <a:ext uri="{FF2B5EF4-FFF2-40B4-BE49-F238E27FC236}">
-                <a16:creationId xmlns:a16="http://schemas.microsoft.com/office/drawing/2014/main" id="{EF10D578-69DA-8116-9BD2-990795997EFC}"/>
+                <a16:creationId xmlns:a16="http://schemas.microsoft.com/office/drawing/2014/main" id="{D192F3D3-F1A0-8C1B-8444-7D4F61BBFC39}"/>
               </a:ext>
             </a:extLst>
           </p:cNvPr>
@@ -14038,7 +14038,7 @@
         </p:nvSpPr>
         <p:spPr>
           <a:xfrm>
-            <a:off x="508000" y="1371600"/>
+            <a:off x="508000" y="1346200"/>
             <a:ext cx="6096000" cy="838200"/>
           </a:xfrm>
           <a:prstGeom prst="rect">
@@ -14078,7 +14078,7 @@
           <p:cNvPr id="5" name="TextBox 4">
             <a:extLst>
               <a:ext uri="{FF2B5EF4-FFF2-40B4-BE49-F238E27FC236}">
-                <a16:creationId xmlns:a16="http://schemas.microsoft.com/office/drawing/2014/main" id="{26A4FEB4-FE94-58B2-C40D-9DF98904C384}"/>
+                <a16:creationId xmlns:a16="http://schemas.microsoft.com/office/drawing/2014/main" id="{C235B3C0-64BD-5E03-DB33-2311E268A937}"/>
               </a:ext>
             </a:extLst>
           </p:cNvPr>
@@ -14087,7 +14087,7 @@
         </p:nvSpPr>
         <p:spPr>
           <a:xfrm>
-            <a:off x="533400" y="2209800"/>
+            <a:off x="533400" y="2184400"/>
             <a:ext cx="5969000" cy="558800"/>
           </a:xfrm>
           <a:prstGeom prst="rect">
@@ -14123,7 +14123,7 @@
           <p:cNvPr id="6" name="Rectangle 5">
             <a:extLst>
               <a:ext uri="{FF2B5EF4-FFF2-40B4-BE49-F238E27FC236}">
-                <a16:creationId xmlns:a16="http://schemas.microsoft.com/office/drawing/2014/main" id="{12D298A7-537E-6167-6F9E-87C0F9A0F657}"/>
+                <a16:creationId xmlns:a16="http://schemas.microsoft.com/office/drawing/2014/main" id="{D84A89F0-E551-A0E0-69B7-F94E2CD641D3}"/>
               </a:ext>
             </a:extLst>
           </p:cNvPr>
@@ -14132,7 +14132,7 @@
         </p:nvSpPr>
         <p:spPr>
           <a:xfrm>
-            <a:off x="533400" y="2870200"/>
+            <a:off x="533400" y="2844800"/>
             <a:ext cx="914400" cy="50800"/>
           </a:xfrm>
           <a:prstGeom prst="rect">
@@ -14198,7 +14198,7 @@
           <p:cNvPr id="7" name="TextBox 6">
             <a:extLst>
               <a:ext uri="{FF2B5EF4-FFF2-40B4-BE49-F238E27FC236}">
-                <a16:creationId xmlns:a16="http://schemas.microsoft.com/office/drawing/2014/main" id="{3A5A6F2F-AB9B-3DAC-7CB6-958C56565C6F}"/>
+                <a16:creationId xmlns:a16="http://schemas.microsoft.com/office/drawing/2014/main" id="{E7949598-8FCC-14E0-0EF4-62DDD4E42A5D}"/>
               </a:ext>
             </a:extLst>
           </p:cNvPr>
@@ -14207,8 +14207,8 @@
         </p:nvSpPr>
         <p:spPr>
           <a:xfrm>
-            <a:off x="508000" y="3175000"/>
-            <a:ext cx="5969000" cy="2921000"/>
+            <a:off x="508000" y="3124200"/>
+            <a:ext cx="5969000" cy="3175000"/>
           </a:xfrm>
           <a:prstGeom prst="rect">
             <a:avLst/>
@@ -14223,7 +14223,32 @@
           <a:p>
             <a:pPr marL="228600" indent="-228600">
               <a:spcAft>
-                <a:spcPts val="1600"/>
+                <a:spcPts val="1500"/>
+              </a:spcAft>
+              <a:buSzPct val="100000"/>
+              <a:buFont typeface="Arial" panose="020B0604020202020204" pitchFamily="34" charset="0"/>
+              <a:buChar char="•"/>
+            </a:pPr>
+            <a:r>
+              <a:rPr lang="en-IN" sz="1900" b="1">
+                <a:latin typeface="Arial" panose="020B0604020202020204" pitchFamily="34" charset="0"/>
+              </a:rPr>
+              <a:t>Problem Statement ID – </a:t>
+            </a:r>
+            <a:r>
+              <a:rPr lang="en-IN" sz="1900" b="1">
+                <a:solidFill>
+                  <a:srgbClr val="1F497D"/>
+                </a:solidFill>
+                <a:latin typeface="Arial" panose="020B0604020202020204" pitchFamily="34" charset="0"/>
+              </a:rPr>
+              <a:t>10</a:t>
+            </a:r>
+          </a:p>
+          <a:p>
+            <a:pPr marL="228600" indent="-228600">
+              <a:spcAft>
+                <a:spcPts val="1500"/>
               </a:spcAft>
               <a:buSzPct val="100000"/>
               <a:buFont typeface="Arial" panose="020B0604020202020204" pitchFamily="34" charset="0"/>
@@ -14248,7 +14273,7 @@
           <a:p>
             <a:pPr marL="228600" indent="-228600">
               <a:spcAft>
-                <a:spcPts val="1600"/>
+                <a:spcPts val="1500"/>
               </a:spcAft>
               <a:buSzPct val="100000"/>
               <a:buFont typeface="Arial" panose="020B0604020202020204" pitchFamily="34" charset="0"/>
@@ -14273,7 +14298,7 @@
           <a:p>
             <a:pPr marL="228600" indent="-228600">
               <a:spcAft>
-                <a:spcPts val="1600"/>
+                <a:spcPts val="1500"/>
               </a:spcAft>
               <a:buSzPct val="100000"/>
               <a:buFont typeface="Arial" panose="020B0604020202020204" pitchFamily="34" charset="0"/>
@@ -14298,7 +14323,7 @@
           <a:p>
             <a:pPr marL="228600" indent="-228600">
               <a:spcAft>
-                <a:spcPts val="1600"/>
+                <a:spcPts val="1500"/>
               </a:spcAft>
               <a:buSzPct val="100000"/>
               <a:buFont typeface="Arial" panose="020B0604020202020204" pitchFamily="34" charset="0"/>
@@ -14327,7 +14352,7 @@
           <p:cNvPr id="9" name="Picture 8" descr="P2Shield logo: a shield protecting a chat message with masked text">
             <a:extLst>
               <a:ext uri="{FF2B5EF4-FFF2-40B4-BE49-F238E27FC236}">
-                <a16:creationId xmlns:a16="http://schemas.microsoft.com/office/drawing/2014/main" id="{00163603-00F7-954A-24BA-22AF14406EE5}"/>
+                <a16:creationId xmlns:a16="http://schemas.microsoft.com/office/drawing/2014/main" id="{A6FDB0E5-0781-7617-54E7-7F30D8F3ADA2}"/>
               </a:ext>
             </a:extLst>
           </p:cNvPr>
@@ -14357,7 +14382,7 @@
           <p:cNvPr id="10" name="Rectangle: Rounded Corners 9">
             <a:extLst>
               <a:ext uri="{FF2B5EF4-FFF2-40B4-BE49-F238E27FC236}">
-                <a16:creationId xmlns:a16="http://schemas.microsoft.com/office/drawing/2014/main" id="{C80C1EF9-39D0-EF53-290C-1E36449DACF7}"/>
+                <a16:creationId xmlns:a16="http://schemas.microsoft.com/office/drawing/2014/main" id="{6292C670-3E1C-3E7E-5C88-420591300ACE}"/>
               </a:ext>
             </a:extLst>
           </p:cNvPr>
@@ -14430,7 +14455,7 @@
           <p:cNvPr id="11" name="Rectangle: Rounded Corners 10">
             <a:extLst>
               <a:ext uri="{FF2B5EF4-FFF2-40B4-BE49-F238E27FC236}">
-                <a16:creationId xmlns:a16="http://schemas.microsoft.com/office/drawing/2014/main" id="{DEEEEABC-6A97-1718-F3DA-EC7C1A65FC80}"/>
+                <a16:creationId xmlns:a16="http://schemas.microsoft.com/office/drawing/2014/main" id="{4C8ADAB4-6F96-1148-F52E-CEF7489599F2}"/>
               </a:ext>
             </a:extLst>
           </p:cNvPr>
@@ -14503,7 +14528,7 @@
           <p:cNvPr id="12" name="Rectangle: Rounded Corners 11">
             <a:extLst>
               <a:ext uri="{FF2B5EF4-FFF2-40B4-BE49-F238E27FC236}">
-                <a16:creationId xmlns:a16="http://schemas.microsoft.com/office/drawing/2014/main" id="{060BE414-58C8-9544-129A-89342C1CDF38}"/>
+                <a16:creationId xmlns:a16="http://schemas.microsoft.com/office/drawing/2014/main" id="{0DB48779-477A-8B40-7D31-8A818B5143C4}"/>
               </a:ext>
             </a:extLst>
           </p:cNvPr>
@@ -14576,7 +14601,7 @@
           <p:cNvPr id="13" name="Rectangle: Rounded Corners 12">
             <a:extLst>
               <a:ext uri="{FF2B5EF4-FFF2-40B4-BE49-F238E27FC236}">
-                <a16:creationId xmlns:a16="http://schemas.microsoft.com/office/drawing/2014/main" id="{F6C8A839-5FF2-45E4-96A3-1AC8A5881C96}"/>
+                <a16:creationId xmlns:a16="http://schemas.microsoft.com/office/drawing/2014/main" id="{49AA47DE-497B-9EC6-5836-CFBC70DB0355}"/>
               </a:ext>
             </a:extLst>
           </p:cNvPr>
@@ -14969,7 +14994,7 @@
           <p:cNvPr id="2" name="TextBox 1">
             <a:extLst>
               <a:ext uri="{FF2B5EF4-FFF2-40B4-BE49-F238E27FC236}">
-                <a16:creationId xmlns:a16="http://schemas.microsoft.com/office/drawing/2014/main" id="{BD8FC90C-C993-69BC-10CF-5F5551278A3A}"/>
+                <a16:creationId xmlns:a16="http://schemas.microsoft.com/office/drawing/2014/main" id="{E24E7D3F-F919-4FCF-2360-A1E6B546CE29}"/>
               </a:ext>
             </a:extLst>
           </p:cNvPr>
@@ -15010,7 +15035,7 @@
           <p:cNvPr id="3" name="Rectangle: Rounded Corners 2">
             <a:extLst>
               <a:ext uri="{FF2B5EF4-FFF2-40B4-BE49-F238E27FC236}">
-                <a16:creationId xmlns:a16="http://schemas.microsoft.com/office/drawing/2014/main" id="{163BD3E9-5382-4D85-6B61-A0F2F9309DC9}"/>
+                <a16:creationId xmlns:a16="http://schemas.microsoft.com/office/drawing/2014/main" id="{C72BCCA0-7ED6-6E23-2E28-F20CB588A477}"/>
               </a:ext>
             </a:extLst>
           </p:cNvPr>
@@ -15087,7 +15112,7 @@
           <p:cNvPr id="4" name="TextBox 3">
             <a:extLst>
               <a:ext uri="{FF2B5EF4-FFF2-40B4-BE49-F238E27FC236}">
-                <a16:creationId xmlns:a16="http://schemas.microsoft.com/office/drawing/2014/main" id="{AE57CDC6-507D-4557-8FB8-553A9CDCF246}"/>
+                <a16:creationId xmlns:a16="http://schemas.microsoft.com/office/drawing/2014/main" id="{E2D7CE84-CE04-C30E-AF0D-6DD48863A5F2}"/>
               </a:ext>
             </a:extLst>
           </p:cNvPr>
@@ -15127,7 +15152,7 @@
           <p:cNvPr id="6" name="Graphic 5" descr="Warning icon">
             <a:extLst>
               <a:ext uri="{FF2B5EF4-FFF2-40B4-BE49-F238E27FC236}">
-                <a16:creationId xmlns:a16="http://schemas.microsoft.com/office/drawing/2014/main" id="{E5010132-307F-5FE8-79BB-5E3C84942A0D}"/>
+                <a16:creationId xmlns:a16="http://schemas.microsoft.com/office/drawing/2014/main" id="{0295467B-2B71-AC62-9C2E-1F1199FFEFC2}"/>
               </a:ext>
             </a:extLst>
           </p:cNvPr>
@@ -15163,7 +15188,7 @@
           <p:cNvPr id="7" name="Rectangle: Rounded Corners 6">
             <a:extLst>
               <a:ext uri="{FF2B5EF4-FFF2-40B4-BE49-F238E27FC236}">
-                <a16:creationId xmlns:a16="http://schemas.microsoft.com/office/drawing/2014/main" id="{F081DC2C-BE5A-8CAE-1676-CE22C824C73D}"/>
+                <a16:creationId xmlns:a16="http://schemas.microsoft.com/office/drawing/2014/main" id="{882CF096-46FA-2B23-47C1-24414C6F8168}"/>
               </a:ext>
             </a:extLst>
           </p:cNvPr>
@@ -15237,7 +15262,7 @@
           <p:cNvPr id="8" name="TextBox 7">
             <a:extLst>
               <a:ext uri="{FF2B5EF4-FFF2-40B4-BE49-F238E27FC236}">
-                <a16:creationId xmlns:a16="http://schemas.microsoft.com/office/drawing/2014/main" id="{DC240316-5732-731B-4B49-3D5EE8B81F0D}"/>
+                <a16:creationId xmlns:a16="http://schemas.microsoft.com/office/drawing/2014/main" id="{C576FAC3-1414-613D-F7B7-0180E78B4842}"/>
               </a:ext>
             </a:extLst>
           </p:cNvPr>
@@ -15278,7 +15303,7 @@
           <p:cNvPr id="9" name="TextBox 8">
             <a:extLst>
               <a:ext uri="{FF2B5EF4-FFF2-40B4-BE49-F238E27FC236}">
-                <a16:creationId xmlns:a16="http://schemas.microsoft.com/office/drawing/2014/main" id="{1B91CCE3-11D2-3A99-3418-622C59B2B2BA}"/>
+                <a16:creationId xmlns:a16="http://schemas.microsoft.com/office/drawing/2014/main" id="{76290CA2-048D-43E5-F57D-7A3A3F0A6D85}"/>
               </a:ext>
             </a:extLst>
           </p:cNvPr>
@@ -15327,7 +15352,7 @@
           <p:cNvPr id="10" name="Rectangle: Rounded Corners 9">
             <a:extLst>
               <a:ext uri="{FF2B5EF4-FFF2-40B4-BE49-F238E27FC236}">
-                <a16:creationId xmlns:a16="http://schemas.microsoft.com/office/drawing/2014/main" id="{AB98CE27-351C-35A6-1933-EDC65EB0A4AF}"/>
+                <a16:creationId xmlns:a16="http://schemas.microsoft.com/office/drawing/2014/main" id="{99064834-DE4F-D3A7-88BD-5AD70FBB0C2E}"/>
               </a:ext>
             </a:extLst>
           </p:cNvPr>
@@ -15401,7 +15426,7 @@
           <p:cNvPr id="11" name="TextBox 10">
             <a:extLst>
               <a:ext uri="{FF2B5EF4-FFF2-40B4-BE49-F238E27FC236}">
-                <a16:creationId xmlns:a16="http://schemas.microsoft.com/office/drawing/2014/main" id="{A9317F47-A4E9-50F5-8FED-D07944B1BC0C}"/>
+                <a16:creationId xmlns:a16="http://schemas.microsoft.com/office/drawing/2014/main" id="{1C231E8A-9D63-A3E1-51F2-66134799726C}"/>
               </a:ext>
             </a:extLst>
           </p:cNvPr>
@@ -15442,7 +15467,7 @@
           <p:cNvPr id="12" name="TextBox 11">
             <a:extLst>
               <a:ext uri="{FF2B5EF4-FFF2-40B4-BE49-F238E27FC236}">
-                <a16:creationId xmlns:a16="http://schemas.microsoft.com/office/drawing/2014/main" id="{DE5739B9-A4B4-1A0E-20D1-029D1370121A}"/>
+                <a16:creationId xmlns:a16="http://schemas.microsoft.com/office/drawing/2014/main" id="{AF0AB319-9E38-F11C-0EE5-C337B8E81812}"/>
               </a:ext>
             </a:extLst>
           </p:cNvPr>
@@ -15491,7 +15516,7 @@
           <p:cNvPr id="13" name="Rectangle: Rounded Corners 12">
             <a:extLst>
               <a:ext uri="{FF2B5EF4-FFF2-40B4-BE49-F238E27FC236}">
-                <a16:creationId xmlns:a16="http://schemas.microsoft.com/office/drawing/2014/main" id="{DFAB838D-DCCA-31B0-E3A3-E4ADE6085758}"/>
+                <a16:creationId xmlns:a16="http://schemas.microsoft.com/office/drawing/2014/main" id="{E1741950-50AD-C3EC-49E2-EFC1263B192C}"/>
               </a:ext>
             </a:extLst>
           </p:cNvPr>
@@ -15565,7 +15590,7 @@
           <p:cNvPr id="14" name="TextBox 13">
             <a:extLst>
               <a:ext uri="{FF2B5EF4-FFF2-40B4-BE49-F238E27FC236}">
-                <a16:creationId xmlns:a16="http://schemas.microsoft.com/office/drawing/2014/main" id="{01EE1D7C-C48B-F94C-FFF0-AB7BB2C7861B}"/>
+                <a16:creationId xmlns:a16="http://schemas.microsoft.com/office/drawing/2014/main" id="{DCC8F574-7F16-E888-F755-0CEAD8D17E34}"/>
               </a:ext>
             </a:extLst>
           </p:cNvPr>
@@ -15606,7 +15631,7 @@
           <p:cNvPr id="15" name="TextBox 14">
             <a:extLst>
               <a:ext uri="{FF2B5EF4-FFF2-40B4-BE49-F238E27FC236}">
-                <a16:creationId xmlns:a16="http://schemas.microsoft.com/office/drawing/2014/main" id="{A71C2359-3120-C1E5-2559-33AF4C947916}"/>
+                <a16:creationId xmlns:a16="http://schemas.microsoft.com/office/drawing/2014/main" id="{F8AFCD82-21A1-81EC-3426-C898A43F6A1F}"/>
               </a:ext>
             </a:extLst>
           </p:cNvPr>
@@ -15646,7 +15671,7 @@
           <p:cNvPr id="16" name="TextBox 15">
             <a:extLst>
               <a:ext uri="{FF2B5EF4-FFF2-40B4-BE49-F238E27FC236}">
-                <a16:creationId xmlns:a16="http://schemas.microsoft.com/office/drawing/2014/main" id="{4026A3AB-BF09-9170-3D62-A7A9A8927DA5}"/>
+                <a16:creationId xmlns:a16="http://schemas.microsoft.com/office/drawing/2014/main" id="{CBBC3903-9612-20D7-A2C8-0012F9C54163}"/>
               </a:ext>
             </a:extLst>
           </p:cNvPr>
@@ -15750,7 +15775,7 @@
           <p:cNvPr id="17" name="Rectangle: Rounded Corners 16">
             <a:extLst>
               <a:ext uri="{FF2B5EF4-FFF2-40B4-BE49-F238E27FC236}">
-                <a16:creationId xmlns:a16="http://schemas.microsoft.com/office/drawing/2014/main" id="{FDA96CA7-DE40-1E1D-E21D-3115526B8763}"/>
+                <a16:creationId xmlns:a16="http://schemas.microsoft.com/office/drawing/2014/main" id="{8B1BF13D-3D33-BA96-66EA-EECF48DC98B3}"/>
               </a:ext>
             </a:extLst>
           </p:cNvPr>
@@ -15818,7 +15843,7 @@
           <p:cNvPr id="19" name="Graphic 18" descr="message-square-text icon">
             <a:extLst>
               <a:ext uri="{FF2B5EF4-FFF2-40B4-BE49-F238E27FC236}">
-                <a16:creationId xmlns:a16="http://schemas.microsoft.com/office/drawing/2014/main" id="{DE378FFB-7462-8093-64C2-1A293B0B657D}"/>
+                <a16:creationId xmlns:a16="http://schemas.microsoft.com/office/drawing/2014/main" id="{AF2F8A49-CC87-5190-9A16-95685584FF79}"/>
               </a:ext>
             </a:extLst>
           </p:cNvPr>
@@ -15854,7 +15879,7 @@
           <p:cNvPr id="20" name="TextBox 19">
             <a:extLst>
               <a:ext uri="{FF2B5EF4-FFF2-40B4-BE49-F238E27FC236}">
-                <a16:creationId xmlns:a16="http://schemas.microsoft.com/office/drawing/2014/main" id="{1D24071F-1A17-EFCC-AA47-0ABF44DC2072}"/>
+                <a16:creationId xmlns:a16="http://schemas.microsoft.com/office/drawing/2014/main" id="{2A3F82FE-3C43-B3E7-D7FB-A90B36FC8B9C}"/>
               </a:ext>
             </a:extLst>
           </p:cNvPr>
@@ -15899,7 +15924,7 @@
           <p:cNvPr id="21" name="Isosceles Triangle 20">
             <a:extLst>
               <a:ext uri="{FF2B5EF4-FFF2-40B4-BE49-F238E27FC236}">
-                <a16:creationId xmlns:a16="http://schemas.microsoft.com/office/drawing/2014/main" id="{B2773618-16E6-DD66-1497-301D2B48AB72}"/>
+                <a16:creationId xmlns:a16="http://schemas.microsoft.com/office/drawing/2014/main" id="{DE06DBF2-0F56-6DA3-B7BF-906BBB06F145}"/>
               </a:ext>
             </a:extLst>
           </p:cNvPr>
@@ -15965,7 +15990,7 @@
           <p:cNvPr id="22" name="Rectangle: Rounded Corners 21">
             <a:extLst>
               <a:ext uri="{FF2B5EF4-FFF2-40B4-BE49-F238E27FC236}">
-                <a16:creationId xmlns:a16="http://schemas.microsoft.com/office/drawing/2014/main" id="{B65D3093-F16E-B556-2876-6DF8AC7BD9E6}"/>
+                <a16:creationId xmlns:a16="http://schemas.microsoft.com/office/drawing/2014/main" id="{22ACDFBF-9EC7-91C4-1C5D-7FF1D8854876}"/>
               </a:ext>
             </a:extLst>
           </p:cNvPr>
@@ -16033,7 +16058,7 @@
           <p:cNvPr id="24" name="Graphic 23" descr="scan-search icon">
             <a:extLst>
               <a:ext uri="{FF2B5EF4-FFF2-40B4-BE49-F238E27FC236}">
-                <a16:creationId xmlns:a16="http://schemas.microsoft.com/office/drawing/2014/main" id="{0DFD6B05-31AC-C5D3-7250-98EF00C63F2C}"/>
+                <a16:creationId xmlns:a16="http://schemas.microsoft.com/office/drawing/2014/main" id="{EA2F0C3A-965B-C64F-B1D7-FD486747E067}"/>
               </a:ext>
             </a:extLst>
           </p:cNvPr>
@@ -16069,7 +16094,7 @@
           <p:cNvPr id="25" name="TextBox 24">
             <a:extLst>
               <a:ext uri="{FF2B5EF4-FFF2-40B4-BE49-F238E27FC236}">
-                <a16:creationId xmlns:a16="http://schemas.microsoft.com/office/drawing/2014/main" id="{17A77867-69A6-305B-2F40-2A09B829DA0F}"/>
+                <a16:creationId xmlns:a16="http://schemas.microsoft.com/office/drawing/2014/main" id="{2A0C8B52-6944-938F-C95F-622FC5D3B2A7}"/>
               </a:ext>
             </a:extLst>
           </p:cNvPr>
@@ -16114,7 +16139,7 @@
           <p:cNvPr id="26" name="Isosceles Triangle 25">
             <a:extLst>
               <a:ext uri="{FF2B5EF4-FFF2-40B4-BE49-F238E27FC236}">
-                <a16:creationId xmlns:a16="http://schemas.microsoft.com/office/drawing/2014/main" id="{8DAC3C15-5045-4D0E-C484-9BCA0947368F}"/>
+                <a16:creationId xmlns:a16="http://schemas.microsoft.com/office/drawing/2014/main" id="{DC4FCF41-14D4-62B1-B497-A4005B9B8598}"/>
               </a:ext>
             </a:extLst>
           </p:cNvPr>
@@ -16180,7 +16205,7 @@
           <p:cNvPr id="27" name="Rectangle: Rounded Corners 26">
             <a:extLst>
               <a:ext uri="{FF2B5EF4-FFF2-40B4-BE49-F238E27FC236}">
-                <a16:creationId xmlns:a16="http://schemas.microsoft.com/office/drawing/2014/main" id="{972252F4-1BC3-9D12-BE58-302219BBA79F}"/>
+                <a16:creationId xmlns:a16="http://schemas.microsoft.com/office/drawing/2014/main" id="{05984A50-ED5D-16AD-3BF9-CF1DAB3A344B}"/>
               </a:ext>
             </a:extLst>
           </p:cNvPr>
@@ -16248,7 +16273,7 @@
           <p:cNvPr id="29" name="Graphic 28" descr="sliders-horizontal icon">
             <a:extLst>
               <a:ext uri="{FF2B5EF4-FFF2-40B4-BE49-F238E27FC236}">
-                <a16:creationId xmlns:a16="http://schemas.microsoft.com/office/drawing/2014/main" id="{026AC149-A4C8-0CDF-9D9E-F7D9959B0729}"/>
+                <a16:creationId xmlns:a16="http://schemas.microsoft.com/office/drawing/2014/main" id="{DE851DEF-3BEB-FB97-DE39-9A1143CEA05B}"/>
               </a:ext>
             </a:extLst>
           </p:cNvPr>
@@ -16284,7 +16309,7 @@
           <p:cNvPr id="30" name="TextBox 29">
             <a:extLst>
               <a:ext uri="{FF2B5EF4-FFF2-40B4-BE49-F238E27FC236}">
-                <a16:creationId xmlns:a16="http://schemas.microsoft.com/office/drawing/2014/main" id="{70E72181-53CB-BF9F-832A-37C68CF0A1FC}"/>
+                <a16:creationId xmlns:a16="http://schemas.microsoft.com/office/drawing/2014/main" id="{AC33DDE9-F35D-C2F2-2531-FC48EA46DFCB}"/>
               </a:ext>
             </a:extLst>
           </p:cNvPr>
@@ -16329,7 +16354,7 @@
           <p:cNvPr id="31" name="Isosceles Triangle 30">
             <a:extLst>
               <a:ext uri="{FF2B5EF4-FFF2-40B4-BE49-F238E27FC236}">
-                <a16:creationId xmlns:a16="http://schemas.microsoft.com/office/drawing/2014/main" id="{2974AC00-8B05-CC87-8582-6CC72F1EBF5C}"/>
+                <a16:creationId xmlns:a16="http://schemas.microsoft.com/office/drawing/2014/main" id="{0681B73D-E16B-307C-561D-467B597A6B8B}"/>
               </a:ext>
             </a:extLst>
           </p:cNvPr>
@@ -16395,7 +16420,7 @@
           <p:cNvPr id="32" name="Rectangle: Rounded Corners 31">
             <a:extLst>
               <a:ext uri="{FF2B5EF4-FFF2-40B4-BE49-F238E27FC236}">
-                <a16:creationId xmlns:a16="http://schemas.microsoft.com/office/drawing/2014/main" id="{8D7C32FA-81B4-2CC5-23AB-8871CEF0CFEB}"/>
+                <a16:creationId xmlns:a16="http://schemas.microsoft.com/office/drawing/2014/main" id="{3B17E00F-BA61-5025-E726-F51E315D78BE}"/>
               </a:ext>
             </a:extLst>
           </p:cNvPr>
@@ -16463,7 +16488,7 @@
           <p:cNvPr id="34" name="Graphic 33" descr="gauge icon">
             <a:extLst>
               <a:ext uri="{FF2B5EF4-FFF2-40B4-BE49-F238E27FC236}">
-                <a16:creationId xmlns:a16="http://schemas.microsoft.com/office/drawing/2014/main" id="{89B531D6-7D14-F51C-32D0-A061F126824D}"/>
+                <a16:creationId xmlns:a16="http://schemas.microsoft.com/office/drawing/2014/main" id="{066D2D65-5709-370D-CFAF-41F641A11DB3}"/>
               </a:ext>
             </a:extLst>
           </p:cNvPr>
@@ -16499,7 +16524,7 @@
           <p:cNvPr id="35" name="TextBox 34">
             <a:extLst>
               <a:ext uri="{FF2B5EF4-FFF2-40B4-BE49-F238E27FC236}">
-                <a16:creationId xmlns:a16="http://schemas.microsoft.com/office/drawing/2014/main" id="{642DA6CB-C678-C6E6-2B54-17AC649921CA}"/>
+                <a16:creationId xmlns:a16="http://schemas.microsoft.com/office/drawing/2014/main" id="{88085697-C3DA-E5E4-0FAC-97C9B08B67ED}"/>
               </a:ext>
             </a:extLst>
           </p:cNvPr>
@@ -16544,7 +16569,7 @@
           <p:cNvPr id="36" name="Isosceles Triangle 35">
             <a:extLst>
               <a:ext uri="{FF2B5EF4-FFF2-40B4-BE49-F238E27FC236}">
-                <a16:creationId xmlns:a16="http://schemas.microsoft.com/office/drawing/2014/main" id="{FD0A3726-8F6C-5DEF-C107-1094EFAD038B}"/>
+                <a16:creationId xmlns:a16="http://schemas.microsoft.com/office/drawing/2014/main" id="{FE1E696B-8379-98F9-84A1-DBAD54FD0FFD}"/>
               </a:ext>
             </a:extLst>
           </p:cNvPr>
@@ -16610,7 +16635,7 @@
           <p:cNvPr id="37" name="Rectangle: Rounded Corners 36">
             <a:extLst>
               <a:ext uri="{FF2B5EF4-FFF2-40B4-BE49-F238E27FC236}">
-                <a16:creationId xmlns:a16="http://schemas.microsoft.com/office/drawing/2014/main" id="{D3BCB661-FB77-33C2-82F1-607ECE3066A4}"/>
+                <a16:creationId xmlns:a16="http://schemas.microsoft.com/office/drawing/2014/main" id="{990CEEBD-3A94-4C97-F32A-4A6555A8AAA9}"/>
               </a:ext>
             </a:extLst>
           </p:cNvPr>
@@ -16678,7 +16703,7 @@
           <p:cNvPr id="39" name="Graphic 38" descr="circle-check icon">
             <a:extLst>
               <a:ext uri="{FF2B5EF4-FFF2-40B4-BE49-F238E27FC236}">
-                <a16:creationId xmlns:a16="http://schemas.microsoft.com/office/drawing/2014/main" id="{4BD2CA8E-EE7D-DABA-5F1D-568CF511026E}"/>
+                <a16:creationId xmlns:a16="http://schemas.microsoft.com/office/drawing/2014/main" id="{E376538F-9478-0311-FFC1-6A1E21749D93}"/>
               </a:ext>
             </a:extLst>
           </p:cNvPr>
@@ -16714,7 +16739,7 @@
           <p:cNvPr id="40" name="TextBox 39">
             <a:extLst>
               <a:ext uri="{FF2B5EF4-FFF2-40B4-BE49-F238E27FC236}">
-                <a16:creationId xmlns:a16="http://schemas.microsoft.com/office/drawing/2014/main" id="{1C34F81E-6047-A14B-9710-F76444191803}"/>
+                <a16:creationId xmlns:a16="http://schemas.microsoft.com/office/drawing/2014/main" id="{316C0727-4948-0A70-444E-DE9E22FA5A4A}"/>
               </a:ext>
             </a:extLst>
           </p:cNvPr>
@@ -16759,7 +16784,7 @@
           <p:cNvPr id="41" name="Isosceles Triangle 40">
             <a:extLst>
               <a:ext uri="{FF2B5EF4-FFF2-40B4-BE49-F238E27FC236}">
-                <a16:creationId xmlns:a16="http://schemas.microsoft.com/office/drawing/2014/main" id="{6A36626B-1634-9CC2-88FA-7F84D55D3981}"/>
+                <a16:creationId xmlns:a16="http://schemas.microsoft.com/office/drawing/2014/main" id="{8C9661EA-08E6-8CDF-F7CF-4236C31DA119}"/>
               </a:ext>
             </a:extLst>
           </p:cNvPr>
@@ -16825,7 +16850,7 @@
           <p:cNvPr id="42" name="Rectangle: Rounded Corners 41">
             <a:extLst>
               <a:ext uri="{FF2B5EF4-FFF2-40B4-BE49-F238E27FC236}">
-                <a16:creationId xmlns:a16="http://schemas.microsoft.com/office/drawing/2014/main" id="{62FDA6BF-50F7-F005-0EA2-A9E298C3D79A}"/>
+                <a16:creationId xmlns:a16="http://schemas.microsoft.com/office/drawing/2014/main" id="{744BFA9D-1A99-0A19-B19B-2DADCBBD7A87}"/>
               </a:ext>
             </a:extLst>
           </p:cNvPr>
@@ -16893,7 +16918,7 @@
           <p:cNvPr id="44" name="Graphic 43" descr="bot icon">
             <a:extLst>
               <a:ext uri="{FF2B5EF4-FFF2-40B4-BE49-F238E27FC236}">
-                <a16:creationId xmlns:a16="http://schemas.microsoft.com/office/drawing/2014/main" id="{036ACAC1-E152-3C8F-27B5-C18AB9FDF0DE}"/>
+                <a16:creationId xmlns:a16="http://schemas.microsoft.com/office/drawing/2014/main" id="{6929BD79-44B4-9DDA-A1C2-BFA7D54AA645}"/>
               </a:ext>
             </a:extLst>
           </p:cNvPr>
@@ -16929,7 +16954,7 @@
           <p:cNvPr id="45" name="TextBox 44">
             <a:extLst>
               <a:ext uri="{FF2B5EF4-FFF2-40B4-BE49-F238E27FC236}">
-                <a16:creationId xmlns:a16="http://schemas.microsoft.com/office/drawing/2014/main" id="{16187084-07D7-ADE1-2610-A1EB901E790A}"/>
+                <a16:creationId xmlns:a16="http://schemas.microsoft.com/office/drawing/2014/main" id="{72C64758-3AE5-8ED4-175B-5DB17C536308}"/>
               </a:ext>
             </a:extLst>
           </p:cNvPr>
@@ -16974,7 +16999,7 @@
           <p:cNvPr id="46" name="Rectangle: Rounded Corners 45">
             <a:extLst>
               <a:ext uri="{FF2B5EF4-FFF2-40B4-BE49-F238E27FC236}">
-                <a16:creationId xmlns:a16="http://schemas.microsoft.com/office/drawing/2014/main" id="{F2FECDA8-8219-9FD0-87F8-6D95EF10B901}"/>
+                <a16:creationId xmlns:a16="http://schemas.microsoft.com/office/drawing/2014/main" id="{89BBDA02-2F9D-53D8-9055-A5ACEC14BE39}"/>
               </a:ext>
             </a:extLst>
           </p:cNvPr>
@@ -17030,7 +17055,7 @@
           <p:cNvPr id="47" name="TextBox 46">
             <a:extLst>
               <a:ext uri="{FF2B5EF4-FFF2-40B4-BE49-F238E27FC236}">
-                <a16:creationId xmlns:a16="http://schemas.microsoft.com/office/drawing/2014/main" id="{504EB130-D5D4-12D8-6DBC-456BD3A0E518}"/>
+                <a16:creationId xmlns:a16="http://schemas.microsoft.com/office/drawing/2014/main" id="{435A5773-526B-A21B-C04D-91B411F3D899}"/>
               </a:ext>
             </a:extLst>
           </p:cNvPr>
@@ -17068,7 +17093,7 @@
           <p:cNvPr id="48" name="TextBox 47">
             <a:extLst>
               <a:ext uri="{FF2B5EF4-FFF2-40B4-BE49-F238E27FC236}">
-                <a16:creationId xmlns:a16="http://schemas.microsoft.com/office/drawing/2014/main" id="{E9AA22D0-8CCB-E377-6F1B-184D066B63E5}"/>
+                <a16:creationId xmlns:a16="http://schemas.microsoft.com/office/drawing/2014/main" id="{0B45AFCC-EF95-1370-58EB-A2D878B6B7C9}"/>
               </a:ext>
             </a:extLst>
           </p:cNvPr>
@@ -17255,7 +17280,7 @@
           <p:cNvPr id="49" name="Rectangle: Rounded Corners 48">
             <a:extLst>
               <a:ext uri="{FF2B5EF4-FFF2-40B4-BE49-F238E27FC236}">
-                <a16:creationId xmlns:a16="http://schemas.microsoft.com/office/drawing/2014/main" id="{AD6E3646-8343-2B1A-5E28-4B90B8918A97}"/>
+                <a16:creationId xmlns:a16="http://schemas.microsoft.com/office/drawing/2014/main" id="{F48C7E0A-2663-A4ED-5B56-76BE56467E5D}"/>
               </a:ext>
             </a:extLst>
           </p:cNvPr>
@@ -17311,7 +17336,7 @@
           <p:cNvPr id="50" name="TextBox 49">
             <a:extLst>
               <a:ext uri="{FF2B5EF4-FFF2-40B4-BE49-F238E27FC236}">
-                <a16:creationId xmlns:a16="http://schemas.microsoft.com/office/drawing/2014/main" id="{0ACDDE3B-DA0F-2897-B4C8-FDD909BB4EDB}"/>
+                <a16:creationId xmlns:a16="http://schemas.microsoft.com/office/drawing/2014/main" id="{7350A905-EDB5-97C4-7D82-CC05A988BA94}"/>
               </a:ext>
             </a:extLst>
           </p:cNvPr>
@@ -17349,7 +17374,7 @@
           <p:cNvPr id="51" name="TextBox 50">
             <a:extLst>
               <a:ext uri="{FF2B5EF4-FFF2-40B4-BE49-F238E27FC236}">
-                <a16:creationId xmlns:a16="http://schemas.microsoft.com/office/drawing/2014/main" id="{F31D17C0-3825-3B32-2A28-9F29278AB30F}"/>
+                <a16:creationId xmlns:a16="http://schemas.microsoft.com/office/drawing/2014/main" id="{BF23B1FF-C453-34BB-BA52-DE7035F7E095}"/>
               </a:ext>
             </a:extLst>
           </p:cNvPr>
@@ -17545,7 +17570,7 @@
           <p:cNvPr id="52" name="TextBox 51">
             <a:extLst>
               <a:ext uri="{FF2B5EF4-FFF2-40B4-BE49-F238E27FC236}">
-                <a16:creationId xmlns:a16="http://schemas.microsoft.com/office/drawing/2014/main" id="{E7D203A1-9FD6-C2BB-D38D-EEE6F8555B6C}"/>
+                <a16:creationId xmlns:a16="http://schemas.microsoft.com/office/drawing/2014/main" id="{37836BFB-A6FF-20FC-409B-54BCE4C51B7A}"/>
               </a:ext>
             </a:extLst>
           </p:cNvPr>
@@ -17585,7 +17610,7 @@
           <p:cNvPr id="53" name="Rectangle: Rounded Corners 52">
             <a:extLst>
               <a:ext uri="{FF2B5EF4-FFF2-40B4-BE49-F238E27FC236}">
-                <a16:creationId xmlns:a16="http://schemas.microsoft.com/office/drawing/2014/main" id="{13E8AB2D-5434-168B-9CFB-620D775F5F4A}"/>
+                <a16:creationId xmlns:a16="http://schemas.microsoft.com/office/drawing/2014/main" id="{A8E00237-A6F6-40D0-31B1-0A65DDBEB701}"/>
               </a:ext>
             </a:extLst>
           </p:cNvPr>
@@ -17641,7 +17666,7 @@
           <p:cNvPr id="54" name="TextBox 53">
             <a:extLst>
               <a:ext uri="{FF2B5EF4-FFF2-40B4-BE49-F238E27FC236}">
-                <a16:creationId xmlns:a16="http://schemas.microsoft.com/office/drawing/2014/main" id="{F42ACA93-9C42-C4CC-A42B-50ABB15AC5B0}"/>
+                <a16:creationId xmlns:a16="http://schemas.microsoft.com/office/drawing/2014/main" id="{4A997ED2-BC10-F4F8-2C88-5CFEBFC2A564}"/>
               </a:ext>
             </a:extLst>
           </p:cNvPr>
@@ -17681,7 +17706,7 @@
           <p:cNvPr id="55" name="Rectangle: Rounded Corners 54">
             <a:extLst>
               <a:ext uri="{FF2B5EF4-FFF2-40B4-BE49-F238E27FC236}">
-                <a16:creationId xmlns:a16="http://schemas.microsoft.com/office/drawing/2014/main" id="{42BB4DEE-25C6-82A2-6E0D-8BE27FA00FA4}"/>
+                <a16:creationId xmlns:a16="http://schemas.microsoft.com/office/drawing/2014/main" id="{C3EE4FC5-CFB0-C6E6-42FD-B0ABA135A82D}"/>
               </a:ext>
             </a:extLst>
           </p:cNvPr>
@@ -17757,7 +17782,7 @@
           <p:cNvPr id="56" name="TextBox 55">
             <a:extLst>
               <a:ext uri="{FF2B5EF4-FFF2-40B4-BE49-F238E27FC236}">
-                <a16:creationId xmlns:a16="http://schemas.microsoft.com/office/drawing/2014/main" id="{696F923C-8496-5521-C0FA-534E7B21F697}"/>
+                <a16:creationId xmlns:a16="http://schemas.microsoft.com/office/drawing/2014/main" id="{C32A55F4-C9AD-801C-297E-5DAB239ED0AA}"/>
               </a:ext>
             </a:extLst>
           </p:cNvPr>
@@ -17892,7 +17917,7 @@
           <p:cNvPr id="58" name="Picture 57" descr="P2Shield">
             <a:extLst>
               <a:ext uri="{FF2B5EF4-FFF2-40B4-BE49-F238E27FC236}">
-                <a16:creationId xmlns:a16="http://schemas.microsoft.com/office/drawing/2014/main" id="{7BE35234-439C-FBF9-E1F9-DABF138B2E51}"/>
+                <a16:creationId xmlns:a16="http://schemas.microsoft.com/office/drawing/2014/main" id="{ACCD472F-675D-39B5-3685-8B69293DFDA1}"/>
               </a:ext>
             </a:extLst>
           </p:cNvPr>
@@ -17922,7 +17947,7 @@
           <p:cNvPr id="59" name="Arrow: Right 58">
             <a:extLst>
               <a:ext uri="{FF2B5EF4-FFF2-40B4-BE49-F238E27FC236}">
-                <a16:creationId xmlns:a16="http://schemas.microsoft.com/office/drawing/2014/main" id="{4DF90C83-D842-D01A-65BD-83A004B10045}"/>
+                <a16:creationId xmlns:a16="http://schemas.microsoft.com/office/drawing/2014/main" id="{A69E2F50-0C91-EEC7-D8A0-B588AC029D6A}"/>
               </a:ext>
             </a:extLst>
           </p:cNvPr>
@@ -17988,7 +18013,7 @@
           <p:cNvPr id="60" name="Rectangle: Rounded Corners 59">
             <a:extLst>
               <a:ext uri="{FF2B5EF4-FFF2-40B4-BE49-F238E27FC236}">
-                <a16:creationId xmlns:a16="http://schemas.microsoft.com/office/drawing/2014/main" id="{8DBCEF69-E685-89F1-2D84-8C691F381984}"/>
+                <a16:creationId xmlns:a16="http://schemas.microsoft.com/office/drawing/2014/main" id="{60C4ED42-94A4-E4F1-52A1-3E6A5278E88B}"/>
               </a:ext>
             </a:extLst>
           </p:cNvPr>
@@ -18044,7 +18069,7 @@
           <p:cNvPr id="61" name="TextBox 60">
             <a:extLst>
               <a:ext uri="{FF2B5EF4-FFF2-40B4-BE49-F238E27FC236}">
-                <a16:creationId xmlns:a16="http://schemas.microsoft.com/office/drawing/2014/main" id="{ABDA2640-8DCC-89DB-DBC4-19EDAED0E438}"/>
+                <a16:creationId xmlns:a16="http://schemas.microsoft.com/office/drawing/2014/main" id="{AE5A7327-DB2E-6C61-5CD4-32C7DF0DFE34}"/>
               </a:ext>
             </a:extLst>
           </p:cNvPr>
@@ -18084,7 +18109,7 @@
           <p:cNvPr id="62" name="Rectangle: Rounded Corners 61">
             <a:extLst>
               <a:ext uri="{FF2B5EF4-FFF2-40B4-BE49-F238E27FC236}">
-                <a16:creationId xmlns:a16="http://schemas.microsoft.com/office/drawing/2014/main" id="{DB64A332-ABEB-09AA-22AE-906ECDE07E0E}"/>
+                <a16:creationId xmlns:a16="http://schemas.microsoft.com/office/drawing/2014/main" id="{DCF9E677-2C90-B012-C00C-DF58DA25ADFB}"/>
               </a:ext>
             </a:extLst>
           </p:cNvPr>
@@ -18160,7 +18185,7 @@
           <p:cNvPr id="63" name="TextBox 62">
             <a:extLst>
               <a:ext uri="{FF2B5EF4-FFF2-40B4-BE49-F238E27FC236}">
-                <a16:creationId xmlns:a16="http://schemas.microsoft.com/office/drawing/2014/main" id="{DEB4D613-1CDD-BB9D-22F5-0E49DA7213A4}"/>
+                <a16:creationId xmlns:a16="http://schemas.microsoft.com/office/drawing/2014/main" id="{96251889-7023-AF18-F929-8747678E742C}"/>
               </a:ext>
             </a:extLst>
           </p:cNvPr>
@@ -18313,7 +18338,7 @@
           <p:cNvPr id="64" name="TextBox 63">
             <a:extLst>
               <a:ext uri="{FF2B5EF4-FFF2-40B4-BE49-F238E27FC236}">
-                <a16:creationId xmlns:a16="http://schemas.microsoft.com/office/drawing/2014/main" id="{971F6C08-CB86-D935-FF91-50DFC8DE2361}"/>
+                <a16:creationId xmlns:a16="http://schemas.microsoft.com/office/drawing/2014/main" id="{E37AF8C6-A7EF-B8CC-12BF-68207D813D49}"/>
               </a:ext>
             </a:extLst>
           </p:cNvPr>
@@ -18673,7 +18698,7 @@
           <p:cNvPr id="2" name="TextBox 1">
             <a:extLst>
               <a:ext uri="{FF2B5EF4-FFF2-40B4-BE49-F238E27FC236}">
-                <a16:creationId xmlns:a16="http://schemas.microsoft.com/office/drawing/2014/main" id="{F3D7260A-6506-1DFE-1668-C0D0992ECA04}"/>
+                <a16:creationId xmlns:a16="http://schemas.microsoft.com/office/drawing/2014/main" id="{327CBF0E-ACCE-DD0F-2A5C-E27177A2BA64}"/>
               </a:ext>
             </a:extLst>
           </p:cNvPr>
@@ -18714,7 +18739,7 @@
           <p:cNvPr id="3" name="Rectangle: Rounded Corners 2">
             <a:extLst>
               <a:ext uri="{FF2B5EF4-FFF2-40B4-BE49-F238E27FC236}">
-                <a16:creationId xmlns:a16="http://schemas.microsoft.com/office/drawing/2014/main" id="{54D37EAF-C8A9-AEBB-82C5-3C77F6BE8B7D}"/>
+                <a16:creationId xmlns:a16="http://schemas.microsoft.com/office/drawing/2014/main" id="{80C1FEE0-324E-882C-798A-6CA074A85638}"/>
               </a:ext>
             </a:extLst>
           </p:cNvPr>
@@ -18770,7 +18795,7 @@
           <p:cNvPr id="4" name="Rectangle 3">
             <a:extLst>
               <a:ext uri="{FF2B5EF4-FFF2-40B4-BE49-F238E27FC236}">
-                <a16:creationId xmlns:a16="http://schemas.microsoft.com/office/drawing/2014/main" id="{DF9C7CCC-494F-5215-C490-F59E32F5BF83}"/>
+                <a16:creationId xmlns:a16="http://schemas.microsoft.com/office/drawing/2014/main" id="{ED0E72F0-EE3B-DE36-A660-7D5DF88AED27}"/>
               </a:ext>
             </a:extLst>
           </p:cNvPr>
@@ -18836,7 +18861,7 @@
           <p:cNvPr id="5" name="TextBox 4">
             <a:extLst>
               <a:ext uri="{FF2B5EF4-FFF2-40B4-BE49-F238E27FC236}">
-                <a16:creationId xmlns:a16="http://schemas.microsoft.com/office/drawing/2014/main" id="{F5360939-81CC-F757-9D7D-93AFE75D4E46}"/>
+                <a16:creationId xmlns:a16="http://schemas.microsoft.com/office/drawing/2014/main" id="{CB5645A4-4A48-6EA4-5822-DCC1BB3F7804}"/>
               </a:ext>
             </a:extLst>
           </p:cNvPr>
@@ -18873,7 +18898,7 @@
           <p:cNvPr id="6" name="Rectangle: Rounded Corners 5">
             <a:extLst>
               <a:ext uri="{FF2B5EF4-FFF2-40B4-BE49-F238E27FC236}">
-                <a16:creationId xmlns:a16="http://schemas.microsoft.com/office/drawing/2014/main" id="{A57F20E4-EEE3-1E29-FA09-7C87C0AD915A}"/>
+                <a16:creationId xmlns:a16="http://schemas.microsoft.com/office/drawing/2014/main" id="{720A3DF3-9CB7-C9F6-98C3-1FA42BD3518B}"/>
               </a:ext>
             </a:extLst>
           </p:cNvPr>
@@ -18941,7 +18966,7 @@
           <p:cNvPr id="8" name="Graphic 7" descr="message-square-text icon">
             <a:extLst>
               <a:ext uri="{FF2B5EF4-FFF2-40B4-BE49-F238E27FC236}">
-                <a16:creationId xmlns:a16="http://schemas.microsoft.com/office/drawing/2014/main" id="{25FFFFD0-628A-BDFB-8869-CCF55DD0451C}"/>
+                <a16:creationId xmlns:a16="http://schemas.microsoft.com/office/drawing/2014/main" id="{B9D05227-79F1-EB4D-4C1D-96A68FB55942}"/>
               </a:ext>
             </a:extLst>
           </p:cNvPr>
@@ -18977,7 +19002,7 @@
           <p:cNvPr id="9" name="TextBox 8">
             <a:extLst>
               <a:ext uri="{FF2B5EF4-FFF2-40B4-BE49-F238E27FC236}">
-                <a16:creationId xmlns:a16="http://schemas.microsoft.com/office/drawing/2014/main" id="{5ADCA8C0-B21A-4CBD-35A5-0DC0B473CFEC}"/>
+                <a16:creationId xmlns:a16="http://schemas.microsoft.com/office/drawing/2014/main" id="{AE800571-3DE1-7D59-255A-9A42E78DDA98}"/>
               </a:ext>
             </a:extLst>
           </p:cNvPr>
@@ -19018,7 +19043,7 @@
           <p:cNvPr id="10" name="TextBox 9">
             <a:extLst>
               <a:ext uri="{FF2B5EF4-FFF2-40B4-BE49-F238E27FC236}">
-                <a16:creationId xmlns:a16="http://schemas.microsoft.com/office/drawing/2014/main" id="{E335F7FB-6F26-CBDC-7572-2119E434E781}"/>
+                <a16:creationId xmlns:a16="http://schemas.microsoft.com/office/drawing/2014/main" id="{23EAF69F-D606-B94A-144D-57B8985FE26D}"/>
               </a:ext>
             </a:extLst>
           </p:cNvPr>
@@ -19063,7 +19088,7 @@
           <p:cNvPr id="11" name="Isosceles Triangle 10">
             <a:extLst>
               <a:ext uri="{FF2B5EF4-FFF2-40B4-BE49-F238E27FC236}">
-                <a16:creationId xmlns:a16="http://schemas.microsoft.com/office/drawing/2014/main" id="{03094E0E-1669-8571-D0B6-A7B5A9EFFF82}"/>
+                <a16:creationId xmlns:a16="http://schemas.microsoft.com/office/drawing/2014/main" id="{0EF3CD6D-6507-ECF9-2642-67746660AE4B}"/>
               </a:ext>
             </a:extLst>
           </p:cNvPr>
@@ -19129,7 +19154,7 @@
           <p:cNvPr id="12" name="Rectangle: Rounded Corners 11">
             <a:extLst>
               <a:ext uri="{FF2B5EF4-FFF2-40B4-BE49-F238E27FC236}">
-                <a16:creationId xmlns:a16="http://schemas.microsoft.com/office/drawing/2014/main" id="{3E47BC37-8CC4-7FEB-9ACD-E2523ED773C4}"/>
+                <a16:creationId xmlns:a16="http://schemas.microsoft.com/office/drawing/2014/main" id="{67AC3BB0-A939-0485-69EB-253CAC161854}"/>
               </a:ext>
             </a:extLst>
           </p:cNvPr>
@@ -19197,7 +19222,7 @@
           <p:cNvPr id="14" name="Graphic 13" descr="shield-check icon">
             <a:extLst>
               <a:ext uri="{FF2B5EF4-FFF2-40B4-BE49-F238E27FC236}">
-                <a16:creationId xmlns:a16="http://schemas.microsoft.com/office/drawing/2014/main" id="{2F61B103-ECEF-2E2E-BE3D-2843595EA27C}"/>
+                <a16:creationId xmlns:a16="http://schemas.microsoft.com/office/drawing/2014/main" id="{55ED8C7D-455E-80AB-3E73-2D81C8F5EED0}"/>
               </a:ext>
             </a:extLst>
           </p:cNvPr>
@@ -19233,7 +19258,7 @@
           <p:cNvPr id="15" name="TextBox 14">
             <a:extLst>
               <a:ext uri="{FF2B5EF4-FFF2-40B4-BE49-F238E27FC236}">
-                <a16:creationId xmlns:a16="http://schemas.microsoft.com/office/drawing/2014/main" id="{70A6A46E-D2C0-78B9-685F-709914E8EA94}"/>
+                <a16:creationId xmlns:a16="http://schemas.microsoft.com/office/drawing/2014/main" id="{F0648D2C-1BBC-1C30-1A19-533D9BD69822}"/>
               </a:ext>
             </a:extLst>
           </p:cNvPr>
@@ -19274,7 +19299,7 @@
           <p:cNvPr id="16" name="TextBox 15">
             <a:extLst>
               <a:ext uri="{FF2B5EF4-FFF2-40B4-BE49-F238E27FC236}">
-                <a16:creationId xmlns:a16="http://schemas.microsoft.com/office/drawing/2014/main" id="{B9D72E3F-D96A-4998-F7F7-8EB345E532F0}"/>
+                <a16:creationId xmlns:a16="http://schemas.microsoft.com/office/drawing/2014/main" id="{2336AFC6-BDD1-3427-082E-AF9A289A062C}"/>
               </a:ext>
             </a:extLst>
           </p:cNvPr>
@@ -19319,7 +19344,7 @@
           <p:cNvPr id="17" name="Isosceles Triangle 16">
             <a:extLst>
               <a:ext uri="{FF2B5EF4-FFF2-40B4-BE49-F238E27FC236}">
-                <a16:creationId xmlns:a16="http://schemas.microsoft.com/office/drawing/2014/main" id="{4EC0D6A4-D68D-D0F3-2BEA-A00B241A53E8}"/>
+                <a16:creationId xmlns:a16="http://schemas.microsoft.com/office/drawing/2014/main" id="{95895C03-6C65-668A-5322-846806AD054B}"/>
               </a:ext>
             </a:extLst>
           </p:cNvPr>
@@ -19385,7 +19410,7 @@
           <p:cNvPr id="18" name="Rectangle: Rounded Corners 17">
             <a:extLst>
               <a:ext uri="{FF2B5EF4-FFF2-40B4-BE49-F238E27FC236}">
-                <a16:creationId xmlns:a16="http://schemas.microsoft.com/office/drawing/2014/main" id="{80AEA5B1-F7B0-2EE2-BF7E-EB3897832923}"/>
+                <a16:creationId xmlns:a16="http://schemas.microsoft.com/office/drawing/2014/main" id="{08643BB9-01DC-C10F-C30E-F2B647088202}"/>
               </a:ext>
             </a:extLst>
           </p:cNvPr>
@@ -19442,7 +19467,7 @@
           <p:cNvPr id="19" name="TextBox 18">
             <a:extLst>
               <a:ext uri="{FF2B5EF4-FFF2-40B4-BE49-F238E27FC236}">
-                <a16:creationId xmlns:a16="http://schemas.microsoft.com/office/drawing/2014/main" id="{FADC8DE9-43FA-F8B9-354E-4AF52CCAFC65}"/>
+                <a16:creationId xmlns:a16="http://schemas.microsoft.com/office/drawing/2014/main" id="{6D8CDFEF-7AB4-4329-C99C-91664099E3CE}"/>
               </a:ext>
             </a:extLst>
           </p:cNvPr>
@@ -19482,7 +19507,7 @@
           <p:cNvPr id="20" name="Rectangle: Rounded Corners 19">
             <a:extLst>
               <a:ext uri="{FF2B5EF4-FFF2-40B4-BE49-F238E27FC236}">
-                <a16:creationId xmlns:a16="http://schemas.microsoft.com/office/drawing/2014/main" id="{CB5A5A00-5148-A72F-7434-882F5E65F0AF}"/>
+                <a16:creationId xmlns:a16="http://schemas.microsoft.com/office/drawing/2014/main" id="{45F122E0-8CE2-53AE-B8D3-A47EDC7E0BCD}"/>
               </a:ext>
             </a:extLst>
           </p:cNvPr>
@@ -19538,7 +19563,7 @@
           <p:cNvPr id="22" name="Graphic 21" descr="binary icon">
             <a:extLst>
               <a:ext uri="{FF2B5EF4-FFF2-40B4-BE49-F238E27FC236}">
-                <a16:creationId xmlns:a16="http://schemas.microsoft.com/office/drawing/2014/main" id="{82750ADC-6D05-100E-4FF7-31E272C2A81D}"/>
+                <a16:creationId xmlns:a16="http://schemas.microsoft.com/office/drawing/2014/main" id="{36413CEA-43B0-1A06-3C25-9390A1827540}"/>
               </a:ext>
             </a:extLst>
           </p:cNvPr>
@@ -19574,7 +19599,7 @@
           <p:cNvPr id="23" name="TextBox 22">
             <a:extLst>
               <a:ext uri="{FF2B5EF4-FFF2-40B4-BE49-F238E27FC236}">
-                <a16:creationId xmlns:a16="http://schemas.microsoft.com/office/drawing/2014/main" id="{FC58CB2D-93DB-F601-B378-8AAD2B644176}"/>
+                <a16:creationId xmlns:a16="http://schemas.microsoft.com/office/drawing/2014/main" id="{43E85DF4-9FDF-E653-4D42-286066B14FD6}"/>
               </a:ext>
             </a:extLst>
           </p:cNvPr>
@@ -19614,7 +19639,7 @@
           <p:cNvPr id="24" name="TextBox 23">
             <a:extLst>
               <a:ext uri="{FF2B5EF4-FFF2-40B4-BE49-F238E27FC236}">
-                <a16:creationId xmlns:a16="http://schemas.microsoft.com/office/drawing/2014/main" id="{162038B7-7538-0CC5-6B63-053F6A3D1F3C}"/>
+                <a16:creationId xmlns:a16="http://schemas.microsoft.com/office/drawing/2014/main" id="{C562B12A-D8CA-F41C-A034-800446C1C3A8}"/>
               </a:ext>
             </a:extLst>
           </p:cNvPr>
@@ -19644,7 +19669,7 @@
                 </a:solidFill>
                 <a:latin typeface="Arial" panose="020B0604020202020204" pitchFamily="34" charset="0"/>
               </a:rPr>
-              <a:t>regex + checksums, 40+ secret formats</a:t>
+              <a:t>regex, checksums, 40+ secrets</a:t>
             </a:r>
           </a:p>
         </p:txBody>
@@ -19654,7 +19679,7 @@
           <p:cNvPr id="25" name="Rectangle: Rounded Corners 24">
             <a:extLst>
               <a:ext uri="{FF2B5EF4-FFF2-40B4-BE49-F238E27FC236}">
-                <a16:creationId xmlns:a16="http://schemas.microsoft.com/office/drawing/2014/main" id="{F3B930D6-AFFC-B954-A45E-94A1367B6727}"/>
+                <a16:creationId xmlns:a16="http://schemas.microsoft.com/office/drawing/2014/main" id="{5D328459-2F5B-9D58-553D-D7760C3D3296}"/>
               </a:ext>
             </a:extLst>
           </p:cNvPr>
@@ -19710,7 +19735,7 @@
           <p:cNvPr id="27" name="Graphic 26" descr="braces icon">
             <a:extLst>
               <a:ext uri="{FF2B5EF4-FFF2-40B4-BE49-F238E27FC236}">
-                <a16:creationId xmlns:a16="http://schemas.microsoft.com/office/drawing/2014/main" id="{9CE98327-D9BD-9F95-2E92-EE396FFEE2D0}"/>
+                <a16:creationId xmlns:a16="http://schemas.microsoft.com/office/drawing/2014/main" id="{D0205D78-2857-2BAF-36F5-096C1D4BD1F3}"/>
               </a:ext>
             </a:extLst>
           </p:cNvPr>
@@ -19746,7 +19771,7 @@
           <p:cNvPr id="28" name="TextBox 27">
             <a:extLst>
               <a:ext uri="{FF2B5EF4-FFF2-40B4-BE49-F238E27FC236}">
-                <a16:creationId xmlns:a16="http://schemas.microsoft.com/office/drawing/2014/main" id="{B5D419CB-F54A-283E-1FDC-108F9E70FA21}"/>
+                <a16:creationId xmlns:a16="http://schemas.microsoft.com/office/drawing/2014/main" id="{194FB34E-A121-790C-C063-C0FF3F20BD90}"/>
               </a:ext>
             </a:extLst>
           </p:cNvPr>
@@ -19786,7 +19811,7 @@
           <p:cNvPr id="29" name="TextBox 28">
             <a:extLst>
               <a:ext uri="{FF2B5EF4-FFF2-40B4-BE49-F238E27FC236}">
-                <a16:creationId xmlns:a16="http://schemas.microsoft.com/office/drawing/2014/main" id="{FC81F320-50DB-74CB-8FDC-18A53F1226D1}"/>
+                <a16:creationId xmlns:a16="http://schemas.microsoft.com/office/drawing/2014/main" id="{59814077-A8B5-0DAE-39F1-FE8E478CD633}"/>
               </a:ext>
             </a:extLst>
           </p:cNvPr>
@@ -19826,7 +19851,7 @@
           <p:cNvPr id="30" name="Rectangle: Rounded Corners 29">
             <a:extLst>
               <a:ext uri="{FF2B5EF4-FFF2-40B4-BE49-F238E27FC236}">
-                <a16:creationId xmlns:a16="http://schemas.microsoft.com/office/drawing/2014/main" id="{6F38BD10-CE1E-87E8-1E98-82CAB10F7982}"/>
+                <a16:creationId xmlns:a16="http://schemas.microsoft.com/office/drawing/2014/main" id="{879EAA6C-FD62-3523-0ED9-0DF6399D38C3}"/>
               </a:ext>
             </a:extLst>
           </p:cNvPr>
@@ -19882,7 +19907,7 @@
           <p:cNvPr id="32" name="Graphic 31" descr="file-search icon">
             <a:extLst>
               <a:ext uri="{FF2B5EF4-FFF2-40B4-BE49-F238E27FC236}">
-                <a16:creationId xmlns:a16="http://schemas.microsoft.com/office/drawing/2014/main" id="{CD185946-D266-BDE3-15C1-21ECD9D1F8A0}"/>
+                <a16:creationId xmlns:a16="http://schemas.microsoft.com/office/drawing/2014/main" id="{C845219D-B520-3F30-38DB-59A94C5C626B}"/>
               </a:ext>
             </a:extLst>
           </p:cNvPr>
@@ -19918,7 +19943,7 @@
           <p:cNvPr id="33" name="TextBox 32">
             <a:extLst>
               <a:ext uri="{FF2B5EF4-FFF2-40B4-BE49-F238E27FC236}">
-                <a16:creationId xmlns:a16="http://schemas.microsoft.com/office/drawing/2014/main" id="{8E165B51-CFBF-5354-A48D-7820C492838E}"/>
+                <a16:creationId xmlns:a16="http://schemas.microsoft.com/office/drawing/2014/main" id="{0048752E-A8C0-8D6D-6C82-14C4F977A975}"/>
               </a:ext>
             </a:extLst>
           </p:cNvPr>
@@ -19958,7 +19983,7 @@
           <p:cNvPr id="34" name="TextBox 33">
             <a:extLst>
               <a:ext uri="{FF2B5EF4-FFF2-40B4-BE49-F238E27FC236}">
-                <a16:creationId xmlns:a16="http://schemas.microsoft.com/office/drawing/2014/main" id="{5004E3B0-1BCA-68E8-2E52-B937B6BF1B7D}"/>
+                <a16:creationId xmlns:a16="http://schemas.microsoft.com/office/drawing/2014/main" id="{EDEE655E-3DFF-BB61-7313-75CB01197706}"/>
               </a:ext>
             </a:extLst>
           </p:cNvPr>
@@ -19998,7 +20023,7 @@
           <p:cNvPr id="35" name="Rectangle: Rounded Corners 34">
             <a:extLst>
               <a:ext uri="{FF2B5EF4-FFF2-40B4-BE49-F238E27FC236}">
-                <a16:creationId xmlns:a16="http://schemas.microsoft.com/office/drawing/2014/main" id="{CAD33EA2-0627-E13C-63A2-54757F01F5D0}"/>
+                <a16:creationId xmlns:a16="http://schemas.microsoft.com/office/drawing/2014/main" id="{BEE1B260-86C3-A4E0-2144-8A4AF42520FA}"/>
               </a:ext>
             </a:extLst>
           </p:cNvPr>
@@ -20054,7 +20079,7 @@
           <p:cNvPr id="37" name="Graphic 36" descr="sparkles icon">
             <a:extLst>
               <a:ext uri="{FF2B5EF4-FFF2-40B4-BE49-F238E27FC236}">
-                <a16:creationId xmlns:a16="http://schemas.microsoft.com/office/drawing/2014/main" id="{F41739C2-05C9-C251-6C4F-0F75E4C58F84}"/>
+                <a16:creationId xmlns:a16="http://schemas.microsoft.com/office/drawing/2014/main" id="{F3B44EA6-FED5-CA3C-FBD3-83710E59E224}"/>
               </a:ext>
             </a:extLst>
           </p:cNvPr>
@@ -20090,7 +20115,7 @@
           <p:cNvPr id="38" name="TextBox 37">
             <a:extLst>
               <a:ext uri="{FF2B5EF4-FFF2-40B4-BE49-F238E27FC236}">
-                <a16:creationId xmlns:a16="http://schemas.microsoft.com/office/drawing/2014/main" id="{36339330-9370-E459-8584-3B4A8F3691E9}"/>
+                <a16:creationId xmlns:a16="http://schemas.microsoft.com/office/drawing/2014/main" id="{DB3EB206-DF7B-C74C-620C-8BBCF51AB28A}"/>
               </a:ext>
             </a:extLst>
           </p:cNvPr>
@@ -20130,7 +20155,7 @@
           <p:cNvPr id="39" name="TextBox 38">
             <a:extLst>
               <a:ext uri="{FF2B5EF4-FFF2-40B4-BE49-F238E27FC236}">
-                <a16:creationId xmlns:a16="http://schemas.microsoft.com/office/drawing/2014/main" id="{8EC880B0-5F2B-3829-D2AA-0783896CD1F7}"/>
+                <a16:creationId xmlns:a16="http://schemas.microsoft.com/office/drawing/2014/main" id="{FFB1022B-15F7-7265-7476-106F230EB712}"/>
               </a:ext>
             </a:extLst>
           </p:cNvPr>
@@ -20176,7 +20201,7 @@
           <p:cNvPr id="40" name="Straight Arrow Connector 39">
             <a:extLst>
               <a:ext uri="{FF2B5EF4-FFF2-40B4-BE49-F238E27FC236}">
-                <a16:creationId xmlns:a16="http://schemas.microsoft.com/office/drawing/2014/main" id="{1C5C7F1C-8866-F357-BF74-9114AC0F8C6F}"/>
+                <a16:creationId xmlns:a16="http://schemas.microsoft.com/office/drawing/2014/main" id="{AA18552A-951C-4B91-D079-923EAAD952BC}"/>
               </a:ext>
             </a:extLst>
           </p:cNvPr>
@@ -20217,7 +20242,7 @@
           <p:cNvPr id="41" name="Isosceles Triangle 40">
             <a:extLst>
               <a:ext uri="{FF2B5EF4-FFF2-40B4-BE49-F238E27FC236}">
-                <a16:creationId xmlns:a16="http://schemas.microsoft.com/office/drawing/2014/main" id="{F1B4437A-2BAF-8D8A-A0CE-71CF5B242EC5}"/>
+                <a16:creationId xmlns:a16="http://schemas.microsoft.com/office/drawing/2014/main" id="{1DBEE47A-890E-896A-4FFD-0F231E19A88D}"/>
               </a:ext>
             </a:extLst>
           </p:cNvPr>
@@ -20283,7 +20308,7 @@
           <p:cNvPr id="42" name="Rectangle: Rounded Corners 41">
             <a:extLst>
               <a:ext uri="{FF2B5EF4-FFF2-40B4-BE49-F238E27FC236}">
-                <a16:creationId xmlns:a16="http://schemas.microsoft.com/office/drawing/2014/main" id="{FDC587B9-44F1-EA3A-BAD7-D03639FE3E6F}"/>
+                <a16:creationId xmlns:a16="http://schemas.microsoft.com/office/drawing/2014/main" id="{B60A77A9-82D1-3C8C-2635-B95739945D00}"/>
               </a:ext>
             </a:extLst>
           </p:cNvPr>
@@ -20351,7 +20376,7 @@
           <p:cNvPr id="44" name="Graphic 43" descr="git-merge icon">
             <a:extLst>
               <a:ext uri="{FF2B5EF4-FFF2-40B4-BE49-F238E27FC236}">
-                <a16:creationId xmlns:a16="http://schemas.microsoft.com/office/drawing/2014/main" id="{406DFAF8-9CCD-0455-D305-FFF78883AA87}"/>
+                <a16:creationId xmlns:a16="http://schemas.microsoft.com/office/drawing/2014/main" id="{212D7B08-268A-50E6-0933-ADF773ABEB26}"/>
               </a:ext>
             </a:extLst>
           </p:cNvPr>
@@ -20387,7 +20412,7 @@
           <p:cNvPr id="45" name="TextBox 44">
             <a:extLst>
               <a:ext uri="{FF2B5EF4-FFF2-40B4-BE49-F238E27FC236}">
-                <a16:creationId xmlns:a16="http://schemas.microsoft.com/office/drawing/2014/main" id="{B7BDBA1C-6DA6-667D-5EF7-68516085C828}"/>
+                <a16:creationId xmlns:a16="http://schemas.microsoft.com/office/drawing/2014/main" id="{E71FB89A-BFF6-76B8-46A8-B9E9606142EC}"/>
               </a:ext>
             </a:extLst>
           </p:cNvPr>
@@ -20428,7 +20453,7 @@
           <p:cNvPr id="46" name="TextBox 45">
             <a:extLst>
               <a:ext uri="{FF2B5EF4-FFF2-40B4-BE49-F238E27FC236}">
-                <a16:creationId xmlns:a16="http://schemas.microsoft.com/office/drawing/2014/main" id="{76037DB3-F908-264F-167F-7A524E0D09C6}"/>
+                <a16:creationId xmlns:a16="http://schemas.microsoft.com/office/drawing/2014/main" id="{46AA3811-BFBA-4EEB-DA18-B8E6C5AD5660}"/>
               </a:ext>
             </a:extLst>
           </p:cNvPr>
@@ -20473,7 +20498,7 @@
           <p:cNvPr id="47" name="Isosceles Triangle 46">
             <a:extLst>
               <a:ext uri="{FF2B5EF4-FFF2-40B4-BE49-F238E27FC236}">
-                <a16:creationId xmlns:a16="http://schemas.microsoft.com/office/drawing/2014/main" id="{228681F7-35AD-9584-9093-0F21725994FB}"/>
+                <a16:creationId xmlns:a16="http://schemas.microsoft.com/office/drawing/2014/main" id="{6F79E460-125A-57D8-9FF1-152A97D03EE3}"/>
               </a:ext>
             </a:extLst>
           </p:cNvPr>
@@ -20539,7 +20564,7 @@
           <p:cNvPr id="48" name="Rectangle: Rounded Corners 47">
             <a:extLst>
               <a:ext uri="{FF2B5EF4-FFF2-40B4-BE49-F238E27FC236}">
-                <a16:creationId xmlns:a16="http://schemas.microsoft.com/office/drawing/2014/main" id="{B4007F23-4DA8-32BF-2EB4-A869DD3AB4DF}"/>
+                <a16:creationId xmlns:a16="http://schemas.microsoft.com/office/drawing/2014/main" id="{07F607C8-1B8B-DED7-A02F-A370220F4B0F}"/>
               </a:ext>
             </a:extLst>
           </p:cNvPr>
@@ -20607,7 +20632,7 @@
           <p:cNvPr id="50" name="Graphic 49" descr="sliders-horizontal icon">
             <a:extLst>
               <a:ext uri="{FF2B5EF4-FFF2-40B4-BE49-F238E27FC236}">
-                <a16:creationId xmlns:a16="http://schemas.microsoft.com/office/drawing/2014/main" id="{DD58BB02-9742-E494-0DBB-B310AB6BCF81}"/>
+                <a16:creationId xmlns:a16="http://schemas.microsoft.com/office/drawing/2014/main" id="{90C320E8-CA0E-899A-5869-2DB8483D40B0}"/>
               </a:ext>
             </a:extLst>
           </p:cNvPr>
@@ -20643,7 +20668,7 @@
           <p:cNvPr id="51" name="TextBox 50">
             <a:extLst>
               <a:ext uri="{FF2B5EF4-FFF2-40B4-BE49-F238E27FC236}">
-                <a16:creationId xmlns:a16="http://schemas.microsoft.com/office/drawing/2014/main" id="{DAC7369B-8E28-FAB4-3414-27190819004C}"/>
+                <a16:creationId xmlns:a16="http://schemas.microsoft.com/office/drawing/2014/main" id="{689E65FB-D875-32AE-42CD-AA2B9F917613}"/>
               </a:ext>
             </a:extLst>
           </p:cNvPr>
@@ -20684,7 +20709,7 @@
           <p:cNvPr id="52" name="TextBox 51">
             <a:extLst>
               <a:ext uri="{FF2B5EF4-FFF2-40B4-BE49-F238E27FC236}">
-                <a16:creationId xmlns:a16="http://schemas.microsoft.com/office/drawing/2014/main" id="{EDF264B8-C5C0-D3A9-203A-549F8D309569}"/>
+                <a16:creationId xmlns:a16="http://schemas.microsoft.com/office/drawing/2014/main" id="{EF350639-F2D5-30EF-2668-178189E6E1AF}"/>
               </a:ext>
             </a:extLst>
           </p:cNvPr>
@@ -20729,7 +20754,7 @@
           <p:cNvPr id="53" name="Isosceles Triangle 52">
             <a:extLst>
               <a:ext uri="{FF2B5EF4-FFF2-40B4-BE49-F238E27FC236}">
-                <a16:creationId xmlns:a16="http://schemas.microsoft.com/office/drawing/2014/main" id="{BD5C126E-A88A-B6B3-947D-F4553E6AD193}"/>
+                <a16:creationId xmlns:a16="http://schemas.microsoft.com/office/drawing/2014/main" id="{F800D61B-6537-DDA0-1433-DAEDFF6E634A}"/>
               </a:ext>
             </a:extLst>
           </p:cNvPr>
@@ -20795,7 +20820,7 @@
           <p:cNvPr id="54" name="Rectangle: Rounded Corners 53">
             <a:extLst>
               <a:ext uri="{FF2B5EF4-FFF2-40B4-BE49-F238E27FC236}">
-                <a16:creationId xmlns:a16="http://schemas.microsoft.com/office/drawing/2014/main" id="{DCA019C7-A43E-9923-2ACB-EB556989EFEE}"/>
+                <a16:creationId xmlns:a16="http://schemas.microsoft.com/office/drawing/2014/main" id="{033BFED2-6D32-2F94-C4DA-D70270AD7614}"/>
               </a:ext>
             </a:extLst>
           </p:cNvPr>
@@ -20863,7 +20888,7 @@
           <p:cNvPr id="56" name="Graphic 55" descr="gauge icon">
             <a:extLst>
               <a:ext uri="{FF2B5EF4-FFF2-40B4-BE49-F238E27FC236}">
-                <a16:creationId xmlns:a16="http://schemas.microsoft.com/office/drawing/2014/main" id="{74179802-B269-1CBA-7325-10A6E9A6D51B}"/>
+                <a16:creationId xmlns:a16="http://schemas.microsoft.com/office/drawing/2014/main" id="{589B0A5F-4CCB-2E6E-6365-C51027F42F5D}"/>
               </a:ext>
             </a:extLst>
           </p:cNvPr>
@@ -20899,7 +20924,7 @@
           <p:cNvPr id="57" name="TextBox 56">
             <a:extLst>
               <a:ext uri="{FF2B5EF4-FFF2-40B4-BE49-F238E27FC236}">
-                <a16:creationId xmlns:a16="http://schemas.microsoft.com/office/drawing/2014/main" id="{1F75D568-BBB8-A3D3-7FD3-8821CAA35EBC}"/>
+                <a16:creationId xmlns:a16="http://schemas.microsoft.com/office/drawing/2014/main" id="{445D3EC8-384E-F2B6-9229-C5518610B12E}"/>
               </a:ext>
             </a:extLst>
           </p:cNvPr>
@@ -20940,7 +20965,7 @@
           <p:cNvPr id="58" name="TextBox 57">
             <a:extLst>
               <a:ext uri="{FF2B5EF4-FFF2-40B4-BE49-F238E27FC236}">
-                <a16:creationId xmlns:a16="http://schemas.microsoft.com/office/drawing/2014/main" id="{D90AA563-55DD-4362-88F1-3A91C5A3D0B7}"/>
+                <a16:creationId xmlns:a16="http://schemas.microsoft.com/office/drawing/2014/main" id="{28CCC0A5-00FC-A6E1-9795-BC5A9475B01C}"/>
               </a:ext>
             </a:extLst>
           </p:cNvPr>
@@ -20985,7 +21010,7 @@
           <p:cNvPr id="59" name="Isosceles Triangle 58">
             <a:extLst>
               <a:ext uri="{FF2B5EF4-FFF2-40B4-BE49-F238E27FC236}">
-                <a16:creationId xmlns:a16="http://schemas.microsoft.com/office/drawing/2014/main" id="{F2514A54-B5CF-2446-D388-710070E63524}"/>
+                <a16:creationId xmlns:a16="http://schemas.microsoft.com/office/drawing/2014/main" id="{FE2A593B-3D69-776F-6E3E-BBD6F8644275}"/>
               </a:ext>
             </a:extLst>
           </p:cNvPr>
@@ -21051,7 +21076,7 @@
           <p:cNvPr id="60" name="Rectangle: Rounded Corners 59">
             <a:extLst>
               <a:ext uri="{FF2B5EF4-FFF2-40B4-BE49-F238E27FC236}">
-                <a16:creationId xmlns:a16="http://schemas.microsoft.com/office/drawing/2014/main" id="{4D9C76B4-52AB-3FF5-47D3-6D87EFA7173F}"/>
+                <a16:creationId xmlns:a16="http://schemas.microsoft.com/office/drawing/2014/main" id="{451D241D-CC53-1293-5AC3-A0E7EC25F4D0}"/>
               </a:ext>
             </a:extLst>
           </p:cNvPr>
@@ -21119,7 +21144,7 @@
           <p:cNvPr id="62" name="Graphic 61" descr="eraser icon">
             <a:extLst>
               <a:ext uri="{FF2B5EF4-FFF2-40B4-BE49-F238E27FC236}">
-                <a16:creationId xmlns:a16="http://schemas.microsoft.com/office/drawing/2014/main" id="{27F07F55-7FC7-B114-ED98-78FECD2A3ACC}"/>
+                <a16:creationId xmlns:a16="http://schemas.microsoft.com/office/drawing/2014/main" id="{9A261FC2-C57B-BF06-9D52-95522ACAE290}"/>
               </a:ext>
             </a:extLst>
           </p:cNvPr>
@@ -21155,7 +21180,7 @@
           <p:cNvPr id="63" name="TextBox 62">
             <a:extLst>
               <a:ext uri="{FF2B5EF4-FFF2-40B4-BE49-F238E27FC236}">
-                <a16:creationId xmlns:a16="http://schemas.microsoft.com/office/drawing/2014/main" id="{DCC564F4-ACED-90DE-3BDA-C2CBE8B08E69}"/>
+                <a16:creationId xmlns:a16="http://schemas.microsoft.com/office/drawing/2014/main" id="{A8A106EC-61E4-A8F1-2F20-8CEEEADF3E2D}"/>
               </a:ext>
             </a:extLst>
           </p:cNvPr>
@@ -21196,7 +21221,7 @@
           <p:cNvPr id="64" name="TextBox 63">
             <a:extLst>
               <a:ext uri="{FF2B5EF4-FFF2-40B4-BE49-F238E27FC236}">
-                <a16:creationId xmlns:a16="http://schemas.microsoft.com/office/drawing/2014/main" id="{7CBD71EA-424C-3F11-3DA1-4028E8EFB841}"/>
+                <a16:creationId xmlns:a16="http://schemas.microsoft.com/office/drawing/2014/main" id="{9ADB9A82-7929-D5D0-A605-219EFA4AC004}"/>
               </a:ext>
             </a:extLst>
           </p:cNvPr>
@@ -21241,7 +21266,7 @@
           <p:cNvPr id="65" name="Isosceles Triangle 64">
             <a:extLst>
               <a:ext uri="{FF2B5EF4-FFF2-40B4-BE49-F238E27FC236}">
-                <a16:creationId xmlns:a16="http://schemas.microsoft.com/office/drawing/2014/main" id="{1A36BB99-27F6-9AC6-6698-37D84126377E}"/>
+                <a16:creationId xmlns:a16="http://schemas.microsoft.com/office/drawing/2014/main" id="{F01BDB4B-25F3-3B5B-86F5-04C51467212B}"/>
               </a:ext>
             </a:extLst>
           </p:cNvPr>
@@ -21307,7 +21332,7 @@
           <p:cNvPr id="66" name="Rectangle: Rounded Corners 65">
             <a:extLst>
               <a:ext uri="{FF2B5EF4-FFF2-40B4-BE49-F238E27FC236}">
-                <a16:creationId xmlns:a16="http://schemas.microsoft.com/office/drawing/2014/main" id="{F38ABF72-3D92-15D6-8A6C-94B6BF9A6EF7}"/>
+                <a16:creationId xmlns:a16="http://schemas.microsoft.com/office/drawing/2014/main" id="{B7C2341F-7BF1-E444-2B84-E8995760B3C2}"/>
               </a:ext>
             </a:extLst>
           </p:cNvPr>
@@ -21375,7 +21400,7 @@
           <p:cNvPr id="68" name="Graphic 67" descr="undo-2 icon">
             <a:extLst>
               <a:ext uri="{FF2B5EF4-FFF2-40B4-BE49-F238E27FC236}">
-                <a16:creationId xmlns:a16="http://schemas.microsoft.com/office/drawing/2014/main" id="{AC6AA35A-8199-150D-62C2-C4DE23BE1417}"/>
+                <a16:creationId xmlns:a16="http://schemas.microsoft.com/office/drawing/2014/main" id="{6D9E15EF-9EF6-BCE0-CD87-4D3CBA5EE3EA}"/>
               </a:ext>
             </a:extLst>
           </p:cNvPr>
@@ -21411,7 +21436,7 @@
           <p:cNvPr id="69" name="TextBox 68">
             <a:extLst>
               <a:ext uri="{FF2B5EF4-FFF2-40B4-BE49-F238E27FC236}">
-                <a16:creationId xmlns:a16="http://schemas.microsoft.com/office/drawing/2014/main" id="{9BAA5D25-5668-E0D0-3CF7-A677F2E17122}"/>
+                <a16:creationId xmlns:a16="http://schemas.microsoft.com/office/drawing/2014/main" id="{2886098E-4BAB-EEAB-850B-400EBAED6685}"/>
               </a:ext>
             </a:extLst>
           </p:cNvPr>
@@ -21452,7 +21477,7 @@
           <p:cNvPr id="70" name="TextBox 69">
             <a:extLst>
               <a:ext uri="{FF2B5EF4-FFF2-40B4-BE49-F238E27FC236}">
-                <a16:creationId xmlns:a16="http://schemas.microsoft.com/office/drawing/2014/main" id="{A5140735-0E66-D714-2A73-388D101A2655}"/>
+                <a16:creationId xmlns:a16="http://schemas.microsoft.com/office/drawing/2014/main" id="{8B0C44C4-7099-0C46-D10E-D2EF13F4CBD7}"/>
               </a:ext>
             </a:extLst>
           </p:cNvPr>
@@ -21497,7 +21522,7 @@
           <p:cNvPr id="71" name="Isosceles Triangle 70">
             <a:extLst>
               <a:ext uri="{FF2B5EF4-FFF2-40B4-BE49-F238E27FC236}">
-                <a16:creationId xmlns:a16="http://schemas.microsoft.com/office/drawing/2014/main" id="{DD784353-8895-064E-4A3F-7E0837AB1155}"/>
+                <a16:creationId xmlns:a16="http://schemas.microsoft.com/office/drawing/2014/main" id="{319F2A83-73AA-2E62-8D4D-320C5350BA47}"/>
               </a:ext>
             </a:extLst>
           </p:cNvPr>
@@ -21563,7 +21588,7 @@
           <p:cNvPr id="72" name="Rectangle: Rounded Corners 71">
             <a:extLst>
               <a:ext uri="{FF2B5EF4-FFF2-40B4-BE49-F238E27FC236}">
-                <a16:creationId xmlns:a16="http://schemas.microsoft.com/office/drawing/2014/main" id="{004959CF-B65B-7998-80B0-AC7E6C2429DC}"/>
+                <a16:creationId xmlns:a16="http://schemas.microsoft.com/office/drawing/2014/main" id="{8099EC01-FC9D-6238-23F2-B80E2D8356A3}"/>
               </a:ext>
             </a:extLst>
           </p:cNvPr>
@@ -21631,7 +21656,7 @@
           <p:cNvPr id="74" name="Graphic 73" descr="bot icon">
             <a:extLst>
               <a:ext uri="{FF2B5EF4-FFF2-40B4-BE49-F238E27FC236}">
-                <a16:creationId xmlns:a16="http://schemas.microsoft.com/office/drawing/2014/main" id="{143EAFB2-515C-83DC-6E98-5C298F2368CD}"/>
+                <a16:creationId xmlns:a16="http://schemas.microsoft.com/office/drawing/2014/main" id="{1657D261-8861-7C65-1A1C-65D9E835919E}"/>
               </a:ext>
             </a:extLst>
           </p:cNvPr>
@@ -21667,7 +21692,7 @@
           <p:cNvPr id="75" name="TextBox 74">
             <a:extLst>
               <a:ext uri="{FF2B5EF4-FFF2-40B4-BE49-F238E27FC236}">
-                <a16:creationId xmlns:a16="http://schemas.microsoft.com/office/drawing/2014/main" id="{88D17CE9-D622-AC78-BD09-9062833B9C60}"/>
+                <a16:creationId xmlns:a16="http://schemas.microsoft.com/office/drawing/2014/main" id="{8397C179-3A3D-EB92-A4C6-66190FFF7764}"/>
               </a:ext>
             </a:extLst>
           </p:cNvPr>
@@ -21708,7 +21733,7 @@
           <p:cNvPr id="76" name="TextBox 75">
             <a:extLst>
               <a:ext uri="{FF2B5EF4-FFF2-40B4-BE49-F238E27FC236}">
-                <a16:creationId xmlns:a16="http://schemas.microsoft.com/office/drawing/2014/main" id="{4671EAD9-1C85-9E4B-19B7-E0D9C5CB2434}"/>
+                <a16:creationId xmlns:a16="http://schemas.microsoft.com/office/drawing/2014/main" id="{405A4382-17F5-470C-39FD-46DD3A8A01D6}"/>
               </a:ext>
             </a:extLst>
           </p:cNvPr>
@@ -21753,7 +21778,7 @@
           <p:cNvPr id="77" name="Rectangle: Rounded Corners 76">
             <a:extLst>
               <a:ext uri="{FF2B5EF4-FFF2-40B4-BE49-F238E27FC236}">
-                <a16:creationId xmlns:a16="http://schemas.microsoft.com/office/drawing/2014/main" id="{B4F4FE40-5C89-35B4-FC9E-4AB49B95474A}"/>
+                <a16:creationId xmlns:a16="http://schemas.microsoft.com/office/drawing/2014/main" id="{ED786E21-84B3-3CA3-5179-C73FD1F6A6F3}"/>
               </a:ext>
             </a:extLst>
           </p:cNvPr>
@@ -21809,7 +21834,7 @@
           <p:cNvPr id="78" name="TextBox 77">
             <a:extLst>
               <a:ext uri="{FF2B5EF4-FFF2-40B4-BE49-F238E27FC236}">
-                <a16:creationId xmlns:a16="http://schemas.microsoft.com/office/drawing/2014/main" id="{778E7265-64F7-16EC-0DE5-E1DA933F9533}"/>
+                <a16:creationId xmlns:a16="http://schemas.microsoft.com/office/drawing/2014/main" id="{8A98D96C-D27F-0EDD-9445-545FA24CCD3D}"/>
               </a:ext>
             </a:extLst>
           </p:cNvPr>
@@ -21850,7 +21875,7 @@
           <p:cNvPr id="79" name="Rectangle: Rounded Corners 78">
             <a:extLst>
               <a:ext uri="{FF2B5EF4-FFF2-40B4-BE49-F238E27FC236}">
-                <a16:creationId xmlns:a16="http://schemas.microsoft.com/office/drawing/2014/main" id="{7D121030-BF5F-FABC-591A-CC40E6E53AA5}"/>
+                <a16:creationId xmlns:a16="http://schemas.microsoft.com/office/drawing/2014/main" id="{B1170AAB-1AAD-93DD-A106-62E155E220F2}"/>
               </a:ext>
             </a:extLst>
           </p:cNvPr>
@@ -21918,7 +21943,7 @@
           <p:cNvPr id="80" name="TextBox 79">
             <a:extLst>
               <a:ext uri="{FF2B5EF4-FFF2-40B4-BE49-F238E27FC236}">
-                <a16:creationId xmlns:a16="http://schemas.microsoft.com/office/drawing/2014/main" id="{A3FDA3CC-A3A8-574A-D911-5162C9FF6A44}"/>
+                <a16:creationId xmlns:a16="http://schemas.microsoft.com/office/drawing/2014/main" id="{F830E5E1-7477-1310-F30C-4F7F83B69B38}"/>
               </a:ext>
             </a:extLst>
           </p:cNvPr>
@@ -21958,7 +21983,7 @@
           <p:cNvPr id="81" name="TextBox 80">
             <a:extLst>
               <a:ext uri="{FF2B5EF4-FFF2-40B4-BE49-F238E27FC236}">
-                <a16:creationId xmlns:a16="http://schemas.microsoft.com/office/drawing/2014/main" id="{ABC1CA04-8E8E-2A05-8B94-B8CE0D001055}"/>
+                <a16:creationId xmlns:a16="http://schemas.microsoft.com/office/drawing/2014/main" id="{6B3D2D07-E6C9-239D-B1CF-DA082E700013}"/>
               </a:ext>
             </a:extLst>
           </p:cNvPr>
@@ -21998,7 +22023,7 @@
           <p:cNvPr id="82" name="Rectangle: Rounded Corners 81">
             <a:extLst>
               <a:ext uri="{FF2B5EF4-FFF2-40B4-BE49-F238E27FC236}">
-                <a16:creationId xmlns:a16="http://schemas.microsoft.com/office/drawing/2014/main" id="{230ADF96-6E70-9442-BD7F-B407975047A9}"/>
+                <a16:creationId xmlns:a16="http://schemas.microsoft.com/office/drawing/2014/main" id="{93B60019-408C-46A8-7FB8-7DA31A8DCBB7}"/>
               </a:ext>
             </a:extLst>
           </p:cNvPr>
@@ -22066,7 +22091,7 @@
           <p:cNvPr id="83" name="TextBox 82">
             <a:extLst>
               <a:ext uri="{FF2B5EF4-FFF2-40B4-BE49-F238E27FC236}">
-                <a16:creationId xmlns:a16="http://schemas.microsoft.com/office/drawing/2014/main" id="{9DF8E61D-C6FB-2772-D781-2A2315DA5342}"/>
+                <a16:creationId xmlns:a16="http://schemas.microsoft.com/office/drawing/2014/main" id="{5E08A08B-518E-A40B-826E-DCF3D8EE75C8}"/>
               </a:ext>
             </a:extLst>
           </p:cNvPr>
@@ -22106,7 +22131,7 @@
           <p:cNvPr id="84" name="TextBox 83">
             <a:extLst>
               <a:ext uri="{FF2B5EF4-FFF2-40B4-BE49-F238E27FC236}">
-                <a16:creationId xmlns:a16="http://schemas.microsoft.com/office/drawing/2014/main" id="{A85D60F8-F38E-CE7A-9CBF-CA3A1F65E05C}"/>
+                <a16:creationId xmlns:a16="http://schemas.microsoft.com/office/drawing/2014/main" id="{E99AD283-BE32-DC50-32BB-5C829BBBB156}"/>
               </a:ext>
             </a:extLst>
           </p:cNvPr>
@@ -22146,7 +22171,7 @@
           <p:cNvPr id="85" name="Rectangle: Rounded Corners 84">
             <a:extLst>
               <a:ext uri="{FF2B5EF4-FFF2-40B4-BE49-F238E27FC236}">
-                <a16:creationId xmlns:a16="http://schemas.microsoft.com/office/drawing/2014/main" id="{40D8AD14-1CD2-E3B1-0E82-C753805C087E}"/>
+                <a16:creationId xmlns:a16="http://schemas.microsoft.com/office/drawing/2014/main" id="{548E7C1D-670A-972A-9D13-FC78B4CAC3FD}"/>
               </a:ext>
             </a:extLst>
           </p:cNvPr>
@@ -22214,7 +22239,7 @@
           <p:cNvPr id="86" name="TextBox 85">
             <a:extLst>
               <a:ext uri="{FF2B5EF4-FFF2-40B4-BE49-F238E27FC236}">
-                <a16:creationId xmlns:a16="http://schemas.microsoft.com/office/drawing/2014/main" id="{BF73BB3F-39EC-D9F6-B2E1-B65A97B8DFC6}"/>
+                <a16:creationId xmlns:a16="http://schemas.microsoft.com/office/drawing/2014/main" id="{8BDFB06D-2C14-D636-4F3C-ADC8219187AD}"/>
               </a:ext>
             </a:extLst>
           </p:cNvPr>
@@ -22254,7 +22279,7 @@
           <p:cNvPr id="87" name="TextBox 86">
             <a:extLst>
               <a:ext uri="{FF2B5EF4-FFF2-40B4-BE49-F238E27FC236}">
-                <a16:creationId xmlns:a16="http://schemas.microsoft.com/office/drawing/2014/main" id="{0E6780B8-5B50-26CE-8D26-946FCAFA6047}"/>
+                <a16:creationId xmlns:a16="http://schemas.microsoft.com/office/drawing/2014/main" id="{DD3E164D-64BE-4380-0234-7A47ACCFBF0F}"/>
               </a:ext>
             </a:extLst>
           </p:cNvPr>
@@ -22294,7 +22319,7 @@
           <p:cNvPr id="88" name="Rectangle: Rounded Corners 87">
             <a:extLst>
               <a:ext uri="{FF2B5EF4-FFF2-40B4-BE49-F238E27FC236}">
-                <a16:creationId xmlns:a16="http://schemas.microsoft.com/office/drawing/2014/main" id="{31D57D09-25F4-1B50-758F-5EE865AE338C}"/>
+                <a16:creationId xmlns:a16="http://schemas.microsoft.com/office/drawing/2014/main" id="{388F5736-0049-ABCB-11DD-5CBB4810D9E4}"/>
               </a:ext>
             </a:extLst>
           </p:cNvPr>
@@ -22362,7 +22387,7 @@
           <p:cNvPr id="89" name="TextBox 88">
             <a:extLst>
               <a:ext uri="{FF2B5EF4-FFF2-40B4-BE49-F238E27FC236}">
-                <a16:creationId xmlns:a16="http://schemas.microsoft.com/office/drawing/2014/main" id="{5BB27DAC-E584-D393-C1F7-1CCFF3DF848F}"/>
+                <a16:creationId xmlns:a16="http://schemas.microsoft.com/office/drawing/2014/main" id="{6DE6E4B0-89B3-E1B3-24D5-07A170E8524A}"/>
               </a:ext>
             </a:extLst>
           </p:cNvPr>
@@ -22402,7 +22427,7 @@
           <p:cNvPr id="90" name="TextBox 89">
             <a:extLst>
               <a:ext uri="{FF2B5EF4-FFF2-40B4-BE49-F238E27FC236}">
-                <a16:creationId xmlns:a16="http://schemas.microsoft.com/office/drawing/2014/main" id="{3DA617FE-6967-7338-32CB-E9AD88AF7E7F}"/>
+                <a16:creationId xmlns:a16="http://schemas.microsoft.com/office/drawing/2014/main" id="{C7B909FA-A268-2F12-2B61-EF6E1E05A5C2}"/>
               </a:ext>
             </a:extLst>
           </p:cNvPr>
@@ -22442,7 +22467,7 @@
           <p:cNvPr id="91" name="Rectangle: Rounded Corners 90">
             <a:extLst>
               <a:ext uri="{FF2B5EF4-FFF2-40B4-BE49-F238E27FC236}">
-                <a16:creationId xmlns:a16="http://schemas.microsoft.com/office/drawing/2014/main" id="{30F104A3-EFEE-02E4-4660-6F0F12010C6B}"/>
+                <a16:creationId xmlns:a16="http://schemas.microsoft.com/office/drawing/2014/main" id="{CAEC04B6-045E-8A1A-E6CD-373BB1A6C368}"/>
               </a:ext>
             </a:extLst>
           </p:cNvPr>
@@ -22510,7 +22535,7 @@
           <p:cNvPr id="92" name="TextBox 91">
             <a:extLst>
               <a:ext uri="{FF2B5EF4-FFF2-40B4-BE49-F238E27FC236}">
-                <a16:creationId xmlns:a16="http://schemas.microsoft.com/office/drawing/2014/main" id="{AAFCA265-DD70-4981-079F-BA95E59FAD88}"/>
+                <a16:creationId xmlns:a16="http://schemas.microsoft.com/office/drawing/2014/main" id="{4BA1EEE7-1693-21C9-97B4-06FCF7AA9C3C}"/>
               </a:ext>
             </a:extLst>
           </p:cNvPr>
@@ -22550,7 +22575,7 @@
           <p:cNvPr id="93" name="TextBox 92">
             <a:extLst>
               <a:ext uri="{FF2B5EF4-FFF2-40B4-BE49-F238E27FC236}">
-                <a16:creationId xmlns:a16="http://schemas.microsoft.com/office/drawing/2014/main" id="{420CC123-BFBD-EB26-E487-CC1D60F783D1}"/>
+                <a16:creationId xmlns:a16="http://schemas.microsoft.com/office/drawing/2014/main" id="{F534E62B-3586-0B72-65ED-10B161C79DD8}"/>
               </a:ext>
             </a:extLst>
           </p:cNvPr>
@@ -22590,7 +22615,7 @@
           <p:cNvPr id="94" name="Rectangle: Rounded Corners 93">
             <a:extLst>
               <a:ext uri="{FF2B5EF4-FFF2-40B4-BE49-F238E27FC236}">
-                <a16:creationId xmlns:a16="http://schemas.microsoft.com/office/drawing/2014/main" id="{891BCAD0-A005-7EE3-8E1C-DF5753026AEF}"/>
+                <a16:creationId xmlns:a16="http://schemas.microsoft.com/office/drawing/2014/main" id="{24BD98DF-EDA7-1407-1F8B-5247B456881A}"/>
               </a:ext>
             </a:extLst>
           </p:cNvPr>
@@ -22658,7 +22683,7 @@
           <p:cNvPr id="95" name="TextBox 94">
             <a:extLst>
               <a:ext uri="{FF2B5EF4-FFF2-40B4-BE49-F238E27FC236}">
-                <a16:creationId xmlns:a16="http://schemas.microsoft.com/office/drawing/2014/main" id="{3F550879-7632-A976-C24C-B2515086DA55}"/>
+                <a16:creationId xmlns:a16="http://schemas.microsoft.com/office/drawing/2014/main" id="{FDD26100-3047-DE51-EB72-1CE43F41128D}"/>
               </a:ext>
             </a:extLst>
           </p:cNvPr>
@@ -22698,7 +22723,7 @@
           <p:cNvPr id="96" name="TextBox 95">
             <a:extLst>
               <a:ext uri="{FF2B5EF4-FFF2-40B4-BE49-F238E27FC236}">
-                <a16:creationId xmlns:a16="http://schemas.microsoft.com/office/drawing/2014/main" id="{51B81DC3-D239-C4E9-A86C-D0155EB89AE3}"/>
+                <a16:creationId xmlns:a16="http://schemas.microsoft.com/office/drawing/2014/main" id="{7B66DC3C-F7F4-1655-23E5-B68E5413BC9A}"/>
               </a:ext>
             </a:extLst>
           </p:cNvPr>
@@ -22738,7 +22763,7 @@
           <p:cNvPr id="97" name="Rectangle: Rounded Corners 96">
             <a:extLst>
               <a:ext uri="{FF2B5EF4-FFF2-40B4-BE49-F238E27FC236}">
-                <a16:creationId xmlns:a16="http://schemas.microsoft.com/office/drawing/2014/main" id="{CD6B0D8C-3B8D-E83F-9B1A-A2AFB87E7FB0}"/>
+                <a16:creationId xmlns:a16="http://schemas.microsoft.com/office/drawing/2014/main" id="{158A25DF-E82B-69E1-F2D9-F1A838677FE9}"/>
               </a:ext>
             </a:extLst>
           </p:cNvPr>
@@ -22806,7 +22831,7 @@
           <p:cNvPr id="98" name="TextBox 97">
             <a:extLst>
               <a:ext uri="{FF2B5EF4-FFF2-40B4-BE49-F238E27FC236}">
-                <a16:creationId xmlns:a16="http://schemas.microsoft.com/office/drawing/2014/main" id="{DF078F58-3229-B1DA-FEAA-FA0A9CE66CF2}"/>
+                <a16:creationId xmlns:a16="http://schemas.microsoft.com/office/drawing/2014/main" id="{AB84DC0A-EA68-1B3F-D554-22267A68FBAA}"/>
               </a:ext>
             </a:extLst>
           </p:cNvPr>
@@ -22846,7 +22871,7 @@
           <p:cNvPr id="99" name="TextBox 98">
             <a:extLst>
               <a:ext uri="{FF2B5EF4-FFF2-40B4-BE49-F238E27FC236}">
-                <a16:creationId xmlns:a16="http://schemas.microsoft.com/office/drawing/2014/main" id="{FD1D6FA4-F9B7-00D0-F124-EE0BDAB19751}"/>
+                <a16:creationId xmlns:a16="http://schemas.microsoft.com/office/drawing/2014/main" id="{05218876-8164-B53B-0C97-5FF048EBA216}"/>
               </a:ext>
             </a:extLst>
           </p:cNvPr>
@@ -22886,7 +22911,7 @@
           <p:cNvPr id="100" name="Rectangle: Rounded Corners 99">
             <a:extLst>
               <a:ext uri="{FF2B5EF4-FFF2-40B4-BE49-F238E27FC236}">
-                <a16:creationId xmlns:a16="http://schemas.microsoft.com/office/drawing/2014/main" id="{5B95F46A-C4EB-4383-4816-E4FB00026684}"/>
+                <a16:creationId xmlns:a16="http://schemas.microsoft.com/office/drawing/2014/main" id="{E0903576-3134-A3B4-172B-0EE1796BD2D1}"/>
               </a:ext>
             </a:extLst>
           </p:cNvPr>
@@ -22954,7 +22979,7 @@
           <p:cNvPr id="101" name="TextBox 100">
             <a:extLst>
               <a:ext uri="{FF2B5EF4-FFF2-40B4-BE49-F238E27FC236}">
-                <a16:creationId xmlns:a16="http://schemas.microsoft.com/office/drawing/2014/main" id="{CB39B701-575E-D562-E806-19032176557E}"/>
+                <a16:creationId xmlns:a16="http://schemas.microsoft.com/office/drawing/2014/main" id="{BAC78604-6975-BDD7-B0E0-FC389DF17B6C}"/>
               </a:ext>
             </a:extLst>
           </p:cNvPr>
@@ -22994,7 +23019,7 @@
           <p:cNvPr id="102" name="TextBox 101">
             <a:extLst>
               <a:ext uri="{FF2B5EF4-FFF2-40B4-BE49-F238E27FC236}">
-                <a16:creationId xmlns:a16="http://schemas.microsoft.com/office/drawing/2014/main" id="{E895D116-7024-EE5C-F2F4-3414957890C0}"/>
+                <a16:creationId xmlns:a16="http://schemas.microsoft.com/office/drawing/2014/main" id="{A19B0F8C-716C-68BF-A513-7AF67AFAD34C}"/>
               </a:ext>
             </a:extLst>
           </p:cNvPr>
@@ -23034,7 +23059,7 @@
           <p:cNvPr id="103" name="Rectangle: Rounded Corners 102">
             <a:extLst>
               <a:ext uri="{FF2B5EF4-FFF2-40B4-BE49-F238E27FC236}">
-                <a16:creationId xmlns:a16="http://schemas.microsoft.com/office/drawing/2014/main" id="{89E9279C-8ED4-26EE-37F2-14C4FD65F3B2}"/>
+                <a16:creationId xmlns:a16="http://schemas.microsoft.com/office/drawing/2014/main" id="{8F5747D7-1ED0-1845-7D5B-A76740CEF095}"/>
               </a:ext>
             </a:extLst>
           </p:cNvPr>
@@ -23090,7 +23115,7 @@
           <p:cNvPr id="104" name="TextBox 103">
             <a:extLst>
               <a:ext uri="{FF2B5EF4-FFF2-40B4-BE49-F238E27FC236}">
-                <a16:creationId xmlns:a16="http://schemas.microsoft.com/office/drawing/2014/main" id="{1A5BB6D7-717A-04C2-8F2D-C6ABBF61228E}"/>
+                <a16:creationId xmlns:a16="http://schemas.microsoft.com/office/drawing/2014/main" id="{2888CC99-1CEA-56C4-D4AF-40930EDEDBBD}"/>
               </a:ext>
             </a:extLst>
           </p:cNvPr>
@@ -23131,7 +23156,7 @@
           <p:cNvPr id="105" name="Rectangle: Rounded Corners 104">
             <a:extLst>
               <a:ext uri="{FF2B5EF4-FFF2-40B4-BE49-F238E27FC236}">
-                <a16:creationId xmlns:a16="http://schemas.microsoft.com/office/drawing/2014/main" id="{9CBA48AD-A5CA-79A4-D822-38F18C6CCE17}"/>
+                <a16:creationId xmlns:a16="http://schemas.microsoft.com/office/drawing/2014/main" id="{750532D2-1F98-D788-3B8D-37F4E9DECB49}"/>
               </a:ext>
             </a:extLst>
           </p:cNvPr>
@@ -23207,7 +23232,7 @@
           <p:cNvPr id="106" name="TextBox 105">
             <a:extLst>
               <a:ext uri="{FF2B5EF4-FFF2-40B4-BE49-F238E27FC236}">
-                <a16:creationId xmlns:a16="http://schemas.microsoft.com/office/drawing/2014/main" id="{E499F0E7-735A-5504-EE32-8147104AA414}"/>
+                <a16:creationId xmlns:a16="http://schemas.microsoft.com/office/drawing/2014/main" id="{032266DF-D627-7A6A-1811-FFA3496A5121}"/>
               </a:ext>
             </a:extLst>
           </p:cNvPr>
@@ -23247,7 +23272,7 @@
           <p:cNvPr id="107" name="Rectangle: Rounded Corners 106">
             <a:extLst>
               <a:ext uri="{FF2B5EF4-FFF2-40B4-BE49-F238E27FC236}">
-                <a16:creationId xmlns:a16="http://schemas.microsoft.com/office/drawing/2014/main" id="{8E1CCCE5-0C0C-99E2-3722-A49BB143C01B}"/>
+                <a16:creationId xmlns:a16="http://schemas.microsoft.com/office/drawing/2014/main" id="{87C2FF51-4F4B-1CF0-F25A-6F1F90BBC4C9}"/>
               </a:ext>
             </a:extLst>
           </p:cNvPr>
@@ -23323,7 +23348,7 @@
           <p:cNvPr id="108" name="TextBox 107">
             <a:extLst>
               <a:ext uri="{FF2B5EF4-FFF2-40B4-BE49-F238E27FC236}">
-                <a16:creationId xmlns:a16="http://schemas.microsoft.com/office/drawing/2014/main" id="{8BDB90C5-71A9-5AD4-F55C-E2D11AEA08AF}"/>
+                <a16:creationId xmlns:a16="http://schemas.microsoft.com/office/drawing/2014/main" id="{BEC65B50-3083-DABA-3A09-DFD3EE904CC9}"/>
               </a:ext>
             </a:extLst>
           </p:cNvPr>
@@ -23363,7 +23388,7 @@
           <p:cNvPr id="109" name="Rectangle: Rounded Corners 108">
             <a:extLst>
               <a:ext uri="{FF2B5EF4-FFF2-40B4-BE49-F238E27FC236}">
-                <a16:creationId xmlns:a16="http://schemas.microsoft.com/office/drawing/2014/main" id="{1C8A989D-76EE-DA80-CC36-BC0E6D7F9DAD}"/>
+                <a16:creationId xmlns:a16="http://schemas.microsoft.com/office/drawing/2014/main" id="{C5DFFC93-9EAC-0E29-2475-37A9DBCEA2FF}"/>
               </a:ext>
             </a:extLst>
           </p:cNvPr>
@@ -23439,7 +23464,7 @@
           <p:cNvPr id="110" name="TextBox 109">
             <a:extLst>
               <a:ext uri="{FF2B5EF4-FFF2-40B4-BE49-F238E27FC236}">
-                <a16:creationId xmlns:a16="http://schemas.microsoft.com/office/drawing/2014/main" id="{FC67D9AD-A238-7068-BEA7-2C29E3144B8A}"/>
+                <a16:creationId xmlns:a16="http://schemas.microsoft.com/office/drawing/2014/main" id="{B807B426-09B3-247B-CC5B-07E2350CED11}"/>
               </a:ext>
             </a:extLst>
           </p:cNvPr>
@@ -23485,7 +23510,7 @@
           <p:cNvPr id="118" name="Rectangle: Rounded Corners 117">
             <a:extLst>
               <a:ext uri="{FF2B5EF4-FFF2-40B4-BE49-F238E27FC236}">
-                <a16:creationId xmlns:a16="http://schemas.microsoft.com/office/drawing/2014/main" id="{DDE3B6D7-6DC4-C334-42F6-3A95FD9DA5D5}"/>
+                <a16:creationId xmlns:a16="http://schemas.microsoft.com/office/drawing/2014/main" id="{2D912919-EBD7-1569-C248-A782C93726EF}"/>
               </a:ext>
             </a:extLst>
           </p:cNvPr>
@@ -23561,7 +23586,7 @@
           <p:cNvPr id="119" name="TextBox 118">
             <a:extLst>
               <a:ext uri="{FF2B5EF4-FFF2-40B4-BE49-F238E27FC236}">
-                <a16:creationId xmlns:a16="http://schemas.microsoft.com/office/drawing/2014/main" id="{8958DB01-B73E-E1FE-A122-A3FCBD37721A}"/>
+                <a16:creationId xmlns:a16="http://schemas.microsoft.com/office/drawing/2014/main" id="{9D5475B5-442F-DD28-0A77-FFA908905C0B}"/>
               </a:ext>
             </a:extLst>
           </p:cNvPr>
@@ -23601,7 +23626,7 @@
           <p:cNvPr id="120" name="Rectangle: Rounded Corners 119">
             <a:extLst>
               <a:ext uri="{FF2B5EF4-FFF2-40B4-BE49-F238E27FC236}">
-                <a16:creationId xmlns:a16="http://schemas.microsoft.com/office/drawing/2014/main" id="{DD06EAE0-5800-D8FA-0CFF-05E90CD0BB10}"/>
+                <a16:creationId xmlns:a16="http://schemas.microsoft.com/office/drawing/2014/main" id="{5612D266-70E6-7E07-F374-5F04DB8FBCF2}"/>
               </a:ext>
             </a:extLst>
           </p:cNvPr>
@@ -23677,7 +23702,7 @@
           <p:cNvPr id="121" name="TextBox 120">
             <a:extLst>
               <a:ext uri="{FF2B5EF4-FFF2-40B4-BE49-F238E27FC236}">
-                <a16:creationId xmlns:a16="http://schemas.microsoft.com/office/drawing/2014/main" id="{B0C0A7E4-DED4-2F1D-8EFD-A02D149F0879}"/>
+                <a16:creationId xmlns:a16="http://schemas.microsoft.com/office/drawing/2014/main" id="{75EFC90B-5381-55A6-9867-A6FFF5E6E37E}"/>
               </a:ext>
             </a:extLst>
           </p:cNvPr>
@@ -23717,7 +23742,7 @@
           <p:cNvPr id="122" name="Rectangle: Rounded Corners 121">
             <a:extLst>
               <a:ext uri="{FF2B5EF4-FFF2-40B4-BE49-F238E27FC236}">
-                <a16:creationId xmlns:a16="http://schemas.microsoft.com/office/drawing/2014/main" id="{AA1069B7-9A97-9590-9851-37A1944E5BB0}"/>
+                <a16:creationId xmlns:a16="http://schemas.microsoft.com/office/drawing/2014/main" id="{029CFAC7-C594-604F-0C0C-051C84494E52}"/>
               </a:ext>
             </a:extLst>
           </p:cNvPr>
@@ -23793,7 +23818,7 @@
           <p:cNvPr id="123" name="TextBox 122">
             <a:extLst>
               <a:ext uri="{FF2B5EF4-FFF2-40B4-BE49-F238E27FC236}">
-                <a16:creationId xmlns:a16="http://schemas.microsoft.com/office/drawing/2014/main" id="{17747BBC-803F-AB47-95DB-3C3D6D399AB6}"/>
+                <a16:creationId xmlns:a16="http://schemas.microsoft.com/office/drawing/2014/main" id="{21C0C72A-CACE-C778-E8CF-520489351561}"/>
               </a:ext>
             </a:extLst>
           </p:cNvPr>
@@ -23833,7 +23858,7 @@
           <p:cNvPr id="124" name="TextBox 123">
             <a:extLst>
               <a:ext uri="{FF2B5EF4-FFF2-40B4-BE49-F238E27FC236}">
-                <a16:creationId xmlns:a16="http://schemas.microsoft.com/office/drawing/2014/main" id="{C3460A8B-F014-0ADC-41D0-7D39E165AA94}"/>
+                <a16:creationId xmlns:a16="http://schemas.microsoft.com/office/drawing/2014/main" id="{BB3114EA-398A-8891-7983-FD5FA71CD6C4}"/>
               </a:ext>
             </a:extLst>
           </p:cNvPr>
@@ -23873,7 +23898,7 @@
           <p:cNvPr id="125" name="Rectangle: Rounded Corners 124">
             <a:extLst>
               <a:ext uri="{FF2B5EF4-FFF2-40B4-BE49-F238E27FC236}">
-                <a16:creationId xmlns:a16="http://schemas.microsoft.com/office/drawing/2014/main" id="{D02580CD-BBE0-CD4D-D9C6-B601BD93BDF8}"/>
+                <a16:creationId xmlns:a16="http://schemas.microsoft.com/office/drawing/2014/main" id="{26D1D5CE-F809-89A6-7F0A-3B90B3C1B8C3}"/>
               </a:ext>
             </a:extLst>
           </p:cNvPr>
@@ -23929,7 +23954,7 @@
           <p:cNvPr id="126" name="TextBox 125">
             <a:extLst>
               <a:ext uri="{FF2B5EF4-FFF2-40B4-BE49-F238E27FC236}">
-                <a16:creationId xmlns:a16="http://schemas.microsoft.com/office/drawing/2014/main" id="{A22437E2-687C-7C1F-315A-6CA689A95D0A}"/>
+                <a16:creationId xmlns:a16="http://schemas.microsoft.com/office/drawing/2014/main" id="{BC57271D-8563-5A25-95CC-929AA086EFA8}"/>
               </a:ext>
             </a:extLst>
           </p:cNvPr>
@@ -23970,7 +23995,7 @@
           <p:cNvPr id="128" name="Picture 127" descr="Screenshot of the P2Shield playground: a developer prompt with API keys and a password scores risk 100 (Critical) before and 4 (Low) after; the safe version shows SECRET_REMOVED placeholders.">
             <a:extLst>
               <a:ext uri="{FF2B5EF4-FFF2-40B4-BE49-F238E27FC236}">
-                <a16:creationId xmlns:a16="http://schemas.microsoft.com/office/drawing/2014/main" id="{B397AA1A-B0C0-9300-21DE-56E1F46936FF}"/>
+                <a16:creationId xmlns:a16="http://schemas.microsoft.com/office/drawing/2014/main" id="{54B317FD-F7DA-26AC-FDAB-B7480711F327}"/>
               </a:ext>
             </a:extLst>
           </p:cNvPr>
@@ -24005,7 +24030,7 @@
           <p:cNvPr id="129" name="TextBox 128">
             <a:extLst>
               <a:ext uri="{FF2B5EF4-FFF2-40B4-BE49-F238E27FC236}">
-                <a16:creationId xmlns:a16="http://schemas.microsoft.com/office/drawing/2014/main" id="{BFBAF753-8D41-C562-1BE4-E255AF7CBCCF}"/>
+                <a16:creationId xmlns:a16="http://schemas.microsoft.com/office/drawing/2014/main" id="{CCC37DF9-E443-AF03-B29A-DC5D1228F4E8}"/>
               </a:ext>
             </a:extLst>
           </p:cNvPr>
@@ -24544,7 +24569,7 @@
           <p:cNvPr id="2" name="TextBox 1">
             <a:extLst>
               <a:ext uri="{FF2B5EF4-FFF2-40B4-BE49-F238E27FC236}">
-                <a16:creationId xmlns:a16="http://schemas.microsoft.com/office/drawing/2014/main" id="{82704927-DCC8-6FAF-B5C7-1843B879627A}"/>
+                <a16:creationId xmlns:a16="http://schemas.microsoft.com/office/drawing/2014/main" id="{685C45F0-1167-08EB-8C08-9A13D75E31E8}"/>
               </a:ext>
             </a:extLst>
           </p:cNvPr>
@@ -24585,7 +24610,7 @@
           <p:cNvPr id="3" name="Rectangle: Rounded Corners 2">
             <a:extLst>
               <a:ext uri="{FF2B5EF4-FFF2-40B4-BE49-F238E27FC236}">
-                <a16:creationId xmlns:a16="http://schemas.microsoft.com/office/drawing/2014/main" id="{C8D84CAC-01C7-276A-B65A-D7286F4E0999}"/>
+                <a16:creationId xmlns:a16="http://schemas.microsoft.com/office/drawing/2014/main" id="{48742919-BC51-BCE6-D334-4B2B783A7C85}"/>
               </a:ext>
             </a:extLst>
           </p:cNvPr>
@@ -24662,7 +24687,7 @@
           <p:cNvPr id="4" name="TextBox 3">
             <a:extLst>
               <a:ext uri="{FF2B5EF4-FFF2-40B4-BE49-F238E27FC236}">
-                <a16:creationId xmlns:a16="http://schemas.microsoft.com/office/drawing/2014/main" id="{0C617785-CAF0-5520-3AC5-8A188EE42AD2}"/>
+                <a16:creationId xmlns:a16="http://schemas.microsoft.com/office/drawing/2014/main" id="{CC1E816F-2885-276C-17C6-E67A674B6A99}"/>
               </a:ext>
             </a:extLst>
           </p:cNvPr>
@@ -24699,7 +24724,7 @@
           <p:cNvPr id="5" name="Rectangle: Rounded Corners 4">
             <a:extLst>
               <a:ext uri="{FF2B5EF4-FFF2-40B4-BE49-F238E27FC236}">
-                <a16:creationId xmlns:a16="http://schemas.microsoft.com/office/drawing/2014/main" id="{691FEE8E-A1F1-1107-DBA5-947982C4A2B6}"/>
+                <a16:creationId xmlns:a16="http://schemas.microsoft.com/office/drawing/2014/main" id="{9D2BEC99-730D-9DC9-EDD0-76A220D6719B}"/>
               </a:ext>
             </a:extLst>
           </p:cNvPr>
@@ -24767,7 +24792,7 @@
           <p:cNvPr id="7" name="Graphic 6" descr="app-window icon">
             <a:extLst>
               <a:ext uri="{FF2B5EF4-FFF2-40B4-BE49-F238E27FC236}">
-                <a16:creationId xmlns:a16="http://schemas.microsoft.com/office/drawing/2014/main" id="{FECCB7A6-E835-B376-84D3-0789DC75494B}"/>
+                <a16:creationId xmlns:a16="http://schemas.microsoft.com/office/drawing/2014/main" id="{3BCA78D1-6AB4-9812-CD34-EF1391D69B6F}"/>
               </a:ext>
             </a:extLst>
           </p:cNvPr>
@@ -24803,7 +24828,7 @@
           <p:cNvPr id="8" name="TextBox 7">
             <a:extLst>
               <a:ext uri="{FF2B5EF4-FFF2-40B4-BE49-F238E27FC236}">
-                <a16:creationId xmlns:a16="http://schemas.microsoft.com/office/drawing/2014/main" id="{2B2243FE-2744-9E87-28EE-6BDBBCC98E7D}"/>
+                <a16:creationId xmlns:a16="http://schemas.microsoft.com/office/drawing/2014/main" id="{32A6B893-3F80-5C9C-DACF-E80830548189}"/>
               </a:ext>
             </a:extLst>
           </p:cNvPr>
@@ -24848,7 +24873,7 @@
           <p:cNvPr id="9" name="Arrow: Right 8">
             <a:extLst>
               <a:ext uri="{FF2B5EF4-FFF2-40B4-BE49-F238E27FC236}">
-                <a16:creationId xmlns:a16="http://schemas.microsoft.com/office/drawing/2014/main" id="{ADD0C282-7A99-81CB-9B2C-E12319B6E1ED}"/>
+                <a16:creationId xmlns:a16="http://schemas.microsoft.com/office/drawing/2014/main" id="{5B58907E-45D5-BF2B-AADF-F60E7C403A56}"/>
               </a:ext>
             </a:extLst>
           </p:cNvPr>
@@ -24914,7 +24939,7 @@
           <p:cNvPr id="10" name="Rectangle: Rounded Corners 9">
             <a:extLst>
               <a:ext uri="{FF2B5EF4-FFF2-40B4-BE49-F238E27FC236}">
-                <a16:creationId xmlns:a16="http://schemas.microsoft.com/office/drawing/2014/main" id="{84143E4E-88F1-B232-A140-27C5AD9277E6}"/>
+                <a16:creationId xmlns:a16="http://schemas.microsoft.com/office/drawing/2014/main" id="{3CC1BD5A-C59E-E4F5-39FB-7C5E18F312C7}"/>
               </a:ext>
             </a:extLst>
           </p:cNvPr>
@@ -24970,7 +24995,7 @@
           <p:cNvPr id="11" name="TextBox 10">
             <a:extLst>
               <a:ext uri="{FF2B5EF4-FFF2-40B4-BE49-F238E27FC236}">
-                <a16:creationId xmlns:a16="http://schemas.microsoft.com/office/drawing/2014/main" id="{EA4735E0-B9A2-8CB7-A0BF-3E111C1CC048}"/>
+                <a16:creationId xmlns:a16="http://schemas.microsoft.com/office/drawing/2014/main" id="{48EFC362-B6B4-C0CC-6854-8793693263E8}"/>
               </a:ext>
             </a:extLst>
           </p:cNvPr>
@@ -25015,7 +25040,7 @@
           <p:cNvPr id="12" name="Rectangle: Rounded Corners 11">
             <a:extLst>
               <a:ext uri="{FF2B5EF4-FFF2-40B4-BE49-F238E27FC236}">
-                <a16:creationId xmlns:a16="http://schemas.microsoft.com/office/drawing/2014/main" id="{B27CC050-6E15-A3FD-0046-A8BA2DF41A9E}"/>
+                <a16:creationId xmlns:a16="http://schemas.microsoft.com/office/drawing/2014/main" id="{BB085F5A-3231-81BC-0C29-D896DEA154EA}"/>
               </a:ext>
             </a:extLst>
           </p:cNvPr>
@@ -25083,7 +25108,7 @@
           <p:cNvPr id="14" name="Graphic 13" descr="triangle-alert icon">
             <a:extLst>
               <a:ext uri="{FF2B5EF4-FFF2-40B4-BE49-F238E27FC236}">
-                <a16:creationId xmlns:a16="http://schemas.microsoft.com/office/drawing/2014/main" id="{99D531C6-A769-20E0-9DBE-DBA1919DE88D}"/>
+                <a16:creationId xmlns:a16="http://schemas.microsoft.com/office/drawing/2014/main" id="{74EFCF8D-4357-CB1A-B030-51A4FD6D3A92}"/>
               </a:ext>
             </a:extLst>
           </p:cNvPr>
@@ -25119,7 +25144,7 @@
           <p:cNvPr id="15" name="TextBox 14">
             <a:extLst>
               <a:ext uri="{FF2B5EF4-FFF2-40B4-BE49-F238E27FC236}">
-                <a16:creationId xmlns:a16="http://schemas.microsoft.com/office/drawing/2014/main" id="{F12BACBE-2107-A562-87D3-8CF6BF883B46}"/>
+                <a16:creationId xmlns:a16="http://schemas.microsoft.com/office/drawing/2014/main" id="{2B4A120B-FD73-DC82-C369-1AE2EED360F8}"/>
               </a:ext>
             </a:extLst>
           </p:cNvPr>
@@ -25164,7 +25189,7 @@
           <p:cNvPr id="16" name="Arrow: Right 15">
             <a:extLst>
               <a:ext uri="{FF2B5EF4-FFF2-40B4-BE49-F238E27FC236}">
-                <a16:creationId xmlns:a16="http://schemas.microsoft.com/office/drawing/2014/main" id="{444249C6-DE11-799D-83B5-8AA55D4FDDA3}"/>
+                <a16:creationId xmlns:a16="http://schemas.microsoft.com/office/drawing/2014/main" id="{58606831-B231-0903-482C-3BAA1EFB9773}"/>
               </a:ext>
             </a:extLst>
           </p:cNvPr>
@@ -25230,7 +25255,7 @@
           <p:cNvPr id="17" name="Rectangle: Rounded Corners 16">
             <a:extLst>
               <a:ext uri="{FF2B5EF4-FFF2-40B4-BE49-F238E27FC236}">
-                <a16:creationId xmlns:a16="http://schemas.microsoft.com/office/drawing/2014/main" id="{2A7485BA-DC61-96B1-4F5E-92881B6E3A28}"/>
+                <a16:creationId xmlns:a16="http://schemas.microsoft.com/office/drawing/2014/main" id="{21FF0CA6-4EBD-3553-C872-CABCAFE7A149}"/>
               </a:ext>
             </a:extLst>
           </p:cNvPr>
@@ -25286,7 +25311,7 @@
           <p:cNvPr id="18" name="TextBox 17">
             <a:extLst>
               <a:ext uri="{FF2B5EF4-FFF2-40B4-BE49-F238E27FC236}">
-                <a16:creationId xmlns:a16="http://schemas.microsoft.com/office/drawing/2014/main" id="{13A52229-BEEB-6A0E-4ED0-F65BE6CEF7C1}"/>
+                <a16:creationId xmlns:a16="http://schemas.microsoft.com/office/drawing/2014/main" id="{D945BF69-A82B-605E-F5CF-CD4895BA10BD}"/>
               </a:ext>
             </a:extLst>
           </p:cNvPr>
@@ -25331,7 +25356,7 @@
           <p:cNvPr id="19" name="Rectangle: Rounded Corners 18">
             <a:extLst>
               <a:ext uri="{FF2B5EF4-FFF2-40B4-BE49-F238E27FC236}">
-                <a16:creationId xmlns:a16="http://schemas.microsoft.com/office/drawing/2014/main" id="{0333D939-6B96-9C45-9885-B27187341C9E}"/>
+                <a16:creationId xmlns:a16="http://schemas.microsoft.com/office/drawing/2014/main" id="{4D6B7188-20D5-4386-64D7-906A89935196}"/>
               </a:ext>
             </a:extLst>
           </p:cNvPr>
@@ -25399,7 +25424,7 @@
           <p:cNvPr id="21" name="Graphic 20" descr="bot icon">
             <a:extLst>
               <a:ext uri="{FF2B5EF4-FFF2-40B4-BE49-F238E27FC236}">
-                <a16:creationId xmlns:a16="http://schemas.microsoft.com/office/drawing/2014/main" id="{ECD8FA95-CFCA-49A6-9E5E-3AFB801B79D1}"/>
+                <a16:creationId xmlns:a16="http://schemas.microsoft.com/office/drawing/2014/main" id="{D6891C7A-BBE8-C7AF-622E-E961C80C3FFF}"/>
               </a:ext>
             </a:extLst>
           </p:cNvPr>
@@ -25435,7 +25460,7 @@
           <p:cNvPr id="22" name="TextBox 21">
             <a:extLst>
               <a:ext uri="{FF2B5EF4-FFF2-40B4-BE49-F238E27FC236}">
-                <a16:creationId xmlns:a16="http://schemas.microsoft.com/office/drawing/2014/main" id="{5D4BF802-D8AA-CC53-6792-DDF7284EFDC8}"/>
+                <a16:creationId xmlns:a16="http://schemas.microsoft.com/office/drawing/2014/main" id="{D3F83237-C88D-17D6-3A66-47C24490F2A7}"/>
               </a:ext>
             </a:extLst>
           </p:cNvPr>
@@ -25480,7 +25505,7 @@
           <p:cNvPr id="23" name="Arrow: Right 22">
             <a:extLst>
               <a:ext uri="{FF2B5EF4-FFF2-40B4-BE49-F238E27FC236}">
-                <a16:creationId xmlns:a16="http://schemas.microsoft.com/office/drawing/2014/main" id="{ABAACB90-8F24-75B2-04B8-831FDF5A65E4}"/>
+                <a16:creationId xmlns:a16="http://schemas.microsoft.com/office/drawing/2014/main" id="{B0891D97-5C61-ABE4-718F-F17E3CD404B7}"/>
               </a:ext>
             </a:extLst>
           </p:cNvPr>
@@ -25546,7 +25571,7 @@
           <p:cNvPr id="24" name="Rectangle: Rounded Corners 23">
             <a:extLst>
               <a:ext uri="{FF2B5EF4-FFF2-40B4-BE49-F238E27FC236}">
-                <a16:creationId xmlns:a16="http://schemas.microsoft.com/office/drawing/2014/main" id="{3A0934F5-E452-42A7-075E-CBA992DA7C6C}"/>
+                <a16:creationId xmlns:a16="http://schemas.microsoft.com/office/drawing/2014/main" id="{A5D3CBD4-D18B-0869-0EB5-0A253F092E8A}"/>
               </a:ext>
             </a:extLst>
           </p:cNvPr>
@@ -25602,7 +25627,7 @@
           <p:cNvPr id="25" name="TextBox 24">
             <a:extLst>
               <a:ext uri="{FF2B5EF4-FFF2-40B4-BE49-F238E27FC236}">
-                <a16:creationId xmlns:a16="http://schemas.microsoft.com/office/drawing/2014/main" id="{C19E08BB-AF9D-8A0F-1D2A-0C03B65AF0B3}"/>
+                <a16:creationId xmlns:a16="http://schemas.microsoft.com/office/drawing/2014/main" id="{87FF7F1A-BA1B-9B46-A79B-A86A4946EBDB}"/>
               </a:ext>
             </a:extLst>
           </p:cNvPr>
@@ -25647,7 +25672,7 @@
           <p:cNvPr id="26" name="Rectangle: Rounded Corners 25">
             <a:extLst>
               <a:ext uri="{FF2B5EF4-FFF2-40B4-BE49-F238E27FC236}">
-                <a16:creationId xmlns:a16="http://schemas.microsoft.com/office/drawing/2014/main" id="{8CD7BC01-906D-0289-41B8-3B0A52383641}"/>
+                <a16:creationId xmlns:a16="http://schemas.microsoft.com/office/drawing/2014/main" id="{65F320AC-BDE1-175A-9657-0E0F38238EDB}"/>
               </a:ext>
             </a:extLst>
           </p:cNvPr>
@@ -25715,7 +25740,7 @@
           <p:cNvPr id="28" name="Graphic 27" descr="cpu icon">
             <a:extLst>
               <a:ext uri="{FF2B5EF4-FFF2-40B4-BE49-F238E27FC236}">
-                <a16:creationId xmlns:a16="http://schemas.microsoft.com/office/drawing/2014/main" id="{D8BC38C6-1981-5AEB-A0FF-3E832D4DEE78}"/>
+                <a16:creationId xmlns:a16="http://schemas.microsoft.com/office/drawing/2014/main" id="{22ECA510-1E9C-0656-58BA-516F48C17F9F}"/>
               </a:ext>
             </a:extLst>
           </p:cNvPr>
@@ -25751,7 +25776,7 @@
           <p:cNvPr id="29" name="TextBox 28">
             <a:extLst>
               <a:ext uri="{FF2B5EF4-FFF2-40B4-BE49-F238E27FC236}">
-                <a16:creationId xmlns:a16="http://schemas.microsoft.com/office/drawing/2014/main" id="{34B00C25-10FC-3C0E-1D89-67C680034E90}"/>
+                <a16:creationId xmlns:a16="http://schemas.microsoft.com/office/drawing/2014/main" id="{3E6C2BBA-BF8A-9E47-13DD-95A3AA179126}"/>
               </a:ext>
             </a:extLst>
           </p:cNvPr>
@@ -25796,7 +25821,7 @@
           <p:cNvPr id="30" name="Arrow: Right 29">
             <a:extLst>
               <a:ext uri="{FF2B5EF4-FFF2-40B4-BE49-F238E27FC236}">
-                <a16:creationId xmlns:a16="http://schemas.microsoft.com/office/drawing/2014/main" id="{95BE42D1-F854-6201-33EB-ADA0B68C6CFE}"/>
+                <a16:creationId xmlns:a16="http://schemas.microsoft.com/office/drawing/2014/main" id="{C4AF2696-A0A5-7690-5E91-BFD63692F99C}"/>
               </a:ext>
             </a:extLst>
           </p:cNvPr>
@@ -25862,7 +25887,7 @@
           <p:cNvPr id="31" name="Rectangle: Rounded Corners 30">
             <a:extLst>
               <a:ext uri="{FF2B5EF4-FFF2-40B4-BE49-F238E27FC236}">
-                <a16:creationId xmlns:a16="http://schemas.microsoft.com/office/drawing/2014/main" id="{496D1B2D-847F-77FE-07BE-5DA5E00EA554}"/>
+                <a16:creationId xmlns:a16="http://schemas.microsoft.com/office/drawing/2014/main" id="{D1730093-356C-0874-F458-7BF19473B05F}"/>
               </a:ext>
             </a:extLst>
           </p:cNvPr>
@@ -25918,7 +25943,7 @@
           <p:cNvPr id="32" name="TextBox 31">
             <a:extLst>
               <a:ext uri="{FF2B5EF4-FFF2-40B4-BE49-F238E27FC236}">
-                <a16:creationId xmlns:a16="http://schemas.microsoft.com/office/drawing/2014/main" id="{3160C6A4-3DD7-3006-4A3F-A79B15D35D8D}"/>
+                <a16:creationId xmlns:a16="http://schemas.microsoft.com/office/drawing/2014/main" id="{2FE27E3F-3790-97C7-497D-D0EF9544D75B}"/>
               </a:ext>
             </a:extLst>
           </p:cNvPr>
@@ -25963,7 +25988,7 @@
           <p:cNvPr id="33" name="Rectangle: Rounded Corners 32">
             <a:extLst>
               <a:ext uri="{FF2B5EF4-FFF2-40B4-BE49-F238E27FC236}">
-                <a16:creationId xmlns:a16="http://schemas.microsoft.com/office/drawing/2014/main" id="{D83E511F-4BCD-27E6-3927-2F136077AE20}"/>
+                <a16:creationId xmlns:a16="http://schemas.microsoft.com/office/drawing/2014/main" id="{6621EC0A-3134-151E-4988-CF6C3A159C52}"/>
               </a:ext>
             </a:extLst>
           </p:cNvPr>
@@ -26040,7 +26065,7 @@
           <p:cNvPr id="34" name="TextBox 33">
             <a:extLst>
               <a:ext uri="{FF2B5EF4-FFF2-40B4-BE49-F238E27FC236}">
-                <a16:creationId xmlns:a16="http://schemas.microsoft.com/office/drawing/2014/main" id="{46EFAC89-8A74-8F53-AB68-A02812E094A1}"/>
+                <a16:creationId xmlns:a16="http://schemas.microsoft.com/office/drawing/2014/main" id="{11BD0AF9-0EA1-CE9B-71C2-292AEBC617DA}"/>
               </a:ext>
             </a:extLst>
           </p:cNvPr>
@@ -26078,7 +26103,7 @@
           <p:cNvPr id="35" name="TextBox 34">
             <a:extLst>
               <a:ext uri="{FF2B5EF4-FFF2-40B4-BE49-F238E27FC236}">
-                <a16:creationId xmlns:a16="http://schemas.microsoft.com/office/drawing/2014/main" id="{64E7BF98-8DB5-23DE-E088-E4915D45D299}"/>
+                <a16:creationId xmlns:a16="http://schemas.microsoft.com/office/drawing/2014/main" id="{6A247E91-2DAA-5FFE-6919-7C01780D27B1}"/>
               </a:ext>
             </a:extLst>
           </p:cNvPr>
@@ -26298,7 +26323,7 @@
           <p:cNvPr id="36" name="Rectangle: Rounded Corners 35">
             <a:extLst>
               <a:ext uri="{FF2B5EF4-FFF2-40B4-BE49-F238E27FC236}">
-                <a16:creationId xmlns:a16="http://schemas.microsoft.com/office/drawing/2014/main" id="{02531D9C-C186-AF9E-92FB-2FDFC8DEC30A}"/>
+                <a16:creationId xmlns:a16="http://schemas.microsoft.com/office/drawing/2014/main" id="{33D71E18-DB9C-162F-BAD2-D574CC3F181C}"/>
               </a:ext>
             </a:extLst>
           </p:cNvPr>
@@ -26372,7 +26397,7 @@
           <p:cNvPr id="37" name="TextBox 36">
             <a:extLst>
               <a:ext uri="{FF2B5EF4-FFF2-40B4-BE49-F238E27FC236}">
-                <a16:creationId xmlns:a16="http://schemas.microsoft.com/office/drawing/2014/main" id="{FF8D83E0-CDC9-63CE-DE63-459740C55363}"/>
+                <a16:creationId xmlns:a16="http://schemas.microsoft.com/office/drawing/2014/main" id="{4F3E6AFA-FABA-9E36-826C-D93F250622C3}"/>
               </a:ext>
             </a:extLst>
           </p:cNvPr>
@@ -26413,7 +26438,7 @@
           <p:cNvPr id="38" name="TextBox 37">
             <a:extLst>
               <a:ext uri="{FF2B5EF4-FFF2-40B4-BE49-F238E27FC236}">
-                <a16:creationId xmlns:a16="http://schemas.microsoft.com/office/drawing/2014/main" id="{6147C86A-71C4-FB2C-6F8A-75D3E8BF1E94}"/>
+                <a16:creationId xmlns:a16="http://schemas.microsoft.com/office/drawing/2014/main" id="{F0006D5D-3903-A806-B950-2C55BCFC4448}"/>
               </a:ext>
             </a:extLst>
           </p:cNvPr>
@@ -26454,7 +26479,7 @@
           <p:cNvPr id="39" name="Rectangle: Rounded Corners 38">
             <a:extLst>
               <a:ext uri="{FF2B5EF4-FFF2-40B4-BE49-F238E27FC236}">
-                <a16:creationId xmlns:a16="http://schemas.microsoft.com/office/drawing/2014/main" id="{58A0FB36-6519-58F2-C796-AF831B021699}"/>
+                <a16:creationId xmlns:a16="http://schemas.microsoft.com/office/drawing/2014/main" id="{C1DAD8EF-8994-1D56-7AEF-3DC2FA84A429}"/>
               </a:ext>
             </a:extLst>
           </p:cNvPr>
@@ -26528,7 +26553,7 @@
           <p:cNvPr id="40" name="TextBox 39">
             <a:extLst>
               <a:ext uri="{FF2B5EF4-FFF2-40B4-BE49-F238E27FC236}">
-                <a16:creationId xmlns:a16="http://schemas.microsoft.com/office/drawing/2014/main" id="{807FF5D8-AA6B-D85E-3979-C35BEAA02949}"/>
+                <a16:creationId xmlns:a16="http://schemas.microsoft.com/office/drawing/2014/main" id="{3AABB0C2-14F6-C27C-094F-20D370378DF6}"/>
               </a:ext>
             </a:extLst>
           </p:cNvPr>
@@ -26569,7 +26594,7 @@
           <p:cNvPr id="41" name="TextBox 40">
             <a:extLst>
               <a:ext uri="{FF2B5EF4-FFF2-40B4-BE49-F238E27FC236}">
-                <a16:creationId xmlns:a16="http://schemas.microsoft.com/office/drawing/2014/main" id="{BA275D70-D6EA-2273-82F0-B97E0E02E676}"/>
+                <a16:creationId xmlns:a16="http://schemas.microsoft.com/office/drawing/2014/main" id="{28E2103D-F586-6C83-407F-BE0F17F398C8}"/>
               </a:ext>
             </a:extLst>
           </p:cNvPr>
@@ -26610,7 +26635,7 @@
           <p:cNvPr id="42" name="Rectangle: Rounded Corners 41">
             <a:extLst>
               <a:ext uri="{FF2B5EF4-FFF2-40B4-BE49-F238E27FC236}">
-                <a16:creationId xmlns:a16="http://schemas.microsoft.com/office/drawing/2014/main" id="{AF8C9D7F-F786-896A-383F-EC735E07F850}"/>
+                <a16:creationId xmlns:a16="http://schemas.microsoft.com/office/drawing/2014/main" id="{EABB0D04-1369-5D92-FDA4-05A41C4525BC}"/>
               </a:ext>
             </a:extLst>
           </p:cNvPr>
@@ -26684,7 +26709,7 @@
           <p:cNvPr id="43" name="TextBox 42">
             <a:extLst>
               <a:ext uri="{FF2B5EF4-FFF2-40B4-BE49-F238E27FC236}">
-                <a16:creationId xmlns:a16="http://schemas.microsoft.com/office/drawing/2014/main" id="{1A407BD7-14B9-6FAA-4D2A-51044F504AB2}"/>
+                <a16:creationId xmlns:a16="http://schemas.microsoft.com/office/drawing/2014/main" id="{DED400AF-A30A-1BEC-92EA-B80F04B1A65E}"/>
               </a:ext>
             </a:extLst>
           </p:cNvPr>
@@ -26725,7 +26750,7 @@
           <p:cNvPr id="44" name="TextBox 43">
             <a:extLst>
               <a:ext uri="{FF2B5EF4-FFF2-40B4-BE49-F238E27FC236}">
-                <a16:creationId xmlns:a16="http://schemas.microsoft.com/office/drawing/2014/main" id="{0373CBF9-E90E-3A0D-6E7F-414A45941968}"/>
+                <a16:creationId xmlns:a16="http://schemas.microsoft.com/office/drawing/2014/main" id="{664ED8AF-CD81-1E58-B661-CA85A304B2A5}"/>
               </a:ext>
             </a:extLst>
           </p:cNvPr>
@@ -26766,7 +26791,7 @@
           <p:cNvPr id="45" name="Rectangle: Rounded Corners 44">
             <a:extLst>
               <a:ext uri="{FF2B5EF4-FFF2-40B4-BE49-F238E27FC236}">
-                <a16:creationId xmlns:a16="http://schemas.microsoft.com/office/drawing/2014/main" id="{F655CF01-25F1-60F7-C465-EB91232C08C8}"/>
+                <a16:creationId xmlns:a16="http://schemas.microsoft.com/office/drawing/2014/main" id="{BF17D14A-512C-6F4D-7960-CE068D45699B}"/>
               </a:ext>
             </a:extLst>
           </p:cNvPr>
@@ -26840,7 +26865,7 @@
           <p:cNvPr id="46" name="TextBox 45">
             <a:extLst>
               <a:ext uri="{FF2B5EF4-FFF2-40B4-BE49-F238E27FC236}">
-                <a16:creationId xmlns:a16="http://schemas.microsoft.com/office/drawing/2014/main" id="{59364F2D-C3D6-2A90-EBF6-2EEA6FC32BA0}"/>
+                <a16:creationId xmlns:a16="http://schemas.microsoft.com/office/drawing/2014/main" id="{CD06CEAC-4E39-4BDA-8F1F-62F5D4483010}"/>
               </a:ext>
             </a:extLst>
           </p:cNvPr>
@@ -26881,7 +26906,7 @@
           <p:cNvPr id="47" name="TextBox 46">
             <a:extLst>
               <a:ext uri="{FF2B5EF4-FFF2-40B4-BE49-F238E27FC236}">
-                <a16:creationId xmlns:a16="http://schemas.microsoft.com/office/drawing/2014/main" id="{8FB9E059-3619-D2BC-FDC3-0D1B620CAB94}"/>
+                <a16:creationId xmlns:a16="http://schemas.microsoft.com/office/drawing/2014/main" id="{5E26B8C7-B87A-05EA-CF93-538FCAD36053}"/>
               </a:ext>
             </a:extLst>
           </p:cNvPr>
@@ -26922,7 +26947,7 @@
           <p:cNvPr id="48" name="Rectangle: Rounded Corners 47">
             <a:extLst>
               <a:ext uri="{FF2B5EF4-FFF2-40B4-BE49-F238E27FC236}">
-                <a16:creationId xmlns:a16="http://schemas.microsoft.com/office/drawing/2014/main" id="{644BAC5B-D720-E26F-6C66-CFB475DAB773}"/>
+                <a16:creationId xmlns:a16="http://schemas.microsoft.com/office/drawing/2014/main" id="{CE3A8CAE-F2A0-1FF0-4F1D-80C20F1CDBB3}"/>
               </a:ext>
             </a:extLst>
           </p:cNvPr>
@@ -26978,7 +27003,7 @@
           <p:cNvPr id="49" name="TextBox 48">
             <a:extLst>
               <a:ext uri="{FF2B5EF4-FFF2-40B4-BE49-F238E27FC236}">
-                <a16:creationId xmlns:a16="http://schemas.microsoft.com/office/drawing/2014/main" id="{B3E9C28C-B102-60D9-903F-4D7CB558C763}"/>
+                <a16:creationId xmlns:a16="http://schemas.microsoft.com/office/drawing/2014/main" id="{65C26588-A607-BCAE-DFD6-C52EDAD1DC52}"/>
               </a:ext>
             </a:extLst>
           </p:cNvPr>
@@ -27018,7 +27043,7 @@
           <p:cNvPr id="50" name="TextBox 49">
             <a:extLst>
               <a:ext uri="{FF2B5EF4-FFF2-40B4-BE49-F238E27FC236}">
-                <a16:creationId xmlns:a16="http://schemas.microsoft.com/office/drawing/2014/main" id="{B9990861-3F14-8F41-F434-5BAE3BFFD118}"/>
+                <a16:creationId xmlns:a16="http://schemas.microsoft.com/office/drawing/2014/main" id="{593D946B-76E9-117A-9116-AE2111A9BFAB}"/>
               </a:ext>
             </a:extLst>
           </p:cNvPr>
@@ -27058,7 +27083,7 @@
           <p:cNvPr id="51" name="Rectangle 50">
             <a:extLst>
               <a:ext uri="{FF2B5EF4-FFF2-40B4-BE49-F238E27FC236}">
-                <a16:creationId xmlns:a16="http://schemas.microsoft.com/office/drawing/2014/main" id="{0F7BAB3B-69FE-A0D6-EC10-8F07F3B4FD56}"/>
+                <a16:creationId xmlns:a16="http://schemas.microsoft.com/office/drawing/2014/main" id="{87BB423A-DF4E-ADB3-2920-EA2CCED6D664}"/>
               </a:ext>
             </a:extLst>
           </p:cNvPr>
@@ -27124,7 +27149,7 @@
           <p:cNvPr id="52" name="TextBox 51">
             <a:extLst>
               <a:ext uri="{FF2B5EF4-FFF2-40B4-BE49-F238E27FC236}">
-                <a16:creationId xmlns:a16="http://schemas.microsoft.com/office/drawing/2014/main" id="{C20C635F-6163-0583-EAED-AA5C4AD94412}"/>
+                <a16:creationId xmlns:a16="http://schemas.microsoft.com/office/drawing/2014/main" id="{223580B7-9ECF-6026-7FE7-FB2F62DDE6F2}"/>
               </a:ext>
             </a:extLst>
           </p:cNvPr>
@@ -27164,7 +27189,7 @@
           <p:cNvPr id="53" name="Rectangle 52">
             <a:extLst>
               <a:ext uri="{FF2B5EF4-FFF2-40B4-BE49-F238E27FC236}">
-                <a16:creationId xmlns:a16="http://schemas.microsoft.com/office/drawing/2014/main" id="{B768243C-F3AD-8549-0D6C-A8AC165E0329}"/>
+                <a16:creationId xmlns:a16="http://schemas.microsoft.com/office/drawing/2014/main" id="{66B11C82-AA85-2B9E-5846-CC70BF505A96}"/>
               </a:ext>
             </a:extLst>
           </p:cNvPr>
@@ -27230,7 +27255,7 @@
           <p:cNvPr id="54" name="TextBox 53">
             <a:extLst>
               <a:ext uri="{FF2B5EF4-FFF2-40B4-BE49-F238E27FC236}">
-                <a16:creationId xmlns:a16="http://schemas.microsoft.com/office/drawing/2014/main" id="{177AEE95-04B0-AB32-8E7D-0E9450140BAB}"/>
+                <a16:creationId xmlns:a16="http://schemas.microsoft.com/office/drawing/2014/main" id="{C8FD6517-D8EB-83F5-045B-9EDDE7EBD347}"/>
               </a:ext>
             </a:extLst>
           </p:cNvPr>
@@ -27270,7 +27295,7 @@
           <p:cNvPr id="55" name="Straight Arrow Connector 54">
             <a:extLst>
               <a:ext uri="{FF2B5EF4-FFF2-40B4-BE49-F238E27FC236}">
-                <a16:creationId xmlns:a16="http://schemas.microsoft.com/office/drawing/2014/main" id="{FB3370D7-A5C0-2180-1418-C7BA15A3B289}"/>
+                <a16:creationId xmlns:a16="http://schemas.microsoft.com/office/drawing/2014/main" id="{5C3D283D-49C1-4B79-20BB-5CF854B97F7A}"/>
               </a:ext>
             </a:extLst>
           </p:cNvPr>
@@ -27311,7 +27336,7 @@
           <p:cNvPr id="56" name="Rectangle 55">
             <a:extLst>
               <a:ext uri="{FF2B5EF4-FFF2-40B4-BE49-F238E27FC236}">
-                <a16:creationId xmlns:a16="http://schemas.microsoft.com/office/drawing/2014/main" id="{52694851-B928-DB97-31C7-740A74346B1D}"/>
+                <a16:creationId xmlns:a16="http://schemas.microsoft.com/office/drawing/2014/main" id="{4B97C8D2-ECBC-AE7A-8CEB-935C7EFD752F}"/>
               </a:ext>
             </a:extLst>
           </p:cNvPr>
@@ -27377,7 +27402,7 @@
           <p:cNvPr id="57" name="Rectangle 56">
             <a:extLst>
               <a:ext uri="{FF2B5EF4-FFF2-40B4-BE49-F238E27FC236}">
-                <a16:creationId xmlns:a16="http://schemas.microsoft.com/office/drawing/2014/main" id="{FF196D42-BBBC-E82A-D784-A0BE286A7D18}"/>
+                <a16:creationId xmlns:a16="http://schemas.microsoft.com/office/drawing/2014/main" id="{44FBBABE-85B0-A98F-ED86-3D20858E7A49}"/>
               </a:ext>
             </a:extLst>
           </p:cNvPr>
@@ -27443,7 +27468,7 @@
           <p:cNvPr id="58" name="TextBox 57">
             <a:extLst>
               <a:ext uri="{FF2B5EF4-FFF2-40B4-BE49-F238E27FC236}">
-                <a16:creationId xmlns:a16="http://schemas.microsoft.com/office/drawing/2014/main" id="{86D1AE68-7D92-0DA5-46B0-E51434348DE7}"/>
+                <a16:creationId xmlns:a16="http://schemas.microsoft.com/office/drawing/2014/main" id="{7ABB94D1-13BA-A270-8A30-8F9905F08453}"/>
               </a:ext>
             </a:extLst>
           </p:cNvPr>
@@ -27484,7 +27509,7 @@
           <p:cNvPr id="59" name="TextBox 58">
             <a:extLst>
               <a:ext uri="{FF2B5EF4-FFF2-40B4-BE49-F238E27FC236}">
-                <a16:creationId xmlns:a16="http://schemas.microsoft.com/office/drawing/2014/main" id="{324503C2-7DD9-B754-EC21-787A25C5A8F9}"/>
+                <a16:creationId xmlns:a16="http://schemas.microsoft.com/office/drawing/2014/main" id="{3EBA1FF6-6888-BDEF-FD86-FFA469C7121D}"/>
               </a:ext>
             </a:extLst>
           </p:cNvPr>
@@ -27525,7 +27550,7 @@
           <p:cNvPr id="60" name="TextBox 59">
             <a:extLst>
               <a:ext uri="{FF2B5EF4-FFF2-40B4-BE49-F238E27FC236}">
-                <a16:creationId xmlns:a16="http://schemas.microsoft.com/office/drawing/2014/main" id="{5B735971-EFB3-88F2-38A4-CF52FC30314D}"/>
+                <a16:creationId xmlns:a16="http://schemas.microsoft.com/office/drawing/2014/main" id="{74420FF4-6ABC-46D8-587E-E6044D2F9485}"/>
               </a:ext>
             </a:extLst>
           </p:cNvPr>
@@ -27566,7 +27591,7 @@
           <p:cNvPr id="61" name="Rectangle 60">
             <a:extLst>
               <a:ext uri="{FF2B5EF4-FFF2-40B4-BE49-F238E27FC236}">
-                <a16:creationId xmlns:a16="http://schemas.microsoft.com/office/drawing/2014/main" id="{CC01FCA3-FA08-AC2D-4E70-746DC379B223}"/>
+                <a16:creationId xmlns:a16="http://schemas.microsoft.com/office/drawing/2014/main" id="{F24C2A13-3443-D688-24DD-782E933CDB86}"/>
               </a:ext>
             </a:extLst>
           </p:cNvPr>
@@ -27632,7 +27657,7 @@
           <p:cNvPr id="62" name="Rectangle 61">
             <a:extLst>
               <a:ext uri="{FF2B5EF4-FFF2-40B4-BE49-F238E27FC236}">
-                <a16:creationId xmlns:a16="http://schemas.microsoft.com/office/drawing/2014/main" id="{07E98DC6-1C64-B83E-B44E-E884870AFE4E}"/>
+                <a16:creationId xmlns:a16="http://schemas.microsoft.com/office/drawing/2014/main" id="{7B1A188C-909D-C949-69A3-25A8AD81B79E}"/>
               </a:ext>
             </a:extLst>
           </p:cNvPr>
@@ -27698,7 +27723,7 @@
           <p:cNvPr id="63" name="TextBox 62">
             <a:extLst>
               <a:ext uri="{FF2B5EF4-FFF2-40B4-BE49-F238E27FC236}">
-                <a16:creationId xmlns:a16="http://schemas.microsoft.com/office/drawing/2014/main" id="{5D5FF06F-4870-CB5F-C2B8-7BD349BB0BFC}"/>
+                <a16:creationId xmlns:a16="http://schemas.microsoft.com/office/drawing/2014/main" id="{BF96F88B-36BF-CCF3-B697-F4B52CF76AF1}"/>
               </a:ext>
             </a:extLst>
           </p:cNvPr>
@@ -27739,7 +27764,7 @@
           <p:cNvPr id="64" name="TextBox 63">
             <a:extLst>
               <a:ext uri="{FF2B5EF4-FFF2-40B4-BE49-F238E27FC236}">
-                <a16:creationId xmlns:a16="http://schemas.microsoft.com/office/drawing/2014/main" id="{9C03F4C8-1D86-D01D-CDB6-EEFB93D1747D}"/>
+                <a16:creationId xmlns:a16="http://schemas.microsoft.com/office/drawing/2014/main" id="{C10D671B-A09F-59AB-8DD2-0C068F35CD14}"/>
               </a:ext>
             </a:extLst>
           </p:cNvPr>
@@ -27780,7 +27805,7 @@
           <p:cNvPr id="65" name="TextBox 64">
             <a:extLst>
               <a:ext uri="{FF2B5EF4-FFF2-40B4-BE49-F238E27FC236}">
-                <a16:creationId xmlns:a16="http://schemas.microsoft.com/office/drawing/2014/main" id="{4D7B2181-C650-C712-3AA2-BCF228258D3E}"/>
+                <a16:creationId xmlns:a16="http://schemas.microsoft.com/office/drawing/2014/main" id="{FB15E1DD-03A9-E6B4-4C68-A0C68CAA1D59}"/>
               </a:ext>
             </a:extLst>
           </p:cNvPr>
@@ -27821,7 +27846,7 @@
           <p:cNvPr id="66" name="Rectangle 65">
             <a:extLst>
               <a:ext uri="{FF2B5EF4-FFF2-40B4-BE49-F238E27FC236}">
-                <a16:creationId xmlns:a16="http://schemas.microsoft.com/office/drawing/2014/main" id="{2545BFB1-F503-56C5-CD2E-6EFB8C5CFCDD}"/>
+                <a16:creationId xmlns:a16="http://schemas.microsoft.com/office/drawing/2014/main" id="{0FD5E2FB-BB36-0478-22C6-DF2DC791768F}"/>
               </a:ext>
             </a:extLst>
           </p:cNvPr>
@@ -27887,7 +27912,7 @@
           <p:cNvPr id="67" name="Rectangle 66">
             <a:extLst>
               <a:ext uri="{FF2B5EF4-FFF2-40B4-BE49-F238E27FC236}">
-                <a16:creationId xmlns:a16="http://schemas.microsoft.com/office/drawing/2014/main" id="{C25DB1B5-A4FD-E102-2203-EAA0E4DE3CE6}"/>
+                <a16:creationId xmlns:a16="http://schemas.microsoft.com/office/drawing/2014/main" id="{F74B8E4B-F401-7774-E9A5-8FB6082A1D62}"/>
               </a:ext>
             </a:extLst>
           </p:cNvPr>
@@ -27953,7 +27978,7 @@
           <p:cNvPr id="68" name="TextBox 67">
             <a:extLst>
               <a:ext uri="{FF2B5EF4-FFF2-40B4-BE49-F238E27FC236}">
-                <a16:creationId xmlns:a16="http://schemas.microsoft.com/office/drawing/2014/main" id="{1F435329-A10D-DF7B-6214-87067A7435BF}"/>
+                <a16:creationId xmlns:a16="http://schemas.microsoft.com/office/drawing/2014/main" id="{4BBAD886-B2FC-E8C9-BD08-83EA9684DA98}"/>
               </a:ext>
             </a:extLst>
           </p:cNvPr>
@@ -27994,7 +28019,7 @@
           <p:cNvPr id="69" name="TextBox 68">
             <a:extLst>
               <a:ext uri="{FF2B5EF4-FFF2-40B4-BE49-F238E27FC236}">
-                <a16:creationId xmlns:a16="http://schemas.microsoft.com/office/drawing/2014/main" id="{B9A6E897-8FCA-A40E-EED8-B615C1FAE774}"/>
+                <a16:creationId xmlns:a16="http://schemas.microsoft.com/office/drawing/2014/main" id="{143799D8-13EB-8B4D-9F8D-B86774CE2507}"/>
               </a:ext>
             </a:extLst>
           </p:cNvPr>
@@ -28035,7 +28060,7 @@
           <p:cNvPr id="70" name="TextBox 69">
             <a:extLst>
               <a:ext uri="{FF2B5EF4-FFF2-40B4-BE49-F238E27FC236}">
-                <a16:creationId xmlns:a16="http://schemas.microsoft.com/office/drawing/2014/main" id="{3EB74296-2AEE-EBCB-77B3-D140A0F7295A}"/>
+                <a16:creationId xmlns:a16="http://schemas.microsoft.com/office/drawing/2014/main" id="{B5DBE9CB-60B4-3AA7-7DD4-127BC98B04A5}"/>
               </a:ext>
             </a:extLst>
           </p:cNvPr>
@@ -28076,7 +28101,7 @@
           <p:cNvPr id="71" name="Rectangle 70">
             <a:extLst>
               <a:ext uri="{FF2B5EF4-FFF2-40B4-BE49-F238E27FC236}">
-                <a16:creationId xmlns:a16="http://schemas.microsoft.com/office/drawing/2014/main" id="{833EE885-23D2-6428-DE52-9B57DD8EC4E3}"/>
+                <a16:creationId xmlns:a16="http://schemas.microsoft.com/office/drawing/2014/main" id="{A4A14985-6B3B-7F22-4335-5BD8FD5B4501}"/>
               </a:ext>
             </a:extLst>
           </p:cNvPr>
@@ -28142,7 +28167,7 @@
           <p:cNvPr id="72" name="Rectangle 71">
             <a:extLst>
               <a:ext uri="{FF2B5EF4-FFF2-40B4-BE49-F238E27FC236}">
-                <a16:creationId xmlns:a16="http://schemas.microsoft.com/office/drawing/2014/main" id="{2578B9BD-6FC2-F6D0-741C-5D224D31DE23}"/>
+                <a16:creationId xmlns:a16="http://schemas.microsoft.com/office/drawing/2014/main" id="{08F37404-5023-4B87-FA7F-DDA04D8AD418}"/>
               </a:ext>
             </a:extLst>
           </p:cNvPr>
@@ -28208,7 +28233,7 @@
           <p:cNvPr id="73" name="TextBox 72">
             <a:extLst>
               <a:ext uri="{FF2B5EF4-FFF2-40B4-BE49-F238E27FC236}">
-                <a16:creationId xmlns:a16="http://schemas.microsoft.com/office/drawing/2014/main" id="{4AE5AEF2-4BC4-87D4-1D79-6B1627C04864}"/>
+                <a16:creationId xmlns:a16="http://schemas.microsoft.com/office/drawing/2014/main" id="{583B10C5-1A24-3D01-8A81-3D35622D611D}"/>
               </a:ext>
             </a:extLst>
           </p:cNvPr>
@@ -28249,7 +28274,7 @@
           <p:cNvPr id="74" name="TextBox 73">
             <a:extLst>
               <a:ext uri="{FF2B5EF4-FFF2-40B4-BE49-F238E27FC236}">
-                <a16:creationId xmlns:a16="http://schemas.microsoft.com/office/drawing/2014/main" id="{3C20D69C-EADF-1FD3-5935-206F975348B4}"/>
+                <a16:creationId xmlns:a16="http://schemas.microsoft.com/office/drawing/2014/main" id="{2F10C413-D478-23B9-3001-B2C490859C4F}"/>
               </a:ext>
             </a:extLst>
           </p:cNvPr>
@@ -28290,7 +28315,7 @@
           <p:cNvPr id="75" name="TextBox 74">
             <a:extLst>
               <a:ext uri="{FF2B5EF4-FFF2-40B4-BE49-F238E27FC236}">
-                <a16:creationId xmlns:a16="http://schemas.microsoft.com/office/drawing/2014/main" id="{CED02BFD-E59A-E03C-5B83-90B026E21FCF}"/>
+                <a16:creationId xmlns:a16="http://schemas.microsoft.com/office/drawing/2014/main" id="{5BE3D978-1395-F6B0-7916-45015D3062E1}"/>
               </a:ext>
             </a:extLst>
           </p:cNvPr>
@@ -28331,7 +28356,7 @@
           <p:cNvPr id="76" name="Rectangle 75">
             <a:extLst>
               <a:ext uri="{FF2B5EF4-FFF2-40B4-BE49-F238E27FC236}">
-                <a16:creationId xmlns:a16="http://schemas.microsoft.com/office/drawing/2014/main" id="{E5E18150-0A35-1F7E-E18D-BBB36E42E325}"/>
+                <a16:creationId xmlns:a16="http://schemas.microsoft.com/office/drawing/2014/main" id="{19BD7762-4001-DD26-9734-AE90FB704FF1}"/>
               </a:ext>
             </a:extLst>
           </p:cNvPr>
@@ -28397,7 +28422,7 @@
           <p:cNvPr id="77" name="Rectangle 76">
             <a:extLst>
               <a:ext uri="{FF2B5EF4-FFF2-40B4-BE49-F238E27FC236}">
-                <a16:creationId xmlns:a16="http://schemas.microsoft.com/office/drawing/2014/main" id="{F9557373-382F-DA7C-A6C7-498292B64CC6}"/>
+                <a16:creationId xmlns:a16="http://schemas.microsoft.com/office/drawing/2014/main" id="{8E80127F-0FC6-3FCA-C0C8-97E61B5BDEDC}"/>
               </a:ext>
             </a:extLst>
           </p:cNvPr>
@@ -28463,7 +28488,7 @@
           <p:cNvPr id="78" name="TextBox 77">
             <a:extLst>
               <a:ext uri="{FF2B5EF4-FFF2-40B4-BE49-F238E27FC236}">
-                <a16:creationId xmlns:a16="http://schemas.microsoft.com/office/drawing/2014/main" id="{7CD6E22B-3B97-0C61-88EB-3E286A204D29}"/>
+                <a16:creationId xmlns:a16="http://schemas.microsoft.com/office/drawing/2014/main" id="{56920965-E582-58CD-B31F-442C6A84E0E1}"/>
               </a:ext>
             </a:extLst>
           </p:cNvPr>
@@ -28504,7 +28529,7 @@
           <p:cNvPr id="79" name="TextBox 78">
             <a:extLst>
               <a:ext uri="{FF2B5EF4-FFF2-40B4-BE49-F238E27FC236}">
-                <a16:creationId xmlns:a16="http://schemas.microsoft.com/office/drawing/2014/main" id="{975C09A1-6C0E-BC40-A2D2-2AFD56A1D780}"/>
+                <a16:creationId xmlns:a16="http://schemas.microsoft.com/office/drawing/2014/main" id="{EBFEC381-7949-B90D-408C-C455615884E8}"/>
               </a:ext>
             </a:extLst>
           </p:cNvPr>
@@ -28545,7 +28570,7 @@
           <p:cNvPr id="80" name="TextBox 79">
             <a:extLst>
               <a:ext uri="{FF2B5EF4-FFF2-40B4-BE49-F238E27FC236}">
-                <a16:creationId xmlns:a16="http://schemas.microsoft.com/office/drawing/2014/main" id="{FE159569-186B-3502-B749-C25E48CCFB56}"/>
+                <a16:creationId xmlns:a16="http://schemas.microsoft.com/office/drawing/2014/main" id="{B4157822-2601-A16C-E0F2-37419CE70D55}"/>
               </a:ext>
             </a:extLst>
           </p:cNvPr>
@@ -28586,7 +28611,7 @@
           <p:cNvPr id="81" name="Rectangle: Rounded Corners 80">
             <a:extLst>
               <a:ext uri="{FF2B5EF4-FFF2-40B4-BE49-F238E27FC236}">
-                <a16:creationId xmlns:a16="http://schemas.microsoft.com/office/drawing/2014/main" id="{810242F8-7D8D-2AED-2A13-7246C82C255A}"/>
+                <a16:creationId xmlns:a16="http://schemas.microsoft.com/office/drawing/2014/main" id="{C8B121CF-56DF-7994-A251-82E291122C7A}"/>
               </a:ext>
             </a:extLst>
           </p:cNvPr>
@@ -28642,7 +28667,7 @@
           <p:cNvPr id="82" name="TextBox 81">
             <a:extLst>
               <a:ext uri="{FF2B5EF4-FFF2-40B4-BE49-F238E27FC236}">
-                <a16:creationId xmlns:a16="http://schemas.microsoft.com/office/drawing/2014/main" id="{C39EAE25-CE16-E4E9-BF5F-B5B4DCF6E797}"/>
+                <a16:creationId xmlns:a16="http://schemas.microsoft.com/office/drawing/2014/main" id="{9CE9EA84-8CC9-7E0B-098C-52305C4544E7}"/>
               </a:ext>
             </a:extLst>
           </p:cNvPr>
@@ -28682,7 +28707,7 @@
           <p:cNvPr id="83" name="TextBox 82">
             <a:extLst>
               <a:ext uri="{FF2B5EF4-FFF2-40B4-BE49-F238E27FC236}">
-                <a16:creationId xmlns:a16="http://schemas.microsoft.com/office/drawing/2014/main" id="{9148C6BB-5DEB-F1A5-0500-9321C1DDC0E6}"/>
+                <a16:creationId xmlns:a16="http://schemas.microsoft.com/office/drawing/2014/main" id="{6225CB34-3B32-6837-6021-6FF1D9F5EA36}"/>
               </a:ext>
             </a:extLst>
           </p:cNvPr>
@@ -28722,7 +28747,7 @@
           <p:cNvPr id="84" name="Straight Arrow Connector 83">
             <a:extLst>
               <a:ext uri="{FF2B5EF4-FFF2-40B4-BE49-F238E27FC236}">
-                <a16:creationId xmlns:a16="http://schemas.microsoft.com/office/drawing/2014/main" id="{BDAE59FA-1754-FC5B-1C60-CFECD7CB7181}"/>
+                <a16:creationId xmlns:a16="http://schemas.microsoft.com/office/drawing/2014/main" id="{0F7C4386-2AA5-6BCD-5D68-8FA4893008E0}"/>
               </a:ext>
             </a:extLst>
           </p:cNvPr>
@@ -28763,7 +28788,7 @@
           <p:cNvPr id="85" name="Straight Arrow Connector 84">
             <a:extLst>
               <a:ext uri="{FF2B5EF4-FFF2-40B4-BE49-F238E27FC236}">
-                <a16:creationId xmlns:a16="http://schemas.microsoft.com/office/drawing/2014/main" id="{944E0A72-8363-B18F-8A20-C8E6F097C02D}"/>
+                <a16:creationId xmlns:a16="http://schemas.microsoft.com/office/drawing/2014/main" id="{24A3F1E4-521D-80DD-EC55-9C897F690722}"/>
               </a:ext>
             </a:extLst>
           </p:cNvPr>
@@ -28804,7 +28829,7 @@
           <p:cNvPr id="86" name="TextBox 85">
             <a:extLst>
               <a:ext uri="{FF2B5EF4-FFF2-40B4-BE49-F238E27FC236}">
-                <a16:creationId xmlns:a16="http://schemas.microsoft.com/office/drawing/2014/main" id="{A5B51440-7CB1-0914-F536-8D3183459ACA}"/>
+                <a16:creationId xmlns:a16="http://schemas.microsoft.com/office/drawing/2014/main" id="{8220B611-3825-BEE3-A877-E25040F07A54}"/>
               </a:ext>
             </a:extLst>
           </p:cNvPr>
@@ -28845,7 +28870,7 @@
           <p:cNvPr id="87" name="Straight Arrow Connector 86">
             <a:extLst>
               <a:ext uri="{FF2B5EF4-FFF2-40B4-BE49-F238E27FC236}">
-                <a16:creationId xmlns:a16="http://schemas.microsoft.com/office/drawing/2014/main" id="{8AEE7794-886F-9C55-822A-77FD6589C382}"/>
+                <a16:creationId xmlns:a16="http://schemas.microsoft.com/office/drawing/2014/main" id="{EDA5530B-BBE5-EB9A-E620-AC688A940940}"/>
               </a:ext>
             </a:extLst>
           </p:cNvPr>
@@ -28886,7 +28911,7 @@
           <p:cNvPr id="88" name="TextBox 87">
             <a:extLst>
               <a:ext uri="{FF2B5EF4-FFF2-40B4-BE49-F238E27FC236}">
-                <a16:creationId xmlns:a16="http://schemas.microsoft.com/office/drawing/2014/main" id="{BCCD1FF5-9401-112F-7258-16B8D01B29C4}"/>
+                <a16:creationId xmlns:a16="http://schemas.microsoft.com/office/drawing/2014/main" id="{9BDA5A70-DC08-8A4A-62C1-284EB62AAB01}"/>
               </a:ext>
             </a:extLst>
           </p:cNvPr>
@@ -28927,7 +28952,7 @@
           <p:cNvPr id="89" name="Straight Arrow Connector 88">
             <a:extLst>
               <a:ext uri="{FF2B5EF4-FFF2-40B4-BE49-F238E27FC236}">
-                <a16:creationId xmlns:a16="http://schemas.microsoft.com/office/drawing/2014/main" id="{AE3ED2CB-2A65-22B4-FCD4-7E7557D9459D}"/>
+                <a16:creationId xmlns:a16="http://schemas.microsoft.com/office/drawing/2014/main" id="{D5F0DE19-371F-217F-F300-9DC4891C80A7}"/>
               </a:ext>
             </a:extLst>
           </p:cNvPr>
@@ -28968,7 +28993,7 @@
           <p:cNvPr id="90" name="TextBox 89">
             <a:extLst>
               <a:ext uri="{FF2B5EF4-FFF2-40B4-BE49-F238E27FC236}">
-                <a16:creationId xmlns:a16="http://schemas.microsoft.com/office/drawing/2014/main" id="{81121F17-BCCF-7E89-EA0D-D7ABD31853B7}"/>
+                <a16:creationId xmlns:a16="http://schemas.microsoft.com/office/drawing/2014/main" id="{86DAEFFC-3CA6-C9B5-500E-8E9C401F2A80}"/>
               </a:ext>
             </a:extLst>
           </p:cNvPr>
@@ -29009,7 +29034,7 @@
           <p:cNvPr id="91" name="TextBox 90">
             <a:extLst>
               <a:ext uri="{FF2B5EF4-FFF2-40B4-BE49-F238E27FC236}">
-                <a16:creationId xmlns:a16="http://schemas.microsoft.com/office/drawing/2014/main" id="{41F50BA3-CE80-D489-8DEC-93E166E297D0}"/>
+                <a16:creationId xmlns:a16="http://schemas.microsoft.com/office/drawing/2014/main" id="{485FDB98-1ACB-807E-ED63-B5F4736DF983}"/>
               </a:ext>
             </a:extLst>
           </p:cNvPr>
@@ -29050,7 +29075,7 @@
           <p:cNvPr id="92" name="Freeform: Shape 91">
             <a:extLst>
               <a:ext uri="{FF2B5EF4-FFF2-40B4-BE49-F238E27FC236}">
-                <a16:creationId xmlns:a16="http://schemas.microsoft.com/office/drawing/2014/main" id="{66ED4F1E-4208-E33E-DED1-6C69B8D57A78}"/>
+                <a16:creationId xmlns:a16="http://schemas.microsoft.com/office/drawing/2014/main" id="{249A439C-7C3F-8D3C-A1FE-780A92FBB4B9}"/>
               </a:ext>
             </a:extLst>
           </p:cNvPr>
@@ -29151,7 +29176,7 @@
           <p:cNvPr id="93" name="Freeform: Shape 92">
             <a:extLst>
               <a:ext uri="{FF2B5EF4-FFF2-40B4-BE49-F238E27FC236}">
-                <a16:creationId xmlns:a16="http://schemas.microsoft.com/office/drawing/2014/main" id="{0FE37B26-858A-9F4C-F77D-AAC57895ABD9}"/>
+                <a16:creationId xmlns:a16="http://schemas.microsoft.com/office/drawing/2014/main" id="{7E602FBC-29E0-4892-F30F-06EF29C7E68A}"/>
               </a:ext>
             </a:extLst>
           </p:cNvPr>
@@ -29226,7 +29251,7 @@
           <p:cNvPr id="94" name="Oval 93">
             <a:extLst>
               <a:ext uri="{FF2B5EF4-FFF2-40B4-BE49-F238E27FC236}">
-                <a16:creationId xmlns:a16="http://schemas.microsoft.com/office/drawing/2014/main" id="{07A04BAA-8AC9-D66A-7D9D-9D2B9C9BA06B}"/>
+                <a16:creationId xmlns:a16="http://schemas.microsoft.com/office/drawing/2014/main" id="{88E17C1B-0272-E483-28ED-D49D725E3A1C}"/>
               </a:ext>
             </a:extLst>
           </p:cNvPr>
@@ -29280,7 +29305,7 @@
           <p:cNvPr id="95" name="TextBox 94">
             <a:extLst>
               <a:ext uri="{FF2B5EF4-FFF2-40B4-BE49-F238E27FC236}">
-                <a16:creationId xmlns:a16="http://schemas.microsoft.com/office/drawing/2014/main" id="{8606681D-434C-9DAB-0D13-AAD385020FC5}"/>
+                <a16:creationId xmlns:a16="http://schemas.microsoft.com/office/drawing/2014/main" id="{6EE2579A-95BA-DCD0-55B8-C01054004E9B}"/>
               </a:ext>
             </a:extLst>
           </p:cNvPr>
@@ -29321,7 +29346,7 @@
           <p:cNvPr id="96" name="Oval 95">
             <a:extLst>
               <a:ext uri="{FF2B5EF4-FFF2-40B4-BE49-F238E27FC236}">
-                <a16:creationId xmlns:a16="http://schemas.microsoft.com/office/drawing/2014/main" id="{591402B5-FC03-AD29-F878-79A238F9F669}"/>
+                <a16:creationId xmlns:a16="http://schemas.microsoft.com/office/drawing/2014/main" id="{E34D9D8F-BF4B-7367-903E-1EF4B690C8E8}"/>
               </a:ext>
             </a:extLst>
           </p:cNvPr>
@@ -29375,7 +29400,7 @@
           <p:cNvPr id="97" name="TextBox 96">
             <a:extLst>
               <a:ext uri="{FF2B5EF4-FFF2-40B4-BE49-F238E27FC236}">
-                <a16:creationId xmlns:a16="http://schemas.microsoft.com/office/drawing/2014/main" id="{365E138C-D41E-EFEC-E039-6884EC27787B}"/>
+                <a16:creationId xmlns:a16="http://schemas.microsoft.com/office/drawing/2014/main" id="{26E03555-9080-CF5F-1232-7FAB267CD87E}"/>
               </a:ext>
             </a:extLst>
           </p:cNvPr>
@@ -29416,7 +29441,7 @@
           <p:cNvPr id="98" name="Oval 97">
             <a:extLst>
               <a:ext uri="{FF2B5EF4-FFF2-40B4-BE49-F238E27FC236}">
-                <a16:creationId xmlns:a16="http://schemas.microsoft.com/office/drawing/2014/main" id="{5851AE90-3A1A-255E-715E-720B45D56794}"/>
+                <a16:creationId xmlns:a16="http://schemas.microsoft.com/office/drawing/2014/main" id="{DA70AF04-BE6C-6FF3-99D0-BFDBBADE1CD4}"/>
               </a:ext>
             </a:extLst>
           </p:cNvPr>
@@ -29470,7 +29495,7 @@
           <p:cNvPr id="99" name="TextBox 98">
             <a:extLst>
               <a:ext uri="{FF2B5EF4-FFF2-40B4-BE49-F238E27FC236}">
-                <a16:creationId xmlns:a16="http://schemas.microsoft.com/office/drawing/2014/main" id="{008294EC-887C-01FE-FDE7-3A0DEC5A71BD}"/>
+                <a16:creationId xmlns:a16="http://schemas.microsoft.com/office/drawing/2014/main" id="{215DD90B-DA7C-5565-5A1C-3C4D124ECBCF}"/>
               </a:ext>
             </a:extLst>
           </p:cNvPr>
@@ -29511,7 +29536,7 @@
           <p:cNvPr id="100" name="Oval 99">
             <a:extLst>
               <a:ext uri="{FF2B5EF4-FFF2-40B4-BE49-F238E27FC236}">
-                <a16:creationId xmlns:a16="http://schemas.microsoft.com/office/drawing/2014/main" id="{0F49A0F2-4F8D-01DB-D440-73D64388FAC5}"/>
+                <a16:creationId xmlns:a16="http://schemas.microsoft.com/office/drawing/2014/main" id="{7E27996B-E6F1-FD6A-09B3-6099DAFD2C22}"/>
               </a:ext>
             </a:extLst>
           </p:cNvPr>
@@ -29565,7 +29590,7 @@
           <p:cNvPr id="101" name="TextBox 100">
             <a:extLst>
               <a:ext uri="{FF2B5EF4-FFF2-40B4-BE49-F238E27FC236}">
-                <a16:creationId xmlns:a16="http://schemas.microsoft.com/office/drawing/2014/main" id="{65E5DA89-099D-6D9B-DFE4-2E62A33C3169}"/>
+                <a16:creationId xmlns:a16="http://schemas.microsoft.com/office/drawing/2014/main" id="{AC728DC4-A5D8-4E14-0768-112ACCCA449A}"/>
               </a:ext>
             </a:extLst>
           </p:cNvPr>
@@ -29606,7 +29631,7 @@
           <p:cNvPr id="102" name="Oval 101">
             <a:extLst>
               <a:ext uri="{FF2B5EF4-FFF2-40B4-BE49-F238E27FC236}">
-                <a16:creationId xmlns:a16="http://schemas.microsoft.com/office/drawing/2014/main" id="{27E1C96D-E55C-21D1-6982-678F02C9EA66}"/>
+                <a16:creationId xmlns:a16="http://schemas.microsoft.com/office/drawing/2014/main" id="{468CEE3B-9848-04AE-1E50-2B277B7753AB}"/>
               </a:ext>
             </a:extLst>
           </p:cNvPr>
@@ -29660,7 +29685,7 @@
           <p:cNvPr id="103" name="TextBox 102">
             <a:extLst>
               <a:ext uri="{FF2B5EF4-FFF2-40B4-BE49-F238E27FC236}">
-                <a16:creationId xmlns:a16="http://schemas.microsoft.com/office/drawing/2014/main" id="{26795718-DDCC-A2CA-6D5A-D6BA1F5AFF1C}"/>
+                <a16:creationId xmlns:a16="http://schemas.microsoft.com/office/drawing/2014/main" id="{FD76A413-763C-E5BE-7C84-F3BBD885D2F8}"/>
               </a:ext>
             </a:extLst>
           </p:cNvPr>
@@ -29701,7 +29726,7 @@
           <p:cNvPr id="104" name="Oval 103">
             <a:extLst>
               <a:ext uri="{FF2B5EF4-FFF2-40B4-BE49-F238E27FC236}">
-                <a16:creationId xmlns:a16="http://schemas.microsoft.com/office/drawing/2014/main" id="{9232DA0F-77AA-5217-F1B9-E015378FB3E4}"/>
+                <a16:creationId xmlns:a16="http://schemas.microsoft.com/office/drawing/2014/main" id="{8CB69155-A1F1-8021-002C-3F84F0C6D3EF}"/>
               </a:ext>
             </a:extLst>
           </p:cNvPr>
@@ -29755,7 +29780,7 @@
           <p:cNvPr id="105" name="TextBox 104">
             <a:extLst>
               <a:ext uri="{FF2B5EF4-FFF2-40B4-BE49-F238E27FC236}">
-                <a16:creationId xmlns:a16="http://schemas.microsoft.com/office/drawing/2014/main" id="{4765F3B5-183C-6600-2D54-154D8CF85CD5}"/>
+                <a16:creationId xmlns:a16="http://schemas.microsoft.com/office/drawing/2014/main" id="{F513A170-B7A0-3754-BE48-F46087C07305}"/>
               </a:ext>
             </a:extLst>
           </p:cNvPr>
@@ -29796,7 +29821,7 @@
           <p:cNvPr id="106" name="TextBox 105">
             <a:extLst>
               <a:ext uri="{FF2B5EF4-FFF2-40B4-BE49-F238E27FC236}">
-                <a16:creationId xmlns:a16="http://schemas.microsoft.com/office/drawing/2014/main" id="{CBEC2577-38E2-0792-F4B7-B854B2BBE310}"/>
+                <a16:creationId xmlns:a16="http://schemas.microsoft.com/office/drawing/2014/main" id="{A1C9E21A-115D-5B30-A09B-D54C068F6A7E}"/>
               </a:ext>
             </a:extLst>
           </p:cNvPr>
@@ -29837,7 +29862,7 @@
           <p:cNvPr id="107" name="Rectangle: Rounded Corners 106">
             <a:extLst>
               <a:ext uri="{FF2B5EF4-FFF2-40B4-BE49-F238E27FC236}">
-                <a16:creationId xmlns:a16="http://schemas.microsoft.com/office/drawing/2014/main" id="{EDC16EB3-862F-C4CF-29D9-AED33A5CAC98}"/>
+                <a16:creationId xmlns:a16="http://schemas.microsoft.com/office/drawing/2014/main" id="{DEF0388B-05B0-045F-2BC0-54DFBD85EEBC}"/>
               </a:ext>
             </a:extLst>
           </p:cNvPr>
@@ -29846,8 +29871,8 @@
         </p:nvSpPr>
         <p:spPr>
           <a:xfrm>
-            <a:off x="5816600" y="4800600"/>
-            <a:ext cx="1524000" cy="381000"/>
+            <a:off x="5765800" y="4800600"/>
+            <a:ext cx="1651000" cy="381000"/>
           </a:xfrm>
           <a:prstGeom prst="roundRect">
             <a:avLst>
@@ -29903,7 +29928,7 @@
           <p:cNvPr id="108" name="Straight Arrow Connector 107">
             <a:extLst>
               <a:ext uri="{FF2B5EF4-FFF2-40B4-BE49-F238E27FC236}">
-                <a16:creationId xmlns:a16="http://schemas.microsoft.com/office/drawing/2014/main" id="{AE71BF61-CCB1-9C3E-A66E-1D2766D9CF05}"/>
+                <a16:creationId xmlns:a16="http://schemas.microsoft.com/office/drawing/2014/main" id="{F25B45D3-91A0-3433-395E-98AAF5C8134E}"/>
               </a:ext>
             </a:extLst>
           </p:cNvPr>
@@ -29912,8 +29937,8 @@
         </p:nvCxnSpPr>
         <p:spPr>
           <a:xfrm>
-            <a:off x="7340600" y="4991100"/>
-            <a:ext cx="101600" cy="328337"/>
+            <a:off x="7416800" y="4991100"/>
+            <a:ext cx="25400" cy="328337"/>
           </a:xfrm>
           <a:prstGeom prst="straightConnector1">
             <a:avLst/>
@@ -29945,7 +29970,7 @@
           <p:cNvPr id="109" name="Rectangle: Rounded Corners 108">
             <a:extLst>
               <a:ext uri="{FF2B5EF4-FFF2-40B4-BE49-F238E27FC236}">
-                <a16:creationId xmlns:a16="http://schemas.microsoft.com/office/drawing/2014/main" id="{834E6F4B-E22A-7553-DC6B-A5DF5AA9569B}"/>
+                <a16:creationId xmlns:a16="http://schemas.microsoft.com/office/drawing/2014/main" id="{2E29163E-7C94-8E30-08FD-FE66E1CB28E5}"/>
               </a:ext>
             </a:extLst>
           </p:cNvPr>
@@ -30022,7 +30047,7 @@
           <p:cNvPr id="110" name="TextBox 109">
             <a:extLst>
               <a:ext uri="{FF2B5EF4-FFF2-40B4-BE49-F238E27FC236}">
-                <a16:creationId xmlns:a16="http://schemas.microsoft.com/office/drawing/2014/main" id="{AC9559F0-3E3C-B1F9-057F-DE05026F3555}"/>
+                <a16:creationId xmlns:a16="http://schemas.microsoft.com/office/drawing/2014/main" id="{4829F296-CEC4-8864-09D4-8DC0C1504CC6}"/>
               </a:ext>
             </a:extLst>
           </p:cNvPr>
@@ -30060,7 +30085,7 @@
           <p:cNvPr id="111" name="TextBox 110">
             <a:extLst>
               <a:ext uri="{FF2B5EF4-FFF2-40B4-BE49-F238E27FC236}">
-                <a16:creationId xmlns:a16="http://schemas.microsoft.com/office/drawing/2014/main" id="{4F4F9295-EE0C-4C29-75CA-F82DC0CF2E0C}"/>
+                <a16:creationId xmlns:a16="http://schemas.microsoft.com/office/drawing/2014/main" id="{5840D0F5-4FC8-E75C-921B-6AF610640DE0}"/>
               </a:ext>
             </a:extLst>
           </p:cNvPr>
@@ -30617,7 +30642,7 @@
           <p:cNvPr id="2" name="TextBox 1">
             <a:extLst>
               <a:ext uri="{FF2B5EF4-FFF2-40B4-BE49-F238E27FC236}">
-                <a16:creationId xmlns:a16="http://schemas.microsoft.com/office/drawing/2014/main" id="{8621B68D-FF79-BDF8-C2DE-2CF8C3B08B82}"/>
+                <a16:creationId xmlns:a16="http://schemas.microsoft.com/office/drawing/2014/main" id="{8B0DCC3C-DCB8-B87A-593D-AC1476EB7B99}"/>
               </a:ext>
             </a:extLst>
           </p:cNvPr>
@@ -30658,7 +30683,7 @@
           <p:cNvPr id="3" name="TextBox 2">
             <a:extLst>
               <a:ext uri="{FF2B5EF4-FFF2-40B4-BE49-F238E27FC236}">
-                <a16:creationId xmlns:a16="http://schemas.microsoft.com/office/drawing/2014/main" id="{BD6C8F0E-9275-FC8B-D715-5A55583DD3A7}"/>
+                <a16:creationId xmlns:a16="http://schemas.microsoft.com/office/drawing/2014/main" id="{12460C00-AABE-0371-4287-A03C50A6F61E}"/>
               </a:ext>
             </a:extLst>
           </p:cNvPr>
@@ -30695,7 +30720,7 @@
           <p:cNvPr id="4" name="Rectangle: Rounded Corners 3">
             <a:extLst>
               <a:ext uri="{FF2B5EF4-FFF2-40B4-BE49-F238E27FC236}">
-                <a16:creationId xmlns:a16="http://schemas.microsoft.com/office/drawing/2014/main" id="{F1CB5592-38C5-F81E-CF69-7CA05E63C0BB}"/>
+                <a16:creationId xmlns:a16="http://schemas.microsoft.com/office/drawing/2014/main" id="{219C15A2-981C-96BB-49DC-B1388B965C46}"/>
               </a:ext>
             </a:extLst>
           </p:cNvPr>
@@ -30763,7 +30788,7 @@
           <p:cNvPr id="6" name="Graphic 5" descr="user icon">
             <a:extLst>
               <a:ext uri="{FF2B5EF4-FFF2-40B4-BE49-F238E27FC236}">
-                <a16:creationId xmlns:a16="http://schemas.microsoft.com/office/drawing/2014/main" id="{930951E9-334A-8D6D-417D-C151DF15935E}"/>
+                <a16:creationId xmlns:a16="http://schemas.microsoft.com/office/drawing/2014/main" id="{C6311E67-B0DC-1640-F9BF-C6CE3ECB8EB2}"/>
               </a:ext>
             </a:extLst>
           </p:cNvPr>
@@ -30799,7 +30824,7 @@
           <p:cNvPr id="7" name="TextBox 6">
             <a:extLst>
               <a:ext uri="{FF2B5EF4-FFF2-40B4-BE49-F238E27FC236}">
-                <a16:creationId xmlns:a16="http://schemas.microsoft.com/office/drawing/2014/main" id="{237D2177-FD74-2986-4C51-EE8E226B1F40}"/>
+                <a16:creationId xmlns:a16="http://schemas.microsoft.com/office/drawing/2014/main" id="{0A33303B-BD7E-BA21-304A-198A7AAE70F6}"/>
               </a:ext>
             </a:extLst>
           </p:cNvPr>
@@ -30836,7 +30861,7 @@
           <p:cNvPr id="8" name="TextBox 7">
             <a:extLst>
               <a:ext uri="{FF2B5EF4-FFF2-40B4-BE49-F238E27FC236}">
-                <a16:creationId xmlns:a16="http://schemas.microsoft.com/office/drawing/2014/main" id="{B3819BC6-76BB-232E-8155-35F454E34B5A}"/>
+                <a16:creationId xmlns:a16="http://schemas.microsoft.com/office/drawing/2014/main" id="{3E5381B4-DE80-729E-496E-8C7850326E53}"/>
               </a:ext>
             </a:extLst>
           </p:cNvPr>
@@ -30876,7 +30901,7 @@
           <p:cNvPr id="9" name="Rectangle: Rounded Corners 8">
             <a:extLst>
               <a:ext uri="{FF2B5EF4-FFF2-40B4-BE49-F238E27FC236}">
-                <a16:creationId xmlns:a16="http://schemas.microsoft.com/office/drawing/2014/main" id="{4EAD8EDB-30E2-AC74-309B-3312F96343FA}"/>
+                <a16:creationId xmlns:a16="http://schemas.microsoft.com/office/drawing/2014/main" id="{B7A73AF1-CBF5-7EBA-1FF3-14E5D2E750E3}"/>
               </a:ext>
             </a:extLst>
           </p:cNvPr>
@@ -30944,7 +30969,7 @@
           <p:cNvPr id="11" name="Graphic 10" descr="hospital icon">
             <a:extLst>
               <a:ext uri="{FF2B5EF4-FFF2-40B4-BE49-F238E27FC236}">
-                <a16:creationId xmlns:a16="http://schemas.microsoft.com/office/drawing/2014/main" id="{E50B80D2-40D7-C5E4-EFC3-B35881A8FC03}"/>
+                <a16:creationId xmlns:a16="http://schemas.microsoft.com/office/drawing/2014/main" id="{F490CC23-FE06-EE22-955C-E3851298D221}"/>
               </a:ext>
             </a:extLst>
           </p:cNvPr>
@@ -30980,7 +31005,7 @@
           <p:cNvPr id="12" name="TextBox 11">
             <a:extLst>
               <a:ext uri="{FF2B5EF4-FFF2-40B4-BE49-F238E27FC236}">
-                <a16:creationId xmlns:a16="http://schemas.microsoft.com/office/drawing/2014/main" id="{46B7496C-328C-0810-1189-6C88725D8B16}"/>
+                <a16:creationId xmlns:a16="http://schemas.microsoft.com/office/drawing/2014/main" id="{3FBA5300-CED6-9285-8EC1-891AC6F7E2FB}"/>
               </a:ext>
             </a:extLst>
           </p:cNvPr>
@@ -31017,7 +31042,7 @@
           <p:cNvPr id="13" name="TextBox 12">
             <a:extLst>
               <a:ext uri="{FF2B5EF4-FFF2-40B4-BE49-F238E27FC236}">
-                <a16:creationId xmlns:a16="http://schemas.microsoft.com/office/drawing/2014/main" id="{F4C97C62-4678-78B5-35F1-F2ACE7A6F2E6}"/>
+                <a16:creationId xmlns:a16="http://schemas.microsoft.com/office/drawing/2014/main" id="{581454A8-A3AD-E213-1D46-84AD52EE6852}"/>
               </a:ext>
             </a:extLst>
           </p:cNvPr>
@@ -31057,7 +31082,7 @@
           <p:cNvPr id="14" name="Rectangle: Rounded Corners 13">
             <a:extLst>
               <a:ext uri="{FF2B5EF4-FFF2-40B4-BE49-F238E27FC236}">
-                <a16:creationId xmlns:a16="http://schemas.microsoft.com/office/drawing/2014/main" id="{D59CFE15-A97B-00C1-2471-8D5EEB0A923E}"/>
+                <a16:creationId xmlns:a16="http://schemas.microsoft.com/office/drawing/2014/main" id="{60D56042-486F-83C0-A7FE-1018969D9D76}"/>
               </a:ext>
             </a:extLst>
           </p:cNvPr>
@@ -31125,7 +31150,7 @@
           <p:cNvPr id="16" name="Graphic 15" descr="landmark icon">
             <a:extLst>
               <a:ext uri="{FF2B5EF4-FFF2-40B4-BE49-F238E27FC236}">
-                <a16:creationId xmlns:a16="http://schemas.microsoft.com/office/drawing/2014/main" id="{0087D08E-6B20-1026-BAC1-55B6B8FDB396}"/>
+                <a16:creationId xmlns:a16="http://schemas.microsoft.com/office/drawing/2014/main" id="{331CCA02-6399-4E88-01C4-90373D045451}"/>
               </a:ext>
             </a:extLst>
           </p:cNvPr>
@@ -31161,7 +31186,7 @@
           <p:cNvPr id="17" name="TextBox 16">
             <a:extLst>
               <a:ext uri="{FF2B5EF4-FFF2-40B4-BE49-F238E27FC236}">
-                <a16:creationId xmlns:a16="http://schemas.microsoft.com/office/drawing/2014/main" id="{9C7E44F6-3C41-F739-5042-0D9373987C6D}"/>
+                <a16:creationId xmlns:a16="http://schemas.microsoft.com/office/drawing/2014/main" id="{CC5AC1AB-6FDC-D902-776C-2C17D4055AFC}"/>
               </a:ext>
             </a:extLst>
           </p:cNvPr>
@@ -31198,7 +31223,7 @@
           <p:cNvPr id="18" name="TextBox 17">
             <a:extLst>
               <a:ext uri="{FF2B5EF4-FFF2-40B4-BE49-F238E27FC236}">
-                <a16:creationId xmlns:a16="http://schemas.microsoft.com/office/drawing/2014/main" id="{3C72F06E-8583-CC99-5E84-649833D4B3DF}"/>
+                <a16:creationId xmlns:a16="http://schemas.microsoft.com/office/drawing/2014/main" id="{D22A9DB6-EA01-670C-80C3-A041954E93B1}"/>
               </a:ext>
             </a:extLst>
           </p:cNvPr>
@@ -31238,7 +31263,7 @@
           <p:cNvPr id="19" name="Rectangle: Rounded Corners 18">
             <a:extLst>
               <a:ext uri="{FF2B5EF4-FFF2-40B4-BE49-F238E27FC236}">
-                <a16:creationId xmlns:a16="http://schemas.microsoft.com/office/drawing/2014/main" id="{E906CE1E-ABE4-E3CF-53ED-B69226CBB45C}"/>
+                <a16:creationId xmlns:a16="http://schemas.microsoft.com/office/drawing/2014/main" id="{0D0D2D8B-591B-69F9-A8D7-DFAD932EB1E3}"/>
               </a:ext>
             </a:extLst>
           </p:cNvPr>
@@ -31306,7 +31331,7 @@
           <p:cNvPr id="21" name="Graphic 20" descr="square-terminal icon">
             <a:extLst>
               <a:ext uri="{FF2B5EF4-FFF2-40B4-BE49-F238E27FC236}">
-                <a16:creationId xmlns:a16="http://schemas.microsoft.com/office/drawing/2014/main" id="{0F02E921-83EA-6208-6371-8706D09BB384}"/>
+                <a16:creationId xmlns:a16="http://schemas.microsoft.com/office/drawing/2014/main" id="{FD227ABF-F69C-A5DD-7659-8D9EE29FA7F7}"/>
               </a:ext>
             </a:extLst>
           </p:cNvPr>
@@ -31342,7 +31367,7 @@
           <p:cNvPr id="22" name="TextBox 21">
             <a:extLst>
               <a:ext uri="{FF2B5EF4-FFF2-40B4-BE49-F238E27FC236}">
-                <a16:creationId xmlns:a16="http://schemas.microsoft.com/office/drawing/2014/main" id="{21E3BC89-B2B6-D365-C13D-91C79CEC1548}"/>
+                <a16:creationId xmlns:a16="http://schemas.microsoft.com/office/drawing/2014/main" id="{EB8C2418-04FC-6B37-8158-E3D8FEB6BDCB}"/>
               </a:ext>
             </a:extLst>
           </p:cNvPr>
@@ -31379,7 +31404,7 @@
           <p:cNvPr id="23" name="TextBox 22">
             <a:extLst>
               <a:ext uri="{FF2B5EF4-FFF2-40B4-BE49-F238E27FC236}">
-                <a16:creationId xmlns:a16="http://schemas.microsoft.com/office/drawing/2014/main" id="{AA2063E8-02DA-95FA-684A-8C32BE8E3EF2}"/>
+                <a16:creationId xmlns:a16="http://schemas.microsoft.com/office/drawing/2014/main" id="{8AEF6224-17B0-409C-9634-FA645BFA0571}"/>
               </a:ext>
             </a:extLst>
           </p:cNvPr>
@@ -31419,7 +31444,7 @@
           <p:cNvPr id="24" name="Rectangle: Rounded Corners 23">
             <a:extLst>
               <a:ext uri="{FF2B5EF4-FFF2-40B4-BE49-F238E27FC236}">
-                <a16:creationId xmlns:a16="http://schemas.microsoft.com/office/drawing/2014/main" id="{3976843C-6A72-5F1F-8C41-6D4082FE7798}"/>
+                <a16:creationId xmlns:a16="http://schemas.microsoft.com/office/drawing/2014/main" id="{B99B0F45-49E6-5273-3722-04B0B16EA41F}"/>
               </a:ext>
             </a:extLst>
           </p:cNvPr>
@@ -31487,7 +31512,7 @@
           <p:cNvPr id="26" name="Graphic 25" descr="building-2 icon">
             <a:extLst>
               <a:ext uri="{FF2B5EF4-FFF2-40B4-BE49-F238E27FC236}">
-                <a16:creationId xmlns:a16="http://schemas.microsoft.com/office/drawing/2014/main" id="{DDBEF44B-1E65-A73F-58FF-694566103613}"/>
+                <a16:creationId xmlns:a16="http://schemas.microsoft.com/office/drawing/2014/main" id="{4E51EE57-EDE6-3FFA-4957-412929FC57F3}"/>
               </a:ext>
             </a:extLst>
           </p:cNvPr>
@@ -31523,7 +31548,7 @@
           <p:cNvPr id="27" name="TextBox 26">
             <a:extLst>
               <a:ext uri="{FF2B5EF4-FFF2-40B4-BE49-F238E27FC236}">
-                <a16:creationId xmlns:a16="http://schemas.microsoft.com/office/drawing/2014/main" id="{4903FA46-A208-ED1E-35C1-BAA4590E2034}"/>
+                <a16:creationId xmlns:a16="http://schemas.microsoft.com/office/drawing/2014/main" id="{C3DF2C98-8C45-7DBC-88DF-1857C09550F0}"/>
               </a:ext>
             </a:extLst>
           </p:cNvPr>
@@ -31560,7 +31585,7 @@
           <p:cNvPr id="28" name="TextBox 27">
             <a:extLst>
               <a:ext uri="{FF2B5EF4-FFF2-40B4-BE49-F238E27FC236}">
-                <a16:creationId xmlns:a16="http://schemas.microsoft.com/office/drawing/2014/main" id="{96CF2249-1C01-0F49-5F89-9CC8E4E989D8}"/>
+                <a16:creationId xmlns:a16="http://schemas.microsoft.com/office/drawing/2014/main" id="{C2004753-B9C9-4713-357C-12C5073DDB6F}"/>
               </a:ext>
             </a:extLst>
           </p:cNvPr>
@@ -31600,7 +31625,7 @@
           <p:cNvPr id="29" name="Straight Arrow Connector 28">
             <a:extLst>
               <a:ext uri="{FF2B5EF4-FFF2-40B4-BE49-F238E27FC236}">
-                <a16:creationId xmlns:a16="http://schemas.microsoft.com/office/drawing/2014/main" id="{6F2A3A07-BF44-96F4-E779-DB9ACC8BF3CD}"/>
+                <a16:creationId xmlns:a16="http://schemas.microsoft.com/office/drawing/2014/main" id="{11AC0A6E-6CDA-91F0-6B45-FE4096EF4632}"/>
               </a:ext>
             </a:extLst>
           </p:cNvPr>
@@ -31642,7 +31667,7 @@
           <p:cNvPr id="30" name="TextBox 29">
             <a:extLst>
               <a:ext uri="{FF2B5EF4-FFF2-40B4-BE49-F238E27FC236}">
-                <a16:creationId xmlns:a16="http://schemas.microsoft.com/office/drawing/2014/main" id="{BCACD9E4-576C-A15A-2D5D-AE6AE64B10FF}"/>
+                <a16:creationId xmlns:a16="http://schemas.microsoft.com/office/drawing/2014/main" id="{80B3FDDE-5B36-E0B0-43F7-6BD414242024}"/>
               </a:ext>
             </a:extLst>
           </p:cNvPr>
@@ -31679,7 +31704,7 @@
           <p:cNvPr id="31" name="Rectangle: Rounded Corners 30">
             <a:extLst>
               <a:ext uri="{FF2B5EF4-FFF2-40B4-BE49-F238E27FC236}">
-                <a16:creationId xmlns:a16="http://schemas.microsoft.com/office/drawing/2014/main" id="{63D8F7A6-85B3-891C-3D0E-FC322BAD5681}"/>
+                <a16:creationId xmlns:a16="http://schemas.microsoft.com/office/drawing/2014/main" id="{E07F2F67-BEEB-E8A3-2F37-4330FF6AE36C}"/>
               </a:ext>
             </a:extLst>
           </p:cNvPr>
@@ -31747,7 +31772,7 @@
           <p:cNvPr id="33" name="Graphic 32" descr="hand-heart icon">
             <a:extLst>
               <a:ext uri="{FF2B5EF4-FFF2-40B4-BE49-F238E27FC236}">
-                <a16:creationId xmlns:a16="http://schemas.microsoft.com/office/drawing/2014/main" id="{B015AF02-CD99-E17A-DBB3-E710CF32B0B1}"/>
+                <a16:creationId xmlns:a16="http://schemas.microsoft.com/office/drawing/2014/main" id="{4DDF2769-2FA5-D9D8-6903-D8A41592025B}"/>
               </a:ext>
             </a:extLst>
           </p:cNvPr>
@@ -31783,7 +31808,7 @@
           <p:cNvPr id="34" name="TextBox 33">
             <a:extLst>
               <a:ext uri="{FF2B5EF4-FFF2-40B4-BE49-F238E27FC236}">
-                <a16:creationId xmlns:a16="http://schemas.microsoft.com/office/drawing/2014/main" id="{7A1F822D-FF58-FB3F-7349-F13663EF4249}"/>
+                <a16:creationId xmlns:a16="http://schemas.microsoft.com/office/drawing/2014/main" id="{FC5E1E1F-9A83-17DE-1F60-47AF70B72241}"/>
               </a:ext>
             </a:extLst>
           </p:cNvPr>
@@ -31844,7 +31869,7 @@
           <p:cNvPr id="35" name="Rectangle: Rounded Corners 34">
             <a:extLst>
               <a:ext uri="{FF2B5EF4-FFF2-40B4-BE49-F238E27FC236}">
-                <a16:creationId xmlns:a16="http://schemas.microsoft.com/office/drawing/2014/main" id="{86371694-8EB4-2E5C-6698-AA61CEB2C740}"/>
+                <a16:creationId xmlns:a16="http://schemas.microsoft.com/office/drawing/2014/main" id="{58FAF000-DE22-0BD5-EEA5-FBF580E405CD}"/>
               </a:ext>
             </a:extLst>
           </p:cNvPr>
@@ -31912,7 +31937,7 @@
           <p:cNvPr id="37" name="Graphic 36" descr="indian-rupee icon">
             <a:extLst>
               <a:ext uri="{FF2B5EF4-FFF2-40B4-BE49-F238E27FC236}">
-                <a16:creationId xmlns:a16="http://schemas.microsoft.com/office/drawing/2014/main" id="{DA618E99-8437-097B-F68D-30A404325499}"/>
+                <a16:creationId xmlns:a16="http://schemas.microsoft.com/office/drawing/2014/main" id="{2FDE7956-A0D6-FC76-10D8-AC2FD0B061E7}"/>
               </a:ext>
             </a:extLst>
           </p:cNvPr>
@@ -31948,7 +31973,7 @@
           <p:cNvPr id="38" name="TextBox 37">
             <a:extLst>
               <a:ext uri="{FF2B5EF4-FFF2-40B4-BE49-F238E27FC236}">
-                <a16:creationId xmlns:a16="http://schemas.microsoft.com/office/drawing/2014/main" id="{F3D13015-5814-3368-508F-E9218259655E}"/>
+                <a16:creationId xmlns:a16="http://schemas.microsoft.com/office/drawing/2014/main" id="{4740947A-A655-8708-FA3C-6FCEFFE21F4D}"/>
               </a:ext>
             </a:extLst>
           </p:cNvPr>
@@ -31999,7 +32024,7 @@
                 </a:solidFill>
                 <a:latin typeface="Arial" panose="020B0604020202020204" pitchFamily="34" charset="0"/>
               </a:rPr>
-              <a:t>Cuts breach and DPDP penalty exposure (up to ₹250 Cr) with zero server spend</a:t>
+              <a:t>Avoids breach costs (₹25.5 Cr average in India, IBM 2026) and DPDP penalties up to ₹250 Cr, with zero server spend</a:t>
             </a:r>
           </a:p>
         </p:txBody>
@@ -32009,7 +32034,7 @@
           <p:cNvPr id="39" name="Rectangle: Rounded Corners 38">
             <a:extLst>
               <a:ext uri="{FF2B5EF4-FFF2-40B4-BE49-F238E27FC236}">
-                <a16:creationId xmlns:a16="http://schemas.microsoft.com/office/drawing/2014/main" id="{B6EBF0FE-4FF5-A447-5C25-2AB9D681BDCE}"/>
+                <a16:creationId xmlns:a16="http://schemas.microsoft.com/office/drawing/2014/main" id="{FCFEAEC7-A1DB-E306-76E9-EC1C780D0D6D}"/>
               </a:ext>
             </a:extLst>
           </p:cNvPr>
@@ -32077,7 +32102,7 @@
           <p:cNvPr id="41" name="Graphic 40" descr="scale icon">
             <a:extLst>
               <a:ext uri="{FF2B5EF4-FFF2-40B4-BE49-F238E27FC236}">
-                <a16:creationId xmlns:a16="http://schemas.microsoft.com/office/drawing/2014/main" id="{F3296F1B-2882-2843-7209-9C3547432A1D}"/>
+                <a16:creationId xmlns:a16="http://schemas.microsoft.com/office/drawing/2014/main" id="{1BEF9222-994A-2544-3EE0-81EB1B91DF33}"/>
               </a:ext>
             </a:extLst>
           </p:cNvPr>
@@ -32113,7 +32138,7 @@
           <p:cNvPr id="42" name="TextBox 41">
             <a:extLst>
               <a:ext uri="{FF2B5EF4-FFF2-40B4-BE49-F238E27FC236}">
-                <a16:creationId xmlns:a16="http://schemas.microsoft.com/office/drawing/2014/main" id="{EFB7B430-BAAE-D68E-B42F-CE596C465135}"/>
+                <a16:creationId xmlns:a16="http://schemas.microsoft.com/office/drawing/2014/main" id="{DCABD902-FDC8-9BA4-88E3-9C350AD8DE91}"/>
               </a:ext>
             </a:extLst>
           </p:cNvPr>
@@ -32174,7 +32199,7 @@
           <p:cNvPr id="43" name="Rectangle: Rounded Corners 42">
             <a:extLst>
               <a:ext uri="{FF2B5EF4-FFF2-40B4-BE49-F238E27FC236}">
-                <a16:creationId xmlns:a16="http://schemas.microsoft.com/office/drawing/2014/main" id="{56DF5289-5CF4-777D-9D04-06C1CD111575}"/>
+                <a16:creationId xmlns:a16="http://schemas.microsoft.com/office/drawing/2014/main" id="{154CB49D-44DA-2D52-9115-E10AF537DD5A}"/>
               </a:ext>
             </a:extLst>
           </p:cNvPr>
@@ -32242,7 +32267,7 @@
           <p:cNvPr id="45" name="Graphic 44" descr="leaf icon">
             <a:extLst>
               <a:ext uri="{FF2B5EF4-FFF2-40B4-BE49-F238E27FC236}">
-                <a16:creationId xmlns:a16="http://schemas.microsoft.com/office/drawing/2014/main" id="{3F9B7CCA-3934-22DF-8409-82167F4D2EB1}"/>
+                <a16:creationId xmlns:a16="http://schemas.microsoft.com/office/drawing/2014/main" id="{19E82C48-2E22-777F-A00C-16260C779DD6}"/>
               </a:ext>
             </a:extLst>
           </p:cNvPr>
@@ -32278,7 +32303,7 @@
           <p:cNvPr id="46" name="TextBox 45">
             <a:extLst>
               <a:ext uri="{FF2B5EF4-FFF2-40B4-BE49-F238E27FC236}">
-                <a16:creationId xmlns:a16="http://schemas.microsoft.com/office/drawing/2014/main" id="{173A2613-3706-5C2D-2F8C-62A81B34E0F1}"/>
+                <a16:creationId xmlns:a16="http://schemas.microsoft.com/office/drawing/2014/main" id="{B79C0741-91EC-4062-101A-8EA72325255A}"/>
               </a:ext>
             </a:extLst>
           </p:cNvPr>
@@ -32339,7 +32364,7 @@
           <p:cNvPr id="47" name="Rectangle: Rounded Corners 46">
             <a:extLst>
               <a:ext uri="{FF2B5EF4-FFF2-40B4-BE49-F238E27FC236}">
-                <a16:creationId xmlns:a16="http://schemas.microsoft.com/office/drawing/2014/main" id="{85CB4CAD-B0DB-55EB-D991-5B4BC5FC50E5}"/>
+                <a16:creationId xmlns:a16="http://schemas.microsoft.com/office/drawing/2014/main" id="{DB4F1838-F679-1146-C5E4-004802A5E437}"/>
               </a:ext>
             </a:extLst>
           </p:cNvPr>
@@ -32416,7 +32441,7 @@
           <p:cNvPr id="48" name="TextBox 47">
             <a:extLst>
               <a:ext uri="{FF2B5EF4-FFF2-40B4-BE49-F238E27FC236}">
-                <a16:creationId xmlns:a16="http://schemas.microsoft.com/office/drawing/2014/main" id="{BB1F8E73-85F7-866C-748B-16C2CE017583}"/>
+                <a16:creationId xmlns:a16="http://schemas.microsoft.com/office/drawing/2014/main" id="{C9CC1011-BBB2-4EB9-BEFF-5174884475D0}"/>
               </a:ext>
             </a:extLst>
           </p:cNvPr>
@@ -32453,7 +32478,7 @@
           <p:cNvPr id="49" name="Rectangle: Rounded Corners 48">
             <a:extLst>
               <a:ext uri="{FF2B5EF4-FFF2-40B4-BE49-F238E27FC236}">
-                <a16:creationId xmlns:a16="http://schemas.microsoft.com/office/drawing/2014/main" id="{FF64510E-1327-B978-56D9-5246FDB5A5B5}"/>
+                <a16:creationId xmlns:a16="http://schemas.microsoft.com/office/drawing/2014/main" id="{1326BF87-6294-940F-E3D5-122A56A832C7}"/>
               </a:ext>
             </a:extLst>
           </p:cNvPr>
@@ -32527,7 +32552,7 @@
           <p:cNvPr id="51" name="Graphic 50" descr="refresh-cw icon">
             <a:extLst>
               <a:ext uri="{FF2B5EF4-FFF2-40B4-BE49-F238E27FC236}">
-                <a16:creationId xmlns:a16="http://schemas.microsoft.com/office/drawing/2014/main" id="{8D950051-913A-AA23-DE19-A7EE994D2A78}"/>
+                <a16:creationId xmlns:a16="http://schemas.microsoft.com/office/drawing/2014/main" id="{CC91B16A-D08A-FDDE-177C-A4CA0F16429D}"/>
               </a:ext>
             </a:extLst>
           </p:cNvPr>
@@ -32563,7 +32588,7 @@
           <p:cNvPr id="52" name="TextBox 51">
             <a:extLst>
               <a:ext uri="{FF2B5EF4-FFF2-40B4-BE49-F238E27FC236}">
-                <a16:creationId xmlns:a16="http://schemas.microsoft.com/office/drawing/2014/main" id="{A5F8F0A8-415A-405F-C862-0E30BEE2CC96}"/>
+                <a16:creationId xmlns:a16="http://schemas.microsoft.com/office/drawing/2014/main" id="{B0DFBFF6-0F6B-EC95-287A-4EB5CBBF95BA}"/>
               </a:ext>
             </a:extLst>
           </p:cNvPr>
@@ -32603,7 +32628,7 @@
           <p:cNvPr id="53" name="Rectangle: Rounded Corners 52">
             <a:extLst>
               <a:ext uri="{FF2B5EF4-FFF2-40B4-BE49-F238E27FC236}">
-                <a16:creationId xmlns:a16="http://schemas.microsoft.com/office/drawing/2014/main" id="{B389AB92-260A-1A77-5559-FE5C9F401FB2}"/>
+                <a16:creationId xmlns:a16="http://schemas.microsoft.com/office/drawing/2014/main" id="{0B2052ED-94E3-E0AB-1CEF-AD59E59E82B7}"/>
               </a:ext>
             </a:extLst>
           </p:cNvPr>
@@ -32677,7 +32702,7 @@
           <p:cNvPr id="55" name="Graphic 54" descr="scan-text icon">
             <a:extLst>
               <a:ext uri="{FF2B5EF4-FFF2-40B4-BE49-F238E27FC236}">
-                <a16:creationId xmlns:a16="http://schemas.microsoft.com/office/drawing/2014/main" id="{C27A6662-139F-0731-C849-9B11391A76A1}"/>
+                <a16:creationId xmlns:a16="http://schemas.microsoft.com/office/drawing/2014/main" id="{B0EDB819-6026-5EA1-F248-25A5EE286EDB}"/>
               </a:ext>
             </a:extLst>
           </p:cNvPr>
@@ -32713,7 +32738,7 @@
           <p:cNvPr id="56" name="TextBox 55">
             <a:extLst>
               <a:ext uri="{FF2B5EF4-FFF2-40B4-BE49-F238E27FC236}">
-                <a16:creationId xmlns:a16="http://schemas.microsoft.com/office/drawing/2014/main" id="{E49E8E0B-91EB-B382-5223-06F23E03CF81}"/>
+                <a16:creationId xmlns:a16="http://schemas.microsoft.com/office/drawing/2014/main" id="{61D56DDB-29D5-B6B0-7C48-D0A89620E45B}"/>
               </a:ext>
             </a:extLst>
           </p:cNvPr>
@@ -32753,7 +32778,7 @@
           <p:cNvPr id="57" name="Rectangle: Rounded Corners 56">
             <a:extLst>
               <a:ext uri="{FF2B5EF4-FFF2-40B4-BE49-F238E27FC236}">
-                <a16:creationId xmlns:a16="http://schemas.microsoft.com/office/drawing/2014/main" id="{957B748A-33A8-E2F7-1F7B-0EAEF937F57E}"/>
+                <a16:creationId xmlns:a16="http://schemas.microsoft.com/office/drawing/2014/main" id="{7DB3B5D1-E197-833B-3CE8-94D6DBD7BF75}"/>
               </a:ext>
             </a:extLst>
           </p:cNvPr>
@@ -32827,7 +32852,7 @@
           <p:cNvPr id="59" name="Graphic 58" descr="languages icon">
             <a:extLst>
               <a:ext uri="{FF2B5EF4-FFF2-40B4-BE49-F238E27FC236}">
-                <a16:creationId xmlns:a16="http://schemas.microsoft.com/office/drawing/2014/main" id="{C4EA5BC6-B466-42BE-0480-33AAC1DD9849}"/>
+                <a16:creationId xmlns:a16="http://schemas.microsoft.com/office/drawing/2014/main" id="{4118902C-45B3-B82B-629D-3B5D17055BF3}"/>
               </a:ext>
             </a:extLst>
           </p:cNvPr>
@@ -32863,7 +32888,7 @@
           <p:cNvPr id="60" name="TextBox 59">
             <a:extLst>
               <a:ext uri="{FF2B5EF4-FFF2-40B4-BE49-F238E27FC236}">
-                <a16:creationId xmlns:a16="http://schemas.microsoft.com/office/drawing/2014/main" id="{04DBFC1E-4B91-D169-CA7F-9CCE42C3CAE6}"/>
+                <a16:creationId xmlns:a16="http://schemas.microsoft.com/office/drawing/2014/main" id="{5D84893E-54A0-70FD-A989-56191B361BEF}"/>
               </a:ext>
             </a:extLst>
           </p:cNvPr>
@@ -32903,7 +32928,7 @@
           <p:cNvPr id="61" name="Rectangle: Rounded Corners 60">
             <a:extLst>
               <a:ext uri="{FF2B5EF4-FFF2-40B4-BE49-F238E27FC236}">
-                <a16:creationId xmlns:a16="http://schemas.microsoft.com/office/drawing/2014/main" id="{EF9EAC4E-0635-1F87-3C19-ADDD5585250F}"/>
+                <a16:creationId xmlns:a16="http://schemas.microsoft.com/office/drawing/2014/main" id="{A2DBF5C8-CAB6-963C-D017-9AA8E6D551A9}"/>
               </a:ext>
             </a:extLst>
           </p:cNvPr>
@@ -32977,7 +33002,7 @@
           <p:cNvPr id="63" name="Graphic 62" descr="brain-circuit icon">
             <a:extLst>
               <a:ext uri="{FF2B5EF4-FFF2-40B4-BE49-F238E27FC236}">
-                <a16:creationId xmlns:a16="http://schemas.microsoft.com/office/drawing/2014/main" id="{641A868C-2028-108D-5D63-8A616CFA68B9}"/>
+                <a16:creationId xmlns:a16="http://schemas.microsoft.com/office/drawing/2014/main" id="{4CD291A3-4CBC-C2EC-0771-F2E44167F1A8}"/>
               </a:ext>
             </a:extLst>
           </p:cNvPr>
@@ -33013,7 +33038,7 @@
           <p:cNvPr id="128" name="TextBox 127">
             <a:extLst>
               <a:ext uri="{FF2B5EF4-FFF2-40B4-BE49-F238E27FC236}">
-                <a16:creationId xmlns:a16="http://schemas.microsoft.com/office/drawing/2014/main" id="{CA4539C4-CFC4-8FEC-528D-8D9817322D49}"/>
+                <a16:creationId xmlns:a16="http://schemas.microsoft.com/office/drawing/2014/main" id="{12198BED-6A72-DEB4-B336-E2B3F5350D56}"/>
               </a:ext>
             </a:extLst>
           </p:cNvPr>
@@ -33053,7 +33078,7 @@
           <p:cNvPr id="129" name="Rectangle: Rounded Corners 128">
             <a:extLst>
               <a:ext uri="{FF2B5EF4-FFF2-40B4-BE49-F238E27FC236}">
-                <a16:creationId xmlns:a16="http://schemas.microsoft.com/office/drawing/2014/main" id="{5DD4BB73-86A5-B1B2-AA5F-B525DB7D920D}"/>
+                <a16:creationId xmlns:a16="http://schemas.microsoft.com/office/drawing/2014/main" id="{A8946081-6C82-0605-C6EE-F5B9DF4FFF95}"/>
               </a:ext>
             </a:extLst>
           </p:cNvPr>
@@ -33127,7 +33152,7 @@
           <p:cNvPr id="131" name="Graphic 130" descr="route icon">
             <a:extLst>
               <a:ext uri="{FF2B5EF4-FFF2-40B4-BE49-F238E27FC236}">
-                <a16:creationId xmlns:a16="http://schemas.microsoft.com/office/drawing/2014/main" id="{484DC3E3-C698-79B6-D6A0-B606B4640914}"/>
+                <a16:creationId xmlns:a16="http://schemas.microsoft.com/office/drawing/2014/main" id="{772CD972-CC06-D9FA-583B-B4F85BBC58DF}"/>
               </a:ext>
             </a:extLst>
           </p:cNvPr>
@@ -33163,7 +33188,7 @@
           <p:cNvPr id="132" name="TextBox 131">
             <a:extLst>
               <a:ext uri="{FF2B5EF4-FFF2-40B4-BE49-F238E27FC236}">
-                <a16:creationId xmlns:a16="http://schemas.microsoft.com/office/drawing/2014/main" id="{3957535F-9534-8BA7-3441-B5DAA158812E}"/>
+                <a16:creationId xmlns:a16="http://schemas.microsoft.com/office/drawing/2014/main" id="{9888E039-9B28-AFE6-8606-011197DD7F83}"/>
               </a:ext>
             </a:extLst>
           </p:cNvPr>
@@ -33203,7 +33228,7 @@
           <p:cNvPr id="133" name="Rectangle: Rounded Corners 132">
             <a:extLst>
               <a:ext uri="{FF2B5EF4-FFF2-40B4-BE49-F238E27FC236}">
-                <a16:creationId xmlns:a16="http://schemas.microsoft.com/office/drawing/2014/main" id="{E5FF8EEF-A5B8-8B03-8373-13EAE4BFE1A0}"/>
+                <a16:creationId xmlns:a16="http://schemas.microsoft.com/office/drawing/2014/main" id="{5E1059DE-1598-38C6-C614-7D22E0A22691}"/>
               </a:ext>
             </a:extLst>
           </p:cNvPr>
@@ -33277,7 +33302,7 @@
           <p:cNvPr id="142" name="Graphic 141" descr="file-lock icon">
             <a:extLst>
               <a:ext uri="{FF2B5EF4-FFF2-40B4-BE49-F238E27FC236}">
-                <a16:creationId xmlns:a16="http://schemas.microsoft.com/office/drawing/2014/main" id="{E90BE953-B4F2-2A6A-B42E-46BF6A8CD455}"/>
+                <a16:creationId xmlns:a16="http://schemas.microsoft.com/office/drawing/2014/main" id="{F14C7EAA-E239-7272-C569-C212BDD123A7}"/>
               </a:ext>
             </a:extLst>
           </p:cNvPr>
@@ -33313,7 +33338,7 @@
           <p:cNvPr id="143" name="TextBox 142">
             <a:extLst>
               <a:ext uri="{FF2B5EF4-FFF2-40B4-BE49-F238E27FC236}">
-                <a16:creationId xmlns:a16="http://schemas.microsoft.com/office/drawing/2014/main" id="{D071DD80-25D7-3651-0027-E1FFEF7F8080}"/>
+                <a16:creationId xmlns:a16="http://schemas.microsoft.com/office/drawing/2014/main" id="{268C8A86-4A72-68C7-C06A-82181BD154C9}"/>
               </a:ext>
             </a:extLst>
           </p:cNvPr>
@@ -33705,10 +33730,51 @@
       </p:pic>
       <p:sp>
         <p:nvSpPr>
-          <p:cNvPr id="2" name="Rectangle 1">
-            <a:extLst>
-              <a:ext uri="{FF2B5EF4-FFF2-40B4-BE49-F238E27FC236}">
-                <a16:creationId xmlns:a16="http://schemas.microsoft.com/office/drawing/2014/main" id="{68ED2008-954E-6950-FCF6-0872A61CB120}"/>
+          <p:cNvPr id="2" name="TextBox 1">
+            <a:extLst>
+              <a:ext uri="{FF2B5EF4-FFF2-40B4-BE49-F238E27FC236}">
+                <a16:creationId xmlns:a16="http://schemas.microsoft.com/office/drawing/2014/main" id="{1361DC32-7C4E-46DF-A614-2E556FC53390}"/>
+              </a:ext>
+            </a:extLst>
+          </p:cNvPr>
+          <p:cNvSpPr txBox="1"/>
+          <p:nvPr/>
+        </p:nvSpPr>
+        <p:spPr>
+          <a:xfrm>
+            <a:off x="1905000" y="685800"/>
+            <a:ext cx="8382000" cy="304800"/>
+          </a:xfrm>
+          <a:prstGeom prst="rect">
+            <a:avLst/>
+          </a:prstGeom>
+          <a:noFill/>
+        </p:spPr>
+        <p:txBody>
+          <a:bodyPr vert="horz" wrap="square" lIns="0" tIns="0" rIns="0" bIns="0" rtlCol="0" anchor="ctr">
+            <a:noAutofit/>
+          </a:bodyPr>
+          <a:lstStyle/>
+          <a:p>
+            <a:pPr algn="ctr"/>
+            <a:r>
+              <a:rPr lang="en-IN" b="1">
+                <a:solidFill>
+                  <a:srgbClr val="1F497D"/>
+                </a:solidFill>
+                <a:latin typeface="Arial" panose="020B0604020202020204" pitchFamily="34" charset="0"/>
+              </a:rPr>
+              <a:t>Why the problem is real, and why the market needs it now</a:t>
+            </a:r>
+          </a:p>
+        </p:txBody>
+      </p:sp>
+      <p:sp>
+        <p:nvSpPr>
+          <p:cNvPr id="3" name="Rectangle: Rounded Corners 2">
+            <a:extLst>
+              <a:ext uri="{FF2B5EF4-FFF2-40B4-BE49-F238E27FC236}">
+                <a16:creationId xmlns:a16="http://schemas.microsoft.com/office/drawing/2014/main" id="{A365B61C-1BB7-30DD-2E74-8DDA8C3EB610}"/>
               </a:ext>
             </a:extLst>
           </p:cNvPr>
@@ -33717,11 +33783,13 @@
         </p:nvSpPr>
         <p:spPr>
           <a:xfrm>
-            <a:off x="228600" y="1219200"/>
-            <a:ext cx="5829300" cy="2489200"/>
-          </a:xfrm>
-          <a:prstGeom prst="rect">
-            <a:avLst/>
+            <a:off x="228600" y="1168400"/>
+            <a:ext cx="5791200" cy="5054600"/>
+          </a:xfrm>
+          <a:prstGeom prst="roundRect">
+            <a:avLst>
+              <a:gd name="adj" fmla="val 3518"/>
+            </a:avLst>
           </a:prstGeom>
           <a:gradFill flip="none" rotWithShape="1">
             <a:gsLst>
@@ -33780,10 +33848,10 @@
       </p:sp>
       <p:pic>
         <p:nvPicPr>
-          <p:cNvPr id="4" name="Graphic 3" descr="book-open icon">
-            <a:extLst>
-              <a:ext uri="{FF2B5EF4-FFF2-40B4-BE49-F238E27FC236}">
-                <a16:creationId xmlns:a16="http://schemas.microsoft.com/office/drawing/2014/main" id="{9A640E17-D026-E7A7-8C0E-FFB23BF21677}"/>
+          <p:cNvPr id="5" name="Graphic 4" descr="book-open icon">
+            <a:extLst>
+              <a:ext uri="{FF2B5EF4-FFF2-40B4-BE49-F238E27FC236}">
+                <a16:creationId xmlns:a16="http://schemas.microsoft.com/office/drawing/2014/main" id="{BFD07E2D-03EC-01AB-4B4C-0460EFCF5F2D}"/>
               </a:ext>
             </a:extLst>
           </p:cNvPr>
@@ -33806,8 +33874,8 @@
         </p:blipFill>
         <p:spPr>
           <a:xfrm>
-            <a:off x="406400" y="1333500"/>
-            <a:ext cx="279400" cy="279400"/>
+            <a:off x="431800" y="1320800"/>
+            <a:ext cx="304800" cy="304800"/>
           </a:xfrm>
           <a:prstGeom prst="rect">
             <a:avLst/>
@@ -33816,10 +33884,10 @@
       </p:pic>
       <p:sp>
         <p:nvSpPr>
-          <p:cNvPr id="5" name="TextBox 4">
-            <a:extLst>
-              <a:ext uri="{FF2B5EF4-FFF2-40B4-BE49-F238E27FC236}">
-                <a16:creationId xmlns:a16="http://schemas.microsoft.com/office/drawing/2014/main" id="{F00E1F3B-66E4-3E9A-CE77-951F286B9C0A}"/>
+          <p:cNvPr id="6" name="TextBox 5">
+            <a:extLst>
+              <a:ext uri="{FF2B5EF4-FFF2-40B4-BE49-F238E27FC236}">
+                <a16:creationId xmlns:a16="http://schemas.microsoft.com/office/drawing/2014/main" id="{4A35F3AC-EE28-C46F-70E1-BA37481543B8}"/>
               </a:ext>
             </a:extLst>
           </p:cNvPr>
@@ -33828,8 +33896,8 @@
         </p:nvSpPr>
         <p:spPr>
           <a:xfrm>
-            <a:off x="762000" y="1295400"/>
-            <a:ext cx="5143500" cy="355600"/>
+            <a:off x="838200" y="1270000"/>
+            <a:ext cx="4953000" cy="406400"/>
           </a:xfrm>
           <a:prstGeom prst="rect">
             <a:avLst/>
@@ -33843,7 +33911,7 @@
           <a:lstStyle/>
           <a:p>
             <a:r>
-              <a:rPr lang="en-IN" sz="1700" b="1">
+              <a:rPr lang="en-IN" sz="1800" b="1">
                 <a:latin typeface="Arial" panose="020B0604020202020204" pitchFamily="34" charset="0"/>
               </a:rPr>
               <a:t>INDUSTRY RESEARCH</a:t>
@@ -33853,10 +33921,84 @@
       </p:sp>
       <p:sp>
         <p:nvSpPr>
-          <p:cNvPr id="6" name="TextBox 5">
-            <a:extLst>
-              <a:ext uri="{FF2B5EF4-FFF2-40B4-BE49-F238E27FC236}">
-                <a16:creationId xmlns:a16="http://schemas.microsoft.com/office/drawing/2014/main" id="{CF433140-03E5-DF78-C239-F0BFD85C05C1}"/>
+          <p:cNvPr id="7" name="Rectangle: Rounded Corners 6">
+            <a:extLst>
+              <a:ext uri="{FF2B5EF4-FFF2-40B4-BE49-F238E27FC236}">
+                <a16:creationId xmlns:a16="http://schemas.microsoft.com/office/drawing/2014/main" id="{8AA0C3ED-BB51-5C8E-5B01-DD67601F3F71}"/>
+              </a:ext>
+            </a:extLst>
+          </p:cNvPr>
+          <p:cNvSpPr/>
+          <p:nvPr/>
+        </p:nvSpPr>
+        <p:spPr>
+          <a:xfrm>
+            <a:off x="406400" y="1803400"/>
+            <a:ext cx="5435600" cy="990600"/>
+          </a:xfrm>
+          <a:prstGeom prst="roundRect">
+            <a:avLst>
+              <a:gd name="adj" fmla="val 12821"/>
+            </a:avLst>
+          </a:prstGeom>
+          <a:solidFill>
+            <a:srgbClr val="FFFFFF"/>
+          </a:solidFill>
+          <a:ln w="25400" cap="flat" cmpd="sng" algn="ctr">
+            <a:noFill/>
+            <a:prstDash val="solid"/>
+          </a:ln>
+          <a:effectLst>
+            <a:outerShdw blurRad="101600" dist="25400" dir="5400000" rotWithShape="0">
+              <a:srgbClr val="1E293B">
+                <a:alpha val="18000"/>
+              </a:srgbClr>
+            </a:outerShdw>
+          </a:effectLst>
+          <a:extLst>
+            <a:ext uri="{91240B29-F687-4F45-9708-019B960494DF}">
+              <a14:hiddenLine xmlns:a14="http://schemas.microsoft.com/office/drawing/2010/main" w="25400" cap="flat" cmpd="sng" algn="ctr">
+                <a:solidFill>
+                  <a:schemeClr val="accent1">
+                    <a:shade val="15000"/>
+                  </a:schemeClr>
+                </a:solidFill>
+                <a:prstDash val="solid"/>
+              </a14:hiddenLine>
+            </a:ext>
+          </a:extLst>
+        </p:spPr>
+        <p:style>
+          <a:lnRef idx="2">
+            <a:schemeClr val="accent1">
+              <a:shade val="15000"/>
+            </a:schemeClr>
+          </a:lnRef>
+          <a:fillRef idx="1">
+            <a:schemeClr val="accent1"/>
+          </a:fillRef>
+          <a:effectRef idx="0">
+            <a:schemeClr val="accent1"/>
+          </a:effectRef>
+          <a:fontRef idx="minor">
+            <a:schemeClr val="lt1"/>
+          </a:fontRef>
+        </p:style>
+        <p:txBody>
+          <a:bodyPr rtlCol="0" anchor="ctr"/>
+          <a:lstStyle/>
+          <a:p>
+            <a:pPr algn="ctr"/>
+            <a:endParaRPr lang="en-IN"/>
+          </a:p>
+        </p:txBody>
+      </p:sp>
+      <p:sp>
+        <p:nvSpPr>
+          <p:cNvPr id="8" name="TextBox 7">
+            <a:extLst>
+              <a:ext uri="{FF2B5EF4-FFF2-40B4-BE49-F238E27FC236}">
+                <a16:creationId xmlns:a16="http://schemas.microsoft.com/office/drawing/2014/main" id="{50B64790-E5C7-3EF7-E87B-6A8877831867}"/>
               </a:ext>
             </a:extLst>
           </p:cNvPr>
@@ -33865,8 +34007,8 @@
         </p:nvSpPr>
         <p:spPr>
           <a:xfrm>
-            <a:off x="431800" y="1701800"/>
-            <a:ext cx="5461000" cy="1955800"/>
+            <a:off x="482600" y="1803400"/>
+            <a:ext cx="1574800" cy="990600"/>
           </a:xfrm>
           <a:prstGeom prst="rect">
             <a:avLst/>
@@ -33874,38 +34016,116 @@
           <a:noFill/>
         </p:spPr>
         <p:txBody>
-          <a:bodyPr vert="horz" wrap="square" lIns="0" tIns="0" rIns="0" bIns="0" rtlCol="0" anchor="t">
+          <a:bodyPr vert="horz" wrap="square" lIns="0" tIns="0" rIns="0" bIns="0" rtlCol="0" anchor="ctr">
             <a:noAutofit/>
           </a:bodyPr>
           <a:lstStyle/>
           <a:p>
-            <a:pPr marL="127000" indent="-127000">
-              <a:spcAft>
-                <a:spcPts val="500"/>
-              </a:spcAft>
-              <a:buSzPct val="100000"/>
-              <a:buFont typeface="Arial" panose="020B0604020202020204" pitchFamily="34" charset="0"/>
-              <a:buChar char="•"/>
+            <a:pPr algn="ctr"/>
+            <a:r>
+              <a:rPr lang="en-IN" sz="2500" b="1">
+                <a:solidFill>
+                  <a:srgbClr val="D9473F"/>
+                </a:solidFill>
+                <a:latin typeface="Arial" panose="020B0604020202020204" pitchFamily="34" charset="0"/>
+              </a:rPr>
+              <a:t>77%</a:t>
+            </a:r>
+          </a:p>
+        </p:txBody>
+      </p:sp>
+      <p:cxnSp>
+        <p:nvCxnSpPr>
+          <p:cNvPr id="9" name="Straight Arrow Connector 8">
+            <a:extLst>
+              <a:ext uri="{FF2B5EF4-FFF2-40B4-BE49-F238E27FC236}">
+                <a16:creationId xmlns:a16="http://schemas.microsoft.com/office/drawing/2014/main" id="{B22383EB-10A7-04EB-9824-844E1D61A0AA}"/>
+              </a:ext>
+            </a:extLst>
+          </p:cNvPr>
+          <p:cNvCxnSpPr/>
+          <p:nvPr/>
+        </p:nvCxnSpPr>
+        <p:spPr>
+          <a:xfrm>
+            <a:off x="2108200" y="1981200"/>
+            <a:ext cx="0" cy="635000"/>
+          </a:xfrm>
+          <a:prstGeom prst="straightConnector1">
+            <a:avLst/>
+          </a:prstGeom>
+          <a:ln w="12700">
+            <a:solidFill>
+              <a:srgbClr val="D5DCE8"/>
+            </a:solidFill>
+          </a:ln>
+        </p:spPr>
+        <p:style>
+          <a:lnRef idx="1">
+            <a:schemeClr val="accent1"/>
+          </a:lnRef>
+          <a:fillRef idx="0">
+            <a:schemeClr val="accent1"/>
+          </a:fillRef>
+          <a:effectRef idx="0">
+            <a:schemeClr val="accent1"/>
+          </a:effectRef>
+          <a:fontRef idx="minor">
+            <a:schemeClr val="tx1"/>
+          </a:fontRef>
+        </p:style>
+      </p:cxnSp>
+      <p:sp>
+        <p:nvSpPr>
+          <p:cNvPr id="10" name="TextBox 9">
+            <a:extLst>
+              <a:ext uri="{FF2B5EF4-FFF2-40B4-BE49-F238E27FC236}">
+                <a16:creationId xmlns:a16="http://schemas.microsoft.com/office/drawing/2014/main" id="{E7C4624C-0782-D1AD-899E-ACF42ADDD5BF}"/>
+              </a:ext>
+            </a:extLst>
+          </p:cNvPr>
+          <p:cNvSpPr txBox="1"/>
+          <p:nvPr/>
+        </p:nvSpPr>
+        <p:spPr>
+          <a:xfrm>
+            <a:off x="2260600" y="1879600"/>
+            <a:ext cx="3454400" cy="838200"/>
+          </a:xfrm>
+          <a:prstGeom prst="rect">
+            <a:avLst/>
+          </a:prstGeom>
+          <a:noFill/>
+        </p:spPr>
+        <p:txBody>
+          <a:bodyPr vert="horz" wrap="square" lIns="0" tIns="0" rIns="0" bIns="0" rtlCol="0" anchor="ctr">
+            <a:noAutofit/>
+          </a:bodyPr>
+          <a:lstStyle/>
+          <a:p>
+            <a:pPr>
+              <a:spcAft>
+                <a:spcPts val="400"/>
+              </a:spcAft>
             </a:pPr>
             <a:r>
-              <a:rPr lang="en-IN" sz="1000" b="1">
+              <a:rPr lang="en-IN" sz="1250" b="1">
+                <a:solidFill>
+                  <a:srgbClr val="1A1A1A"/>
+                </a:solidFill>
                 <a:latin typeface="Arial" panose="020B0604020202020204" pitchFamily="34" charset="0"/>
               </a:rPr>
-              <a:t>LayerX (2025)</a:t>
+              <a:t>of GenAI users paste work data into AI prompts</a:t>
             </a:r>
+          </a:p>
+          <a:p>
+            <a:pPr>
+              <a:spcAft>
+                <a:spcPts val="400"/>
+              </a:spcAft>
+            </a:pPr>
             <a:r>
-              <a:rPr lang="en-IN" sz="1000">
-                <a:latin typeface="Arial" panose="020B0604020202020204" pitchFamily="34" charset="0"/>
-              </a:rPr>
-              <a:t>, Enterprise AI &amp; SaaS Data Security Report: 77% of GenAI users paste data into prompts; 82% from personal accounts</a:t>
-            </a:r>
-            <a:br>
-              <a:rPr lang="en-IN" sz="1000">
-                <a:latin typeface="Arial" panose="020B0604020202020204" pitchFamily="34" charset="0"/>
-              </a:rPr>
-            </a:br>
-            <a:r>
-              <a:rPr lang="en-IN" sz="850">
+              <a:rPr lang="en-IN" sz="900">
                 <a:solidFill>
                   <a:srgbClr val="1D3FA0"/>
                 </a:solidFill>
@@ -33918,43 +34138,224 @@
                   </a:extLst>
                 </a:hlinkClick>
               </a:rPr>
-              <a:t>go.layerxsecurity.com/the-layerx-enterprise-ai-saas-data-security-report-2025</a:t>
+              <a:t>LayerX, Enterprise AI &amp; SaaS Data Security Report 2025</a:t>
             </a:r>
-            <a:endParaRPr lang="en-IN" sz="850">
+            <a:endParaRPr lang="en-IN" sz="900">
               <a:solidFill>
                 <a:srgbClr val="1D3FA0"/>
               </a:solidFill>
               <a:latin typeface="Arial" panose="020B0604020202020204" pitchFamily="34" charset="0"/>
             </a:endParaRPr>
           </a:p>
-          <a:p>
-            <a:pPr marL="127000" indent="-127000">
-              <a:spcAft>
-                <a:spcPts val="500"/>
-              </a:spcAft>
-              <a:buSzPct val="100000"/>
-              <a:buFont typeface="Arial" panose="020B0604020202020204" pitchFamily="34" charset="0"/>
-              <a:buChar char="•"/>
+        </p:txBody>
+      </p:sp>
+      <p:sp>
+        <p:nvSpPr>
+          <p:cNvPr id="11" name="Rectangle: Rounded Corners 10">
+            <a:extLst>
+              <a:ext uri="{FF2B5EF4-FFF2-40B4-BE49-F238E27FC236}">
+                <a16:creationId xmlns:a16="http://schemas.microsoft.com/office/drawing/2014/main" id="{C0F1D861-D139-9755-568B-F6A43804FD68}"/>
+              </a:ext>
+            </a:extLst>
+          </p:cNvPr>
+          <p:cNvSpPr/>
+          <p:nvPr/>
+        </p:nvSpPr>
+        <p:spPr>
+          <a:xfrm>
+            <a:off x="406400" y="2870200"/>
+            <a:ext cx="5435600" cy="990600"/>
+          </a:xfrm>
+          <a:prstGeom prst="roundRect">
+            <a:avLst>
+              <a:gd name="adj" fmla="val 12821"/>
+            </a:avLst>
+          </a:prstGeom>
+          <a:solidFill>
+            <a:srgbClr val="FFFFFF"/>
+          </a:solidFill>
+          <a:ln w="25400" cap="flat" cmpd="sng" algn="ctr">
+            <a:noFill/>
+            <a:prstDash val="solid"/>
+          </a:ln>
+          <a:effectLst>
+            <a:outerShdw blurRad="101600" dist="25400" dir="5400000" rotWithShape="0">
+              <a:srgbClr val="1E293B">
+                <a:alpha val="18000"/>
+              </a:srgbClr>
+            </a:outerShdw>
+          </a:effectLst>
+          <a:extLst>
+            <a:ext uri="{91240B29-F687-4F45-9708-019B960494DF}">
+              <a14:hiddenLine xmlns:a14="http://schemas.microsoft.com/office/drawing/2010/main" w="25400" cap="flat" cmpd="sng" algn="ctr">
+                <a:solidFill>
+                  <a:schemeClr val="accent1">
+                    <a:shade val="15000"/>
+                  </a:schemeClr>
+                </a:solidFill>
+                <a:prstDash val="solid"/>
+              </a14:hiddenLine>
+            </a:ext>
+          </a:extLst>
+        </p:spPr>
+        <p:style>
+          <a:lnRef idx="2">
+            <a:schemeClr val="accent1">
+              <a:shade val="15000"/>
+            </a:schemeClr>
+          </a:lnRef>
+          <a:fillRef idx="1">
+            <a:schemeClr val="accent1"/>
+          </a:fillRef>
+          <a:effectRef idx="0">
+            <a:schemeClr val="accent1"/>
+          </a:effectRef>
+          <a:fontRef idx="minor">
+            <a:schemeClr val="lt1"/>
+          </a:fontRef>
+        </p:style>
+        <p:txBody>
+          <a:bodyPr rtlCol="0" anchor="ctr"/>
+          <a:lstStyle/>
+          <a:p>
+            <a:pPr algn="ctr"/>
+            <a:endParaRPr lang="en-IN"/>
+          </a:p>
+        </p:txBody>
+      </p:sp>
+      <p:sp>
+        <p:nvSpPr>
+          <p:cNvPr id="12" name="TextBox 11">
+            <a:extLst>
+              <a:ext uri="{FF2B5EF4-FFF2-40B4-BE49-F238E27FC236}">
+                <a16:creationId xmlns:a16="http://schemas.microsoft.com/office/drawing/2014/main" id="{31EBB3B3-786D-B618-194E-3F3769CE8CDD}"/>
+              </a:ext>
+            </a:extLst>
+          </p:cNvPr>
+          <p:cNvSpPr txBox="1"/>
+          <p:nvPr/>
+        </p:nvSpPr>
+        <p:spPr>
+          <a:xfrm>
+            <a:off x="482600" y="2870200"/>
+            <a:ext cx="1574800" cy="990600"/>
+          </a:xfrm>
+          <a:prstGeom prst="rect">
+            <a:avLst/>
+          </a:prstGeom>
+          <a:noFill/>
+        </p:spPr>
+        <p:txBody>
+          <a:bodyPr vert="horz" wrap="square" lIns="0" tIns="0" rIns="0" bIns="0" rtlCol="0" anchor="ctr">
+            <a:noAutofit/>
+          </a:bodyPr>
+          <a:lstStyle/>
+          <a:p>
+            <a:pPr algn="ctr"/>
+            <a:r>
+              <a:rPr lang="en-IN" sz="2500" b="1">
+                <a:solidFill>
+                  <a:srgbClr val="E07B00"/>
+                </a:solidFill>
+                <a:latin typeface="Arial" panose="020B0604020202020204" pitchFamily="34" charset="0"/>
+              </a:rPr>
+              <a:t>39.7%</a:t>
+            </a:r>
+          </a:p>
+        </p:txBody>
+      </p:sp>
+      <p:cxnSp>
+        <p:nvCxnSpPr>
+          <p:cNvPr id="13" name="Straight Arrow Connector 12">
+            <a:extLst>
+              <a:ext uri="{FF2B5EF4-FFF2-40B4-BE49-F238E27FC236}">
+                <a16:creationId xmlns:a16="http://schemas.microsoft.com/office/drawing/2014/main" id="{A26E29BD-618E-E53E-15D0-E99F8B6C1EC4}"/>
+              </a:ext>
+            </a:extLst>
+          </p:cNvPr>
+          <p:cNvCxnSpPr/>
+          <p:nvPr/>
+        </p:nvCxnSpPr>
+        <p:spPr>
+          <a:xfrm>
+            <a:off x="2108200" y="3048000"/>
+            <a:ext cx="0" cy="635000"/>
+          </a:xfrm>
+          <a:prstGeom prst="straightConnector1">
+            <a:avLst/>
+          </a:prstGeom>
+          <a:ln w="12700">
+            <a:solidFill>
+              <a:srgbClr val="D5DCE8"/>
+            </a:solidFill>
+          </a:ln>
+        </p:spPr>
+        <p:style>
+          <a:lnRef idx="1">
+            <a:schemeClr val="accent1"/>
+          </a:lnRef>
+          <a:fillRef idx="0">
+            <a:schemeClr val="accent1"/>
+          </a:fillRef>
+          <a:effectRef idx="0">
+            <a:schemeClr val="accent1"/>
+          </a:effectRef>
+          <a:fontRef idx="minor">
+            <a:schemeClr val="tx1"/>
+          </a:fontRef>
+        </p:style>
+      </p:cxnSp>
+      <p:sp>
+        <p:nvSpPr>
+          <p:cNvPr id="14" name="TextBox 13">
+            <a:extLst>
+              <a:ext uri="{FF2B5EF4-FFF2-40B4-BE49-F238E27FC236}">
+                <a16:creationId xmlns:a16="http://schemas.microsoft.com/office/drawing/2014/main" id="{C5287271-6EA6-E3F2-C6A3-B6203DADDF56}"/>
+              </a:ext>
+            </a:extLst>
+          </p:cNvPr>
+          <p:cNvSpPr txBox="1"/>
+          <p:nvPr/>
+        </p:nvSpPr>
+        <p:spPr>
+          <a:xfrm>
+            <a:off x="2260600" y="2946400"/>
+            <a:ext cx="3454400" cy="838200"/>
+          </a:xfrm>
+          <a:prstGeom prst="rect">
+            <a:avLst/>
+          </a:prstGeom>
+          <a:noFill/>
+        </p:spPr>
+        <p:txBody>
+          <a:bodyPr vert="horz" wrap="square" lIns="0" tIns="0" rIns="0" bIns="0" rtlCol="0" anchor="ctr">
+            <a:noAutofit/>
+          </a:bodyPr>
+          <a:lstStyle/>
+          <a:p>
+            <a:pPr>
+              <a:spcAft>
+                <a:spcPts val="400"/>
+              </a:spcAft>
             </a:pPr>
             <a:r>
-              <a:rPr lang="en-IN" sz="1000" b="1">
+              <a:rPr lang="en-IN" sz="1250" b="1">
+                <a:solidFill>
+                  <a:srgbClr val="1A1A1A"/>
+                </a:solidFill>
                 <a:latin typeface="Arial" panose="020B0604020202020204" pitchFamily="34" charset="0"/>
               </a:rPr>
-              <a:t>Cyberhaven Labs (2026)</a:t>
+              <a:t>of all data shared with AI tools is sensitive</a:t>
             </a:r>
+          </a:p>
+          <a:p>
+            <a:pPr>
+              <a:spcAft>
+                <a:spcPts val="400"/>
+              </a:spcAft>
+            </a:pPr>
             <a:r>
-              <a:rPr lang="en-IN" sz="1000">
-                <a:latin typeface="Arial" panose="020B0604020202020204" pitchFamily="34" charset="0"/>
-              </a:rPr>
-              <a:t>, AI Adoption &amp; Risk Report: 39.7% of data shared with AI tools is sensitive</a:t>
-            </a:r>
-            <a:br>
-              <a:rPr lang="en-IN" sz="1000">
-                <a:latin typeface="Arial" panose="020B0604020202020204" pitchFamily="34" charset="0"/>
-              </a:rPr>
-            </a:br>
-            <a:r>
-              <a:rPr lang="en-IN" sz="850">
+              <a:rPr lang="en-IN" sz="900">
                 <a:solidFill>
                   <a:srgbClr val="1D3FA0"/>
                 </a:solidFill>
@@ -33967,43 +34368,224 @@
                   </a:extLst>
                 </a:hlinkClick>
               </a:rPr>
-              <a:t>cyberhaven.com/press-releases/cyberhaven-2026-ai-adoption-risk-report</a:t>
+              <a:t>Cyberhaven Labs, AI Adoption &amp; Risk Report 2026</a:t>
             </a:r>
-            <a:endParaRPr lang="en-IN" sz="850">
+            <a:endParaRPr lang="en-IN" sz="900">
               <a:solidFill>
                 <a:srgbClr val="1D3FA0"/>
               </a:solidFill>
               <a:latin typeface="Arial" panose="020B0604020202020204" pitchFamily="34" charset="0"/>
             </a:endParaRPr>
           </a:p>
-          <a:p>
-            <a:pPr marL="127000" indent="-127000">
-              <a:spcAft>
-                <a:spcPts val="500"/>
-              </a:spcAft>
-              <a:buSzPct val="100000"/>
-              <a:buFont typeface="Arial" panose="020B0604020202020204" pitchFamily="34" charset="0"/>
-              <a:buChar char="•"/>
+        </p:txBody>
+      </p:sp>
+      <p:sp>
+        <p:nvSpPr>
+          <p:cNvPr id="15" name="Rectangle: Rounded Corners 14">
+            <a:extLst>
+              <a:ext uri="{FF2B5EF4-FFF2-40B4-BE49-F238E27FC236}">
+                <a16:creationId xmlns:a16="http://schemas.microsoft.com/office/drawing/2014/main" id="{DD0892A3-4E06-52FB-4E9B-0A6ECFCA567C}"/>
+              </a:ext>
+            </a:extLst>
+          </p:cNvPr>
+          <p:cNvSpPr/>
+          <p:nvPr/>
+        </p:nvSpPr>
+        <p:spPr>
+          <a:xfrm>
+            <a:off x="406400" y="3937000"/>
+            <a:ext cx="5435600" cy="990600"/>
+          </a:xfrm>
+          <a:prstGeom prst="roundRect">
+            <a:avLst>
+              <a:gd name="adj" fmla="val 12821"/>
+            </a:avLst>
+          </a:prstGeom>
+          <a:solidFill>
+            <a:srgbClr val="FFFFFF"/>
+          </a:solidFill>
+          <a:ln w="25400" cap="flat" cmpd="sng" algn="ctr">
+            <a:noFill/>
+            <a:prstDash val="solid"/>
+          </a:ln>
+          <a:effectLst>
+            <a:outerShdw blurRad="101600" dist="25400" dir="5400000" rotWithShape="0">
+              <a:srgbClr val="1E293B">
+                <a:alpha val="18000"/>
+              </a:srgbClr>
+            </a:outerShdw>
+          </a:effectLst>
+          <a:extLst>
+            <a:ext uri="{91240B29-F687-4F45-9708-019B960494DF}">
+              <a14:hiddenLine xmlns:a14="http://schemas.microsoft.com/office/drawing/2010/main" w="25400" cap="flat" cmpd="sng" algn="ctr">
+                <a:solidFill>
+                  <a:schemeClr val="accent1">
+                    <a:shade val="15000"/>
+                  </a:schemeClr>
+                </a:solidFill>
+                <a:prstDash val="solid"/>
+              </a14:hiddenLine>
+            </a:ext>
+          </a:extLst>
+        </p:spPr>
+        <p:style>
+          <a:lnRef idx="2">
+            <a:schemeClr val="accent1">
+              <a:shade val="15000"/>
+            </a:schemeClr>
+          </a:lnRef>
+          <a:fillRef idx="1">
+            <a:schemeClr val="accent1"/>
+          </a:fillRef>
+          <a:effectRef idx="0">
+            <a:schemeClr val="accent1"/>
+          </a:effectRef>
+          <a:fontRef idx="minor">
+            <a:schemeClr val="lt1"/>
+          </a:fontRef>
+        </p:style>
+        <p:txBody>
+          <a:bodyPr rtlCol="0" anchor="ctr"/>
+          <a:lstStyle/>
+          <a:p>
+            <a:pPr algn="ctr"/>
+            <a:endParaRPr lang="en-IN"/>
+          </a:p>
+        </p:txBody>
+      </p:sp>
+      <p:sp>
+        <p:nvSpPr>
+          <p:cNvPr id="16" name="TextBox 15">
+            <a:extLst>
+              <a:ext uri="{FF2B5EF4-FFF2-40B4-BE49-F238E27FC236}">
+                <a16:creationId xmlns:a16="http://schemas.microsoft.com/office/drawing/2014/main" id="{DEADD6EA-524F-F5E8-812A-167D74EA824E}"/>
+              </a:ext>
+            </a:extLst>
+          </p:cNvPr>
+          <p:cNvSpPr txBox="1"/>
+          <p:nvPr/>
+        </p:nvSpPr>
+        <p:spPr>
+          <a:xfrm>
+            <a:off x="482600" y="3937000"/>
+            <a:ext cx="1574800" cy="990600"/>
+          </a:xfrm>
+          <a:prstGeom prst="rect">
+            <a:avLst/>
+          </a:prstGeom>
+          <a:noFill/>
+        </p:spPr>
+        <p:txBody>
+          <a:bodyPr vert="horz" wrap="square" lIns="0" tIns="0" rIns="0" bIns="0" rtlCol="0" anchor="ctr">
+            <a:noAutofit/>
+          </a:bodyPr>
+          <a:lstStyle/>
+          <a:p>
+            <a:pPr algn="ctr"/>
+            <a:r>
+              <a:rPr lang="en-IN" sz="2500" b="1">
+                <a:solidFill>
+                  <a:srgbClr val="6F4FB0"/>
+                </a:solidFill>
+                <a:latin typeface="Arial" panose="020B0604020202020204" pitchFamily="34" charset="0"/>
+              </a:rPr>
+              <a:t>₹25.5 Cr</a:t>
+            </a:r>
+          </a:p>
+        </p:txBody>
+      </p:sp>
+      <p:cxnSp>
+        <p:nvCxnSpPr>
+          <p:cNvPr id="17" name="Straight Arrow Connector 16">
+            <a:extLst>
+              <a:ext uri="{FF2B5EF4-FFF2-40B4-BE49-F238E27FC236}">
+                <a16:creationId xmlns:a16="http://schemas.microsoft.com/office/drawing/2014/main" id="{526C0C8F-7E8F-E7DA-F318-D7757C7A0EDB}"/>
+              </a:ext>
+            </a:extLst>
+          </p:cNvPr>
+          <p:cNvCxnSpPr/>
+          <p:nvPr/>
+        </p:nvCxnSpPr>
+        <p:spPr>
+          <a:xfrm>
+            <a:off x="2108200" y="4114800"/>
+            <a:ext cx="0" cy="635000"/>
+          </a:xfrm>
+          <a:prstGeom prst="straightConnector1">
+            <a:avLst/>
+          </a:prstGeom>
+          <a:ln w="12700">
+            <a:solidFill>
+              <a:srgbClr val="D5DCE8"/>
+            </a:solidFill>
+          </a:ln>
+        </p:spPr>
+        <p:style>
+          <a:lnRef idx="1">
+            <a:schemeClr val="accent1"/>
+          </a:lnRef>
+          <a:fillRef idx="0">
+            <a:schemeClr val="accent1"/>
+          </a:fillRef>
+          <a:effectRef idx="0">
+            <a:schemeClr val="accent1"/>
+          </a:effectRef>
+          <a:fontRef idx="minor">
+            <a:schemeClr val="tx1"/>
+          </a:fontRef>
+        </p:style>
+      </p:cxnSp>
+      <p:sp>
+        <p:nvSpPr>
+          <p:cNvPr id="18" name="TextBox 17">
+            <a:extLst>
+              <a:ext uri="{FF2B5EF4-FFF2-40B4-BE49-F238E27FC236}">
+                <a16:creationId xmlns:a16="http://schemas.microsoft.com/office/drawing/2014/main" id="{F94A4FED-58ED-2246-7AA9-8342FD763750}"/>
+              </a:ext>
+            </a:extLst>
+          </p:cNvPr>
+          <p:cNvSpPr txBox="1"/>
+          <p:nvPr/>
+        </p:nvSpPr>
+        <p:spPr>
+          <a:xfrm>
+            <a:off x="2260600" y="4013200"/>
+            <a:ext cx="3454400" cy="838200"/>
+          </a:xfrm>
+          <a:prstGeom prst="rect">
+            <a:avLst/>
+          </a:prstGeom>
+          <a:noFill/>
+        </p:spPr>
+        <p:txBody>
+          <a:bodyPr vert="horz" wrap="square" lIns="0" tIns="0" rIns="0" bIns="0" rtlCol="0" anchor="ctr">
+            <a:noAutofit/>
+          </a:bodyPr>
+          <a:lstStyle/>
+          <a:p>
+            <a:pPr>
+              <a:spcAft>
+                <a:spcPts val="400"/>
+              </a:spcAft>
             </a:pPr>
             <a:r>
-              <a:rPr lang="en-IN" sz="1000" b="1">
+              <a:rPr lang="en-IN" sz="1250" b="1">
+                <a:solidFill>
+                  <a:srgbClr val="1A1A1A"/>
+                </a:solidFill>
                 <a:latin typeface="Arial" panose="020B0604020202020204" pitchFamily="34" charset="0"/>
               </a:rPr>
-              <a:t>TechCrunch (2023)</a:t>
+              <a:t>average cost of one data breach in India, a record high</a:t>
             </a:r>
+          </a:p>
+          <a:p>
+            <a:pPr>
+              <a:spcAft>
+                <a:spcPts val="400"/>
+              </a:spcAft>
+            </a:pPr>
             <a:r>
-              <a:rPr lang="en-IN" sz="1000">
-                <a:latin typeface="Arial" panose="020B0604020202020204" pitchFamily="34" charset="0"/>
-              </a:rPr>
-              <a:t>: Samsung bans generative AI after staff leaked internal code to ChatGPT</a:t>
-            </a:r>
-            <a:br>
-              <a:rPr lang="en-IN" sz="1000">
-                <a:latin typeface="Arial" panose="020B0604020202020204" pitchFamily="34" charset="0"/>
-              </a:rPr>
-            </a:br>
-            <a:r>
-              <a:rPr lang="en-IN" sz="850">
+              <a:rPr lang="en-IN" sz="900">
                 <a:solidFill>
                   <a:srgbClr val="1D3FA0"/>
                 </a:solidFill>
@@ -34016,9 +34598,9 @@
                   </a:extLst>
                 </a:hlinkClick>
               </a:rPr>
-              <a:t>techcrunch.com/2023/05/02/samsung-bans-use-of-generative-ai-tools…</a:t>
+              <a:t>IBM, Cost of a Data Breach Report 2026</a:t>
             </a:r>
-            <a:endParaRPr lang="en-IN" sz="850">
+            <a:endParaRPr lang="en-IN" sz="900">
               <a:solidFill>
                 <a:srgbClr val="1D3FA0"/>
               </a:solidFill>
@@ -34029,10 +34611,10 @@
       </p:sp>
       <p:sp>
         <p:nvSpPr>
-          <p:cNvPr id="7" name="Rectangle 6">
-            <a:extLst>
-              <a:ext uri="{FF2B5EF4-FFF2-40B4-BE49-F238E27FC236}">
-                <a16:creationId xmlns:a16="http://schemas.microsoft.com/office/drawing/2014/main" id="{C981210C-DDFE-28AD-4411-EE5935295B15}"/>
+          <p:cNvPr id="19" name="Rectangle: Rounded Corners 18">
+            <a:extLst>
+              <a:ext uri="{FF2B5EF4-FFF2-40B4-BE49-F238E27FC236}">
+                <a16:creationId xmlns:a16="http://schemas.microsoft.com/office/drawing/2014/main" id="{7490EAC0-6324-212E-E3F3-5C385F041363}"/>
               </a:ext>
             </a:extLst>
           </p:cNvPr>
@@ -34041,11 +34623,243 @@
         </p:nvSpPr>
         <p:spPr>
           <a:xfrm>
-            <a:off x="6134100" y="1219200"/>
-            <a:ext cx="5829300" cy="2489200"/>
+            <a:off x="406400" y="5003800"/>
+            <a:ext cx="5435600" cy="990600"/>
+          </a:xfrm>
+          <a:prstGeom prst="roundRect">
+            <a:avLst>
+              <a:gd name="adj" fmla="val 12821"/>
+            </a:avLst>
+          </a:prstGeom>
+          <a:solidFill>
+            <a:srgbClr val="FFFFFF"/>
+          </a:solidFill>
+          <a:ln w="25400" cap="flat" cmpd="sng" algn="ctr">
+            <a:noFill/>
+            <a:prstDash val="solid"/>
+          </a:ln>
+          <a:effectLst>
+            <a:outerShdw blurRad="101600" dist="25400" dir="5400000" rotWithShape="0">
+              <a:srgbClr val="1E293B">
+                <a:alpha val="18000"/>
+              </a:srgbClr>
+            </a:outerShdw>
+          </a:effectLst>
+          <a:extLst>
+            <a:ext uri="{91240B29-F687-4F45-9708-019B960494DF}">
+              <a14:hiddenLine xmlns:a14="http://schemas.microsoft.com/office/drawing/2010/main" w="25400" cap="flat" cmpd="sng" algn="ctr">
+                <a:solidFill>
+                  <a:schemeClr val="accent1">
+                    <a:shade val="15000"/>
+                  </a:schemeClr>
+                </a:solidFill>
+                <a:prstDash val="solid"/>
+              </a14:hiddenLine>
+            </a:ext>
+          </a:extLst>
+        </p:spPr>
+        <p:style>
+          <a:lnRef idx="2">
+            <a:schemeClr val="accent1">
+              <a:shade val="15000"/>
+            </a:schemeClr>
+          </a:lnRef>
+          <a:fillRef idx="1">
+            <a:schemeClr val="accent1"/>
+          </a:fillRef>
+          <a:effectRef idx="0">
+            <a:schemeClr val="accent1"/>
+          </a:effectRef>
+          <a:fontRef idx="minor">
+            <a:schemeClr val="lt1"/>
+          </a:fontRef>
+        </p:style>
+        <p:txBody>
+          <a:bodyPr rtlCol="0" anchor="ctr"/>
+          <a:lstStyle/>
+          <a:p>
+            <a:pPr algn="ctr"/>
+            <a:endParaRPr lang="en-IN"/>
+          </a:p>
+        </p:txBody>
+      </p:sp>
+      <p:sp>
+        <p:nvSpPr>
+          <p:cNvPr id="20" name="TextBox 19">
+            <a:extLst>
+              <a:ext uri="{FF2B5EF4-FFF2-40B4-BE49-F238E27FC236}">
+                <a16:creationId xmlns:a16="http://schemas.microsoft.com/office/drawing/2014/main" id="{9AFA9BE3-F62E-DD14-99FB-946D55F4DC5D}"/>
+              </a:ext>
+            </a:extLst>
+          </p:cNvPr>
+          <p:cNvSpPr txBox="1"/>
+          <p:nvPr/>
+        </p:nvSpPr>
+        <p:spPr>
+          <a:xfrm>
+            <a:off x="482600" y="5003800"/>
+            <a:ext cx="1574800" cy="990600"/>
           </a:xfrm>
           <a:prstGeom prst="rect">
             <a:avLst/>
+          </a:prstGeom>
+          <a:noFill/>
+        </p:spPr>
+        <p:txBody>
+          <a:bodyPr vert="horz" wrap="square" lIns="0" tIns="0" rIns="0" bIns="0" rtlCol="0" anchor="ctr">
+            <a:noAutofit/>
+          </a:bodyPr>
+          <a:lstStyle/>
+          <a:p>
+            <a:pPr algn="ctr"/>
+            <a:r>
+              <a:rPr lang="en-IN" sz="2500" b="1">
+                <a:solidFill>
+                  <a:srgbClr val="1F497D"/>
+                </a:solidFill>
+                <a:latin typeface="Arial" panose="020B0604020202020204" pitchFamily="34" charset="0"/>
+              </a:rPr>
+              <a:t>2023</a:t>
+            </a:r>
+          </a:p>
+        </p:txBody>
+      </p:sp>
+      <p:cxnSp>
+        <p:nvCxnSpPr>
+          <p:cNvPr id="21" name="Straight Arrow Connector 20">
+            <a:extLst>
+              <a:ext uri="{FF2B5EF4-FFF2-40B4-BE49-F238E27FC236}">
+                <a16:creationId xmlns:a16="http://schemas.microsoft.com/office/drawing/2014/main" id="{CA6D770F-9B87-BBAF-68C8-134C36F11514}"/>
+              </a:ext>
+            </a:extLst>
+          </p:cNvPr>
+          <p:cNvCxnSpPr/>
+          <p:nvPr/>
+        </p:nvCxnSpPr>
+        <p:spPr>
+          <a:xfrm>
+            <a:off x="2108200" y="5181600"/>
+            <a:ext cx="0" cy="635000"/>
+          </a:xfrm>
+          <a:prstGeom prst="straightConnector1">
+            <a:avLst/>
+          </a:prstGeom>
+          <a:ln w="12700">
+            <a:solidFill>
+              <a:srgbClr val="D5DCE8"/>
+            </a:solidFill>
+          </a:ln>
+        </p:spPr>
+        <p:style>
+          <a:lnRef idx="1">
+            <a:schemeClr val="accent1"/>
+          </a:lnRef>
+          <a:fillRef idx="0">
+            <a:schemeClr val="accent1"/>
+          </a:fillRef>
+          <a:effectRef idx="0">
+            <a:schemeClr val="accent1"/>
+          </a:effectRef>
+          <a:fontRef idx="minor">
+            <a:schemeClr val="tx1"/>
+          </a:fontRef>
+        </p:style>
+      </p:cxnSp>
+      <p:sp>
+        <p:nvSpPr>
+          <p:cNvPr id="22" name="TextBox 21">
+            <a:extLst>
+              <a:ext uri="{FF2B5EF4-FFF2-40B4-BE49-F238E27FC236}">
+                <a16:creationId xmlns:a16="http://schemas.microsoft.com/office/drawing/2014/main" id="{602FC2C7-B0BA-2EBA-07AA-63A6B53817AC}"/>
+              </a:ext>
+            </a:extLst>
+          </p:cNvPr>
+          <p:cNvSpPr txBox="1"/>
+          <p:nvPr/>
+        </p:nvSpPr>
+        <p:spPr>
+          <a:xfrm>
+            <a:off x="2260600" y="5080000"/>
+            <a:ext cx="3454400" cy="838200"/>
+          </a:xfrm>
+          <a:prstGeom prst="rect">
+            <a:avLst/>
+          </a:prstGeom>
+          <a:noFill/>
+        </p:spPr>
+        <p:txBody>
+          <a:bodyPr vert="horz" wrap="square" lIns="0" tIns="0" rIns="0" bIns="0" rtlCol="0" anchor="ctr">
+            <a:noAutofit/>
+          </a:bodyPr>
+          <a:lstStyle/>
+          <a:p>
+            <a:pPr>
+              <a:spcAft>
+                <a:spcPts val="400"/>
+              </a:spcAft>
+            </a:pPr>
+            <a:r>
+              <a:rPr lang="en-IN" sz="1250" b="1">
+                <a:solidFill>
+                  <a:srgbClr val="1A1A1A"/>
+                </a:solidFill>
+                <a:latin typeface="Arial" panose="020B0604020202020204" pitchFamily="34" charset="0"/>
+              </a:rPr>
+              <a:t>Samsung bans ChatGPT after engineers leak source code into it</a:t>
+            </a:r>
+          </a:p>
+          <a:p>
+            <a:pPr>
+              <a:spcAft>
+                <a:spcPts val="400"/>
+              </a:spcAft>
+            </a:pPr>
+            <a:r>
+              <a:rPr lang="en-IN" sz="900">
+                <a:solidFill>
+                  <a:srgbClr val="1D3FA0"/>
+                </a:solidFill>
+                <a:latin typeface="Arial" panose="020B0604020202020204" pitchFamily="34" charset="0"/>
+                <a:hlinkClick r:id="rId8">
+                  <a:extLst>
+                    <a:ext uri="{A12FA001-AC4F-418D-AE19-62706E023703}">
+                      <ahyp:hlinkClr xmlns:ahyp="http://schemas.microsoft.com/office/drawing/2018/hyperlinkcolor" val="tx"/>
+                    </a:ext>
+                  </a:extLst>
+                </a:hlinkClick>
+              </a:rPr>
+              <a:t>TechCrunch, 2 May 2023</a:t>
+            </a:r>
+            <a:endParaRPr lang="en-IN" sz="900">
+              <a:solidFill>
+                <a:srgbClr val="1D3FA0"/>
+              </a:solidFill>
+              <a:latin typeface="Arial" panose="020B0604020202020204" pitchFamily="34" charset="0"/>
+            </a:endParaRPr>
+          </a:p>
+        </p:txBody>
+      </p:sp>
+      <p:sp>
+        <p:nvSpPr>
+          <p:cNvPr id="23" name="Rectangle: Rounded Corners 22">
+            <a:extLst>
+              <a:ext uri="{FF2B5EF4-FFF2-40B4-BE49-F238E27FC236}">
+                <a16:creationId xmlns:a16="http://schemas.microsoft.com/office/drawing/2014/main" id="{57529D4F-E15A-12E3-D802-8B14330CCC18}"/>
+              </a:ext>
+            </a:extLst>
+          </p:cNvPr>
+          <p:cNvSpPr/>
+          <p:nvPr/>
+        </p:nvSpPr>
+        <p:spPr>
+          <a:xfrm>
+            <a:off x="6172200" y="1168400"/>
+            <a:ext cx="5791200" cy="5054600"/>
+          </a:xfrm>
+          <a:prstGeom prst="roundRect">
+            <a:avLst>
+              <a:gd name="adj" fmla="val 3518"/>
+            </a:avLst>
           </a:prstGeom>
           <a:gradFill flip="none" rotWithShape="1">
             <a:gsLst>
@@ -34104,10 +34918,10 @@
       </p:sp>
       <p:pic>
         <p:nvPicPr>
-          <p:cNvPr id="9" name="Graphic 8" descr="scale icon">
-            <a:extLst>
-              <a:ext uri="{FF2B5EF4-FFF2-40B4-BE49-F238E27FC236}">
-                <a16:creationId xmlns:a16="http://schemas.microsoft.com/office/drawing/2014/main" id="{700A819B-9522-2E8C-216F-7EE2084626DB}"/>
+          <p:cNvPr id="25" name="Graphic 24" descr="chart-bar icon">
+            <a:extLst>
+              <a:ext uri="{FF2B5EF4-FFF2-40B4-BE49-F238E27FC236}">
+                <a16:creationId xmlns:a16="http://schemas.microsoft.com/office/drawing/2014/main" id="{3D73E9D2-F131-BBD9-F4C0-CBCF27219D1B}"/>
               </a:ext>
             </a:extLst>
           </p:cNvPr>
@@ -34120,7 +34934,7 @@
           <a:blip>
             <a:extLst>
               <a:ext uri="{96DAC541-7B7A-43D3-8B79-37D633B846F1}">
-                <asvg:svgBlip xmlns:asvg="http://schemas.microsoft.com/office/drawing/2016/SVG/main" r:embed="rId8"/>
+                <asvg:svgBlip xmlns:asvg="http://schemas.microsoft.com/office/drawing/2016/SVG/main" r:embed="rId9"/>
               </a:ext>
             </a:extLst>
           </a:blip>
@@ -34130,8 +34944,8 @@
         </p:blipFill>
         <p:spPr>
           <a:xfrm>
-            <a:off x="6311900" y="1333500"/>
-            <a:ext cx="279400" cy="279400"/>
+            <a:off x="6375400" y="1320800"/>
+            <a:ext cx="304800" cy="304800"/>
           </a:xfrm>
           <a:prstGeom prst="rect">
             <a:avLst/>
@@ -34140,10 +34954,10 @@
       </p:pic>
       <p:sp>
         <p:nvSpPr>
-          <p:cNvPr id="10" name="TextBox 9">
-            <a:extLst>
-              <a:ext uri="{FF2B5EF4-FFF2-40B4-BE49-F238E27FC236}">
-                <a16:creationId xmlns:a16="http://schemas.microsoft.com/office/drawing/2014/main" id="{46662754-337B-1C2B-2C76-6855EDC1CBF2}"/>
+          <p:cNvPr id="26" name="TextBox 25">
+            <a:extLst>
+              <a:ext uri="{FF2B5EF4-FFF2-40B4-BE49-F238E27FC236}">
+                <a16:creationId xmlns:a16="http://schemas.microsoft.com/office/drawing/2014/main" id="{9FEB16F4-0C33-2295-227E-E089CA574EB2}"/>
               </a:ext>
             </a:extLst>
           </p:cNvPr>
@@ -34152,8 +34966,8 @@
         </p:nvSpPr>
         <p:spPr>
           <a:xfrm>
-            <a:off x="6667500" y="1295400"/>
-            <a:ext cx="5143500" cy="355600"/>
+            <a:off x="6781800" y="1270000"/>
+            <a:ext cx="4953000" cy="406400"/>
           </a:xfrm>
           <a:prstGeom prst="rect">
             <a:avLst/>
@@ -34167,296 +34981,23 @@
           <a:lstStyle/>
           <a:p>
             <a:r>
-              <a:rPr lang="en-IN" sz="1700" b="1">
+              <a:rPr lang="en-IN" sz="1800" b="1">
                 <a:solidFill>
                   <a:srgbClr val="FFFFFF"/>
                 </a:solidFill>
                 <a:latin typeface="Arial" panose="020B0604020202020204" pitchFamily="34" charset="0"/>
               </a:rPr>
-              <a:t>STANDARDS &amp; REGULATIONS</a:t>
+              <a:t>MARKET RESEARCH</a:t>
             </a:r>
           </a:p>
         </p:txBody>
       </p:sp>
       <p:sp>
         <p:nvSpPr>
-          <p:cNvPr id="11" name="TextBox 10">
-            <a:extLst>
-              <a:ext uri="{FF2B5EF4-FFF2-40B4-BE49-F238E27FC236}">
-                <a16:creationId xmlns:a16="http://schemas.microsoft.com/office/drawing/2014/main" id="{C3666FF7-83E0-C867-38A8-750C9187C167}"/>
-              </a:ext>
-            </a:extLst>
-          </p:cNvPr>
-          <p:cNvSpPr txBox="1"/>
-          <p:nvPr/>
-        </p:nvSpPr>
-        <p:spPr>
-          <a:xfrm>
-            <a:off x="6337300" y="1701800"/>
-            <a:ext cx="5461000" cy="1955800"/>
-          </a:xfrm>
-          <a:prstGeom prst="rect">
-            <a:avLst/>
-          </a:prstGeom>
-          <a:noFill/>
-        </p:spPr>
-        <p:txBody>
-          <a:bodyPr vert="horz" wrap="square" lIns="0" tIns="0" rIns="0" bIns="0" rtlCol="0" anchor="t">
-            <a:noAutofit/>
-          </a:bodyPr>
-          <a:lstStyle/>
-          <a:p>
-            <a:pPr marL="127000" indent="-127000">
-              <a:spcAft>
-                <a:spcPts val="500"/>
-              </a:spcAft>
-              <a:buClr>
-                <a:srgbClr val="FFFFFF"/>
-              </a:buClr>
-              <a:buSzPct val="100000"/>
-              <a:buFont typeface="Arial" panose="020B0604020202020204" pitchFamily="34" charset="0"/>
-              <a:buChar char="•"/>
-            </a:pPr>
-            <a:r>
-              <a:rPr lang="en-IN" sz="1000" b="1">
-                <a:solidFill>
-                  <a:srgbClr val="FFFFFF"/>
-                </a:solidFill>
-                <a:latin typeface="Arial" panose="020B0604020202020204" pitchFamily="34" charset="0"/>
-              </a:rPr>
-              <a:t>OWASP Top 10 for LLM Applications 2025</a:t>
-            </a:r>
-            <a:r>
-              <a:rPr lang="en-IN" sz="1000">
-                <a:solidFill>
-                  <a:srgbClr val="FFFFFF"/>
-                </a:solidFill>
-                <a:latin typeface="Arial" panose="020B0604020202020204" pitchFamily="34" charset="0"/>
-              </a:rPr>
-              <a:t> – LLM02: Sensitive Information Disclosure</a:t>
-            </a:r>
-            <a:br>
-              <a:rPr lang="en-IN" sz="1000">
-                <a:solidFill>
-                  <a:srgbClr val="FFFFFF"/>
-                </a:solidFill>
-                <a:latin typeface="Arial" panose="020B0604020202020204" pitchFamily="34" charset="0"/>
-              </a:rPr>
-            </a:br>
-            <a:r>
-              <a:rPr lang="en-IN" sz="850">
-                <a:solidFill>
-                  <a:srgbClr val="A9D4FF"/>
-                </a:solidFill>
-                <a:latin typeface="Arial" panose="020B0604020202020204" pitchFamily="34" charset="0"/>
-                <a:hlinkClick r:id="rId9">
-                  <a:extLst>
-                    <a:ext uri="{A12FA001-AC4F-418D-AE19-62706E023703}">
-                      <ahyp:hlinkClr xmlns:ahyp="http://schemas.microsoft.com/office/drawing/2018/hyperlinkcolor" val="tx"/>
-                    </a:ext>
-                  </a:extLst>
-                </a:hlinkClick>
-              </a:rPr>
-              <a:t>genai.owasp.org/llm-top-10</a:t>
-            </a:r>
-            <a:endParaRPr lang="en-IN" sz="850">
-              <a:solidFill>
-                <a:srgbClr val="A9D4FF"/>
-              </a:solidFill>
-              <a:latin typeface="Arial" panose="020B0604020202020204" pitchFamily="34" charset="0"/>
-            </a:endParaRPr>
-          </a:p>
-          <a:p>
-            <a:pPr marL="127000" indent="-127000">
-              <a:spcAft>
-                <a:spcPts val="500"/>
-              </a:spcAft>
-              <a:buClr>
-                <a:srgbClr val="FFFFFF"/>
-              </a:buClr>
-              <a:buSzPct val="100000"/>
-              <a:buFont typeface="Arial" panose="020B0604020202020204" pitchFamily="34" charset="0"/>
-              <a:buChar char="•"/>
-            </a:pPr>
-            <a:r>
-              <a:rPr lang="en-IN" sz="1000" b="1">
-                <a:solidFill>
-                  <a:srgbClr val="FFFFFF"/>
-                </a:solidFill>
-                <a:latin typeface="Arial" panose="020B0604020202020204" pitchFamily="34" charset="0"/>
-              </a:rPr>
-              <a:t>Digital Personal Data Protection Act 2023</a:t>
-            </a:r>
-            <a:r>
-              <a:rPr lang="en-IN" sz="1000">
-                <a:solidFill>
-                  <a:srgbClr val="FFFFFF"/>
-                </a:solidFill>
-                <a:latin typeface="Arial" panose="020B0604020202020204" pitchFamily="34" charset="0"/>
-              </a:rPr>
-              <a:t> and DPDP Rules 2025 (MeitY)</a:t>
-            </a:r>
-            <a:br>
-              <a:rPr lang="en-IN" sz="1000">
-                <a:solidFill>
-                  <a:srgbClr val="FFFFFF"/>
-                </a:solidFill>
-                <a:latin typeface="Arial" panose="020B0604020202020204" pitchFamily="34" charset="0"/>
-              </a:rPr>
-            </a:br>
-            <a:r>
-              <a:rPr lang="en-IN" sz="850">
-                <a:solidFill>
-                  <a:srgbClr val="A9D4FF"/>
-                </a:solidFill>
-                <a:latin typeface="Arial" panose="020B0604020202020204" pitchFamily="34" charset="0"/>
-                <a:hlinkClick r:id="rId10">
-                  <a:extLst>
-                    <a:ext uri="{A12FA001-AC4F-418D-AE19-62706E023703}">
-                      <ahyp:hlinkClr xmlns:ahyp="http://schemas.microsoft.com/office/drawing/2018/hyperlinkcolor" val="tx"/>
-                    </a:ext>
-                  </a:extLst>
-                </a:hlinkClick>
-              </a:rPr>
-              <a:t>meity.gov.in/data-protection-framework</a:t>
-            </a:r>
-            <a:endParaRPr lang="en-IN" sz="850">
-              <a:solidFill>
-                <a:srgbClr val="A9D4FF"/>
-              </a:solidFill>
-              <a:latin typeface="Arial" panose="020B0604020202020204" pitchFamily="34" charset="0"/>
-            </a:endParaRPr>
-          </a:p>
-          <a:p>
-            <a:pPr marL="127000" indent="-127000">
-              <a:spcAft>
-                <a:spcPts val="500"/>
-              </a:spcAft>
-              <a:buClr>
-                <a:srgbClr val="FFFFFF"/>
-              </a:buClr>
-              <a:buSzPct val="100000"/>
-              <a:buFont typeface="Arial" panose="020B0604020202020204" pitchFamily="34" charset="0"/>
-              <a:buChar char="•"/>
-            </a:pPr>
-            <a:r>
-              <a:rPr lang="en-IN" sz="1000" b="1">
-                <a:solidFill>
-                  <a:srgbClr val="FFFFFF"/>
-                </a:solidFill>
-                <a:latin typeface="Arial" panose="020B0604020202020204" pitchFamily="34" charset="0"/>
-              </a:rPr>
-              <a:t>NIST SP 800-122</a:t>
-            </a:r>
-            <a:r>
-              <a:rPr lang="en-IN" sz="1000">
-                <a:solidFill>
-                  <a:srgbClr val="FFFFFF"/>
-                </a:solidFill>
-                <a:latin typeface="Arial" panose="020B0604020202020204" pitchFamily="34" charset="0"/>
-              </a:rPr>
-              <a:t> – Guide to Protecting the Confidentiality of PII</a:t>
-            </a:r>
-            <a:br>
-              <a:rPr lang="en-IN" sz="1000">
-                <a:solidFill>
-                  <a:srgbClr val="FFFFFF"/>
-                </a:solidFill>
-                <a:latin typeface="Arial" panose="020B0604020202020204" pitchFamily="34" charset="0"/>
-              </a:rPr>
-            </a:br>
-            <a:r>
-              <a:rPr lang="en-IN" sz="850">
-                <a:solidFill>
-                  <a:srgbClr val="A9D4FF"/>
-                </a:solidFill>
-                <a:latin typeface="Arial" panose="020B0604020202020204" pitchFamily="34" charset="0"/>
-                <a:hlinkClick r:id="rId11">
-                  <a:extLst>
-                    <a:ext uri="{A12FA001-AC4F-418D-AE19-62706E023703}">
-                      <ahyp:hlinkClr xmlns:ahyp="http://schemas.microsoft.com/office/drawing/2018/hyperlinkcolor" val="tx"/>
-                    </a:ext>
-                  </a:extLst>
-                </a:hlinkClick>
-              </a:rPr>
-              <a:t>csrc.nist.gov/pubs/sp/800/122/final</a:t>
-            </a:r>
-            <a:endParaRPr lang="en-IN" sz="850">
-              <a:solidFill>
-                <a:srgbClr val="A9D4FF"/>
-              </a:solidFill>
-              <a:latin typeface="Arial" panose="020B0604020202020204" pitchFamily="34" charset="0"/>
-            </a:endParaRPr>
-          </a:p>
-          <a:p>
-            <a:pPr marL="127000" indent="-127000">
-              <a:spcAft>
-                <a:spcPts val="500"/>
-              </a:spcAft>
-              <a:buClr>
-                <a:srgbClr val="FFFFFF"/>
-              </a:buClr>
-              <a:buSzPct val="100000"/>
-              <a:buFont typeface="Arial" panose="020B0604020202020204" pitchFamily="34" charset="0"/>
-              <a:buChar char="•"/>
-            </a:pPr>
-            <a:r>
-              <a:rPr lang="en-IN" sz="1000" b="1">
-                <a:solidFill>
-                  <a:srgbClr val="FFFFFF"/>
-                </a:solidFill>
-                <a:latin typeface="Arial" panose="020B0604020202020204" pitchFamily="34" charset="0"/>
-              </a:rPr>
-              <a:t>GDPR Art. 25</a:t>
-            </a:r>
-            <a:r>
-              <a:rPr lang="en-IN" sz="1000">
-                <a:solidFill>
-                  <a:srgbClr val="FFFFFF"/>
-                </a:solidFill>
-                <a:latin typeface="Arial" panose="020B0604020202020204" pitchFamily="34" charset="0"/>
-              </a:rPr>
-              <a:t> – data protection by design and by default</a:t>
-            </a:r>
-            <a:br>
-              <a:rPr lang="en-IN" sz="1000">
-                <a:solidFill>
-                  <a:srgbClr val="FFFFFF"/>
-                </a:solidFill>
-                <a:latin typeface="Arial" panose="020B0604020202020204" pitchFamily="34" charset="0"/>
-              </a:rPr>
-            </a:br>
-            <a:r>
-              <a:rPr lang="en-IN" sz="850">
-                <a:solidFill>
-                  <a:srgbClr val="A9D4FF"/>
-                </a:solidFill>
-                <a:latin typeface="Arial" panose="020B0604020202020204" pitchFamily="34" charset="0"/>
-                <a:hlinkClick r:id="rId12">
-                  <a:extLst>
-                    <a:ext uri="{A12FA001-AC4F-418D-AE19-62706E023703}">
-                      <ahyp:hlinkClr xmlns:ahyp="http://schemas.microsoft.com/office/drawing/2018/hyperlinkcolor" val="tx"/>
-                    </a:ext>
-                  </a:extLst>
-                </a:hlinkClick>
-              </a:rPr>
-              <a:t>gdpr-info.eu/art-25-gdpr</a:t>
-            </a:r>
-            <a:endParaRPr lang="en-IN" sz="850">
-              <a:solidFill>
-                <a:srgbClr val="A9D4FF"/>
-              </a:solidFill>
-              <a:latin typeface="Arial" panose="020B0604020202020204" pitchFamily="34" charset="0"/>
-            </a:endParaRPr>
-          </a:p>
-        </p:txBody>
-      </p:sp>
-      <p:sp>
-        <p:nvSpPr>
-          <p:cNvPr id="12" name="Rectangle 11">
-            <a:extLst>
-              <a:ext uri="{FF2B5EF4-FFF2-40B4-BE49-F238E27FC236}">
-                <a16:creationId xmlns:a16="http://schemas.microsoft.com/office/drawing/2014/main" id="{4091B6E2-DB8C-642F-6637-AF5C0F535F85}"/>
+          <p:cNvPr id="27" name="Rectangle: Rounded Corners 26">
+            <a:extLst>
+              <a:ext uri="{FF2B5EF4-FFF2-40B4-BE49-F238E27FC236}">
+                <a16:creationId xmlns:a16="http://schemas.microsoft.com/office/drawing/2014/main" id="{24CEA125-9C85-8AB4-F867-C3D4446AE7A8}"/>
               </a:ext>
             </a:extLst>
           </p:cNvPr>
@@ -34465,24 +35006,17 @@
         </p:nvSpPr>
         <p:spPr>
           <a:xfrm>
-            <a:off x="228600" y="3759200"/>
-            <a:ext cx="5829300" cy="2489200"/>
-          </a:xfrm>
-          <a:prstGeom prst="rect">
-            <a:avLst/>
-          </a:prstGeom>
-          <a:gradFill flip="none" rotWithShape="1">
-            <a:gsLst>
-              <a:gs pos="0">
-                <a:srgbClr val="0B0B2B"/>
-              </a:gs>
-              <a:gs pos="100000">
-                <a:srgbClr val="3B39C9"/>
-              </a:gs>
-            </a:gsLst>
-            <a:lin ang="0" scaled="1"/>
-            <a:tileRect/>
-          </a:gradFill>
+            <a:off x="6350000" y="1803400"/>
+            <a:ext cx="5435600" cy="1803400"/>
+          </a:xfrm>
+          <a:prstGeom prst="roundRect">
+            <a:avLst>
+              <a:gd name="adj" fmla="val 7042"/>
+            </a:avLst>
+          </a:prstGeom>
+          <a:solidFill>
+            <a:srgbClr val="FFFFFF"/>
+          </a:solidFill>
           <a:ln w="25400" cap="flat" cmpd="sng" algn="ctr">
             <a:noFill/>
             <a:prstDash val="solid"/>
@@ -34526,48 +35060,12 @@
           </a:p>
         </p:txBody>
       </p:sp>
-      <p:pic>
-        <p:nvPicPr>
-          <p:cNvPr id="14" name="Graphic 13" descr="chart-bar icon">
-            <a:extLst>
-              <a:ext uri="{FF2B5EF4-FFF2-40B4-BE49-F238E27FC236}">
-                <a16:creationId xmlns:a16="http://schemas.microsoft.com/office/drawing/2014/main" id="{2BCC155E-8339-CE33-CDD1-20019902D85E}"/>
-              </a:ext>
-            </a:extLst>
-          </p:cNvPr>
-          <p:cNvPicPr>
-            <a:picLocks/>
-          </p:cNvPicPr>
-          <p:nvPr/>
-        </p:nvPicPr>
-        <p:blipFill>
-          <a:blip>
-            <a:extLst>
-              <a:ext uri="{96DAC541-7B7A-43D3-8B79-37D633B846F1}">
-                <asvg:svgBlip xmlns:asvg="http://schemas.microsoft.com/office/drawing/2016/SVG/main" r:embed="rId13"/>
-              </a:ext>
-            </a:extLst>
-          </a:blip>
-          <a:stretch>
-            <a:fillRect/>
-          </a:stretch>
-        </p:blipFill>
-        <p:spPr>
-          <a:xfrm>
-            <a:off x="406400" y="3873500"/>
-            <a:ext cx="279400" cy="279400"/>
-          </a:xfrm>
-          <a:prstGeom prst="rect">
-            <a:avLst/>
-          </a:prstGeom>
-        </p:spPr>
-      </p:pic>
-      <p:sp>
-        <p:nvSpPr>
-          <p:cNvPr id="15" name="TextBox 14">
-            <a:extLst>
-              <a:ext uri="{FF2B5EF4-FFF2-40B4-BE49-F238E27FC236}">
-                <a16:creationId xmlns:a16="http://schemas.microsoft.com/office/drawing/2014/main" id="{7A7E1EE8-43F7-F620-DB37-CE18278BDE84}"/>
+      <p:sp>
+        <p:nvSpPr>
+          <p:cNvPr id="28" name="TextBox 27">
+            <a:extLst>
+              <a:ext uri="{FF2B5EF4-FFF2-40B4-BE49-F238E27FC236}">
+                <a16:creationId xmlns:a16="http://schemas.microsoft.com/office/drawing/2014/main" id="{472B9948-DEC1-E95F-DBEC-7098C069B88F}"/>
               </a:ext>
             </a:extLst>
           </p:cNvPr>
@@ -34576,8 +35074,8 @@
         </p:nvSpPr>
         <p:spPr>
           <a:xfrm>
-            <a:off x="762000" y="3835400"/>
-            <a:ext cx="5143500" cy="355600"/>
+            <a:off x="6527800" y="1905000"/>
+            <a:ext cx="3810000" cy="228600"/>
           </a:xfrm>
           <a:prstGeom prst="rect">
             <a:avLst/>
@@ -34591,23 +35089,23 @@
           <a:lstStyle/>
           <a:p>
             <a:r>
-              <a:rPr lang="en-IN" sz="1700" b="1">
-                <a:solidFill>
-                  <a:srgbClr val="FFFFFF"/>
+              <a:rPr lang="en-IN" sz="1250" b="1">
+                <a:solidFill>
+                  <a:srgbClr val="1F497D"/>
                 </a:solidFill>
                 <a:latin typeface="Arial" panose="020B0604020202020204" pitchFamily="34" charset="0"/>
               </a:rPr>
-              <a:t>MARKET RESEARCH</a:t>
+              <a:t>Data loss prevention (DLP) market</a:t>
             </a:r>
           </a:p>
         </p:txBody>
       </p:sp>
       <p:sp>
         <p:nvSpPr>
-          <p:cNvPr id="16" name="TextBox 15">
-            <a:extLst>
-              <a:ext uri="{FF2B5EF4-FFF2-40B4-BE49-F238E27FC236}">
-                <a16:creationId xmlns:a16="http://schemas.microsoft.com/office/drawing/2014/main" id="{D7CF7E7E-F269-0F13-0923-5076BDA420E4}"/>
+          <p:cNvPr id="29" name="TextBox 28">
+            <a:extLst>
+              <a:ext uri="{FF2B5EF4-FFF2-40B4-BE49-F238E27FC236}">
+                <a16:creationId xmlns:a16="http://schemas.microsoft.com/office/drawing/2014/main" id="{AE820E43-3800-98D5-D737-A89BE200B078}"/>
               </a:ext>
             </a:extLst>
           </p:cNvPr>
@@ -34616,8 +35114,8 @@
         </p:nvSpPr>
         <p:spPr>
           <a:xfrm>
-            <a:off x="431800" y="4241800"/>
-            <a:ext cx="5461000" cy="1955800"/>
+            <a:off x="6527800" y="2133600"/>
+            <a:ext cx="3810000" cy="165100"/>
           </a:xfrm>
           <a:prstGeom prst="rect">
             <a:avLst/>
@@ -34625,55 +35123,18 @@
           <a:noFill/>
         </p:spPr>
         <p:txBody>
-          <a:bodyPr vert="horz" wrap="square" lIns="0" tIns="0" rIns="0" bIns="0" rtlCol="0" anchor="t">
+          <a:bodyPr vert="horz" wrap="square" lIns="0" tIns="0" rIns="0" bIns="0" rtlCol="0" anchor="ctr">
             <a:noAutofit/>
           </a:bodyPr>
           <a:lstStyle/>
           <a:p>
-            <a:pPr marL="127000" indent="-127000">
-              <a:spcAft>
-                <a:spcPts val="500"/>
-              </a:spcAft>
-              <a:buClr>
-                <a:srgbClr val="FFFFFF"/>
-              </a:buClr>
-              <a:buSzPct val="100000"/>
-              <a:buFont typeface="Arial" panose="020B0604020202020204" pitchFamily="34" charset="0"/>
-              <a:buChar char="•"/>
-            </a:pPr>
             <a:r>
-              <a:rPr lang="en-IN" sz="1000" b="1">
-                <a:solidFill>
-                  <a:srgbClr val="FFFFFF"/>
+              <a:rPr lang="en-IN" sz="900">
+                <a:solidFill>
+                  <a:srgbClr val="1D3FA0"/>
                 </a:solidFill>
                 <a:latin typeface="Arial" panose="020B0604020202020204" pitchFamily="34" charset="0"/>
-              </a:rPr>
-              <a:t>Data loss prevention market</a:t>
-            </a:r>
-            <a:r>
-              <a:rPr lang="en-IN" sz="1000">
-                <a:solidFill>
-                  <a:srgbClr val="FFFFFF"/>
-                </a:solidFill>
-                <a:latin typeface="Arial" panose="020B0604020202020204" pitchFamily="34" charset="0"/>
-              </a:rPr>
-              <a:t>: USD 3.4 B (2025) → USD 13.8 B by 2033, 19.0% CAGR (Grand View Research)</a:t>
-            </a:r>
-            <a:br>
-              <a:rPr lang="en-IN" sz="1000">
-                <a:solidFill>
-                  <a:srgbClr val="FFFFFF"/>
-                </a:solidFill>
-                <a:latin typeface="Arial" panose="020B0604020202020204" pitchFamily="34" charset="0"/>
-              </a:rPr>
-            </a:br>
-            <a:r>
-              <a:rPr lang="en-IN" sz="850">
-                <a:solidFill>
-                  <a:srgbClr val="A9D4FF"/>
-                </a:solidFill>
-                <a:latin typeface="Arial" panose="020B0604020202020204" pitchFamily="34" charset="0"/>
-                <a:hlinkClick r:id="rId14">
+                <a:hlinkClick r:id="rId10">
                   <a:extLst>
                     <a:ext uri="{A12FA001-AC4F-418D-AE19-62706E023703}">
                       <ahyp:hlinkClr xmlns:ahyp="http://schemas.microsoft.com/office/drawing/2018/hyperlinkcolor" val="tx"/>
@@ -34681,116 +35142,23 @@
                   </a:extLst>
                 </a:hlinkClick>
               </a:rPr>
-              <a:t>grandviewresearch.com/industry-analysis/data-loss-prevention-market</a:t>
+              <a:t>Grand View Research, 2026</a:t>
             </a:r>
-            <a:endParaRPr lang="en-IN" sz="850">
+            <a:endParaRPr lang="en-IN" sz="900">
               <a:solidFill>
-                <a:srgbClr val="A9D4FF"/>
+                <a:srgbClr val="1D3FA0"/>
               </a:solidFill>
               <a:latin typeface="Arial" panose="020B0604020202020204" pitchFamily="34" charset="0"/>
             </a:endParaRPr>
           </a:p>
-          <a:p>
-            <a:pPr marL="127000" indent="-127000">
-              <a:spcAft>
-                <a:spcPts val="500"/>
-              </a:spcAft>
-              <a:buClr>
-                <a:srgbClr val="FFFFFF"/>
-              </a:buClr>
-              <a:buSzPct val="100000"/>
-              <a:buFont typeface="Arial" panose="020B0604020202020204" pitchFamily="34" charset="0"/>
-              <a:buChar char="•"/>
-            </a:pPr>
-            <a:r>
-              <a:rPr lang="en-IN" sz="1000" b="1">
-                <a:solidFill>
-                  <a:srgbClr val="FFFFFF"/>
-                </a:solidFill>
-                <a:latin typeface="Arial" panose="020B0604020202020204" pitchFamily="34" charset="0"/>
-              </a:rPr>
-              <a:t>82% of AI pastes</a:t>
-            </a:r>
-            <a:r>
-              <a:rPr lang="en-IN" sz="1000">
-                <a:solidFill>
-                  <a:srgbClr val="FFFFFF"/>
-                </a:solidFill>
-                <a:latin typeface="Arial" panose="020B0604020202020204" pitchFamily="34" charset="0"/>
-              </a:rPr>
-              <a:t> come from unmanaged accounts that network DLP cannot see → the control has to live on the device (LayerX 2025)</a:t>
-            </a:r>
-          </a:p>
-          <a:p>
-            <a:pPr marL="127000" indent="-127000">
-              <a:spcAft>
-                <a:spcPts val="500"/>
-              </a:spcAft>
-              <a:buClr>
-                <a:srgbClr val="FFFFFF"/>
-              </a:buClr>
-              <a:buSzPct val="100000"/>
-              <a:buFont typeface="Arial" panose="020B0604020202020204" pitchFamily="34" charset="0"/>
-              <a:buChar char="•"/>
-            </a:pPr>
-            <a:r>
-              <a:rPr lang="en-IN" sz="1000" b="1">
-                <a:solidFill>
-                  <a:srgbClr val="FFFFFF"/>
-                </a:solidFill>
-                <a:latin typeface="Arial" panose="020B0604020202020204" pitchFamily="34" charset="0"/>
-              </a:rPr>
-              <a:t>Gap</a:t>
-            </a:r>
-            <a:r>
-              <a:rPr lang="en-IN" sz="1000">
-                <a:solidFill>
-                  <a:srgbClr val="FFFFFF"/>
-                </a:solidFill>
-                <a:latin typeface="Arial" panose="020B0604020202020204" pitchFamily="34" charset="0"/>
-              </a:rPr>
-              <a:t>: current tools block AI or proxy prompts through the cloud; on-device, policy-driven sanitizing is what P2Shield adds</a:t>
-            </a:r>
-          </a:p>
-          <a:p>
-            <a:pPr marL="127000" indent="-127000">
-              <a:spcAft>
-                <a:spcPts val="500"/>
-              </a:spcAft>
-              <a:buClr>
-                <a:srgbClr val="FFFFFF"/>
-              </a:buClr>
-              <a:buSzPct val="100000"/>
-              <a:buFont typeface="Arial" panose="020B0604020202020204" pitchFamily="34" charset="0"/>
-              <a:buChar char="•"/>
-            </a:pPr>
-            <a:r>
-              <a:rPr lang="en-IN" sz="1000" b="1">
-                <a:solidFill>
-                  <a:srgbClr val="FFFFFF"/>
-                </a:solidFill>
-                <a:latin typeface="Arial" panose="020B0604020202020204" pitchFamily="34" charset="0"/>
-              </a:rPr>
-              <a:t>Demand drivers</a:t>
-            </a:r>
-            <a:r>
-              <a:rPr lang="en-IN" sz="1000">
-                <a:solidFill>
-                  <a:srgbClr val="FFFFFF"/>
-                </a:solidFill>
-                <a:latin typeface="Arial" panose="020B0604020202020204" pitchFamily="34" charset="0"/>
-              </a:rPr>
-              <a:t>: DPDP compliance deadline (May 2027), enterprise AI rollout, regulated sectors such as health and banking</a:t>
-            </a:r>
-          </a:p>
-        </p:txBody>
-      </p:sp>
-      <p:sp>
-        <p:nvSpPr>
-          <p:cNvPr id="17" name="Rectangle 16">
-            <a:extLst>
-              <a:ext uri="{FF2B5EF4-FFF2-40B4-BE49-F238E27FC236}">
-                <a16:creationId xmlns:a16="http://schemas.microsoft.com/office/drawing/2014/main" id="{1BBE357C-01D3-21BD-CC26-AA9F5E80356B}"/>
+        </p:txBody>
+      </p:sp>
+      <p:sp>
+        <p:nvSpPr>
+          <p:cNvPr id="30" name="Rectangle: Rounded Corners 29">
+            <a:extLst>
+              <a:ext uri="{FF2B5EF4-FFF2-40B4-BE49-F238E27FC236}">
+                <a16:creationId xmlns:a16="http://schemas.microsoft.com/office/drawing/2014/main" id="{B8D6A0E5-8D7A-9E5C-CDF5-9FD24BDBFB58}"/>
               </a:ext>
             </a:extLst>
           </p:cNvPr>
@@ -34799,24 +35167,17 @@
         </p:nvSpPr>
         <p:spPr>
           <a:xfrm>
-            <a:off x="6134100" y="3759200"/>
-            <a:ext cx="5829300" cy="2489200"/>
-          </a:xfrm>
-          <a:prstGeom prst="rect">
-            <a:avLst/>
-          </a:prstGeom>
-          <a:gradFill flip="none" rotWithShape="1">
-            <a:gsLst>
-              <a:gs pos="0">
-                <a:srgbClr val="BDF2F6"/>
-              </a:gs>
-              <a:gs pos="100000">
-                <a:srgbClr val="A9C0F2"/>
-              </a:gs>
-            </a:gsLst>
-            <a:lin ang="0" scaled="1"/>
-            <a:tileRect/>
-          </a:gradFill>
+            <a:off x="10541000" y="1930400"/>
+            <a:ext cx="1117600" cy="304800"/>
+          </a:xfrm>
+          <a:prstGeom prst="roundRect">
+            <a:avLst>
+              <a:gd name="adj" fmla="val 50000"/>
+            </a:avLst>
+          </a:prstGeom>
+          <a:solidFill>
+            <a:srgbClr val="2E9E5B"/>
+          </a:solidFill>
           <a:ln w="25400" cap="flat" cmpd="sng" algn="ctr">
             <a:noFill/>
             <a:prstDash val="solid"/>
@@ -34852,6 +35213,122 @@
           </a:fontRef>
         </p:style>
         <p:txBody>
+          <a:bodyPr lIns="0" tIns="0" rIns="0" bIns="0" rtlCol="0" anchor="ctr"/>
+          <a:lstStyle/>
+          <a:p>
+            <a:pPr algn="ctr"/>
+            <a:r>
+              <a:rPr lang="en-IN" sz="1100" b="1">
+                <a:solidFill>
+                  <a:srgbClr val="FFFFFF"/>
+                </a:solidFill>
+                <a:latin typeface="Arial" panose="020B0604020202020204" pitchFamily="34" charset="0"/>
+              </a:rPr>
+              <a:t>19% CAGR</a:t>
+            </a:r>
+          </a:p>
+        </p:txBody>
+      </p:sp>
+      <p:sp>
+        <p:nvSpPr>
+          <p:cNvPr id="31" name="TextBox 30">
+            <a:extLst>
+              <a:ext uri="{FF2B5EF4-FFF2-40B4-BE49-F238E27FC236}">
+                <a16:creationId xmlns:a16="http://schemas.microsoft.com/office/drawing/2014/main" id="{C7F32F47-867E-75D6-90D5-22555485DA09}"/>
+              </a:ext>
+            </a:extLst>
+          </p:cNvPr>
+          <p:cNvSpPr txBox="1"/>
+          <p:nvPr/>
+        </p:nvSpPr>
+        <p:spPr>
+          <a:xfrm>
+            <a:off x="6527800" y="2463800"/>
+            <a:ext cx="558800" cy="381000"/>
+          </a:xfrm>
+          <a:prstGeom prst="rect">
+            <a:avLst/>
+          </a:prstGeom>
+          <a:noFill/>
+        </p:spPr>
+        <p:txBody>
+          <a:bodyPr vert="horz" wrap="square" lIns="0" tIns="0" rIns="0" bIns="0" rtlCol="0" anchor="ctr">
+            <a:noAutofit/>
+          </a:bodyPr>
+          <a:lstStyle/>
+          <a:p>
+            <a:r>
+              <a:rPr lang="en-IN" sz="1200" b="1">
+                <a:solidFill>
+                  <a:srgbClr val="1A1A1A"/>
+                </a:solidFill>
+                <a:latin typeface="Arial" panose="020B0604020202020204" pitchFamily="34" charset="0"/>
+              </a:rPr>
+              <a:t>2025</a:t>
+            </a:r>
+          </a:p>
+        </p:txBody>
+      </p:sp>
+      <p:sp>
+        <p:nvSpPr>
+          <p:cNvPr id="32" name="Rectangle: Rounded Corners 31">
+            <a:extLst>
+              <a:ext uri="{FF2B5EF4-FFF2-40B4-BE49-F238E27FC236}">
+                <a16:creationId xmlns:a16="http://schemas.microsoft.com/office/drawing/2014/main" id="{84BBBCE4-073B-0B43-2A07-A1A77A06C1C0}"/>
+              </a:ext>
+            </a:extLst>
+          </p:cNvPr>
+          <p:cNvSpPr/>
+          <p:nvPr/>
+        </p:nvSpPr>
+        <p:spPr>
+          <a:xfrm>
+            <a:off x="7137400" y="2501900"/>
+            <a:ext cx="782246" cy="304800"/>
+          </a:xfrm>
+          <a:prstGeom prst="roundRect">
+            <a:avLst>
+              <a:gd name="adj" fmla="val 20833"/>
+            </a:avLst>
+          </a:prstGeom>
+          <a:solidFill>
+            <a:srgbClr val="8FA9D6"/>
+          </a:solidFill>
+          <a:ln w="25400" cap="flat" cmpd="sng" algn="ctr">
+            <a:noFill/>
+            <a:prstDash val="solid"/>
+          </a:ln>
+          <a:effectLst/>
+          <a:extLst>
+            <a:ext uri="{91240B29-F687-4F45-9708-019B960494DF}">
+              <a14:hiddenLine xmlns:a14="http://schemas.microsoft.com/office/drawing/2010/main" w="25400" cap="flat" cmpd="sng" algn="ctr">
+                <a:solidFill>
+                  <a:schemeClr val="accent1">
+                    <a:shade val="15000"/>
+                  </a:schemeClr>
+                </a:solidFill>
+                <a:prstDash val="solid"/>
+              </a14:hiddenLine>
+            </a:ext>
+          </a:extLst>
+        </p:spPr>
+        <p:style>
+          <a:lnRef idx="2">
+            <a:schemeClr val="accent1">
+              <a:shade val="15000"/>
+            </a:schemeClr>
+          </a:lnRef>
+          <a:fillRef idx="1">
+            <a:schemeClr val="accent1"/>
+          </a:fillRef>
+          <a:effectRef idx="0">
+            <a:schemeClr val="accent1"/>
+          </a:effectRef>
+          <a:fontRef idx="minor">
+            <a:schemeClr val="lt1"/>
+          </a:fontRef>
+        </p:style>
+        <p:txBody>
           <a:bodyPr rtlCol="0" anchor="ctr"/>
           <a:lstStyle/>
           <a:p>
@@ -34860,12 +35337,308 @@
           </a:p>
         </p:txBody>
       </p:sp>
+      <p:sp>
+        <p:nvSpPr>
+          <p:cNvPr id="33" name="TextBox 32">
+            <a:extLst>
+              <a:ext uri="{FF2B5EF4-FFF2-40B4-BE49-F238E27FC236}">
+                <a16:creationId xmlns:a16="http://schemas.microsoft.com/office/drawing/2014/main" id="{161069F8-E76A-EFBE-E341-BD1B48E83AC1}"/>
+              </a:ext>
+            </a:extLst>
+          </p:cNvPr>
+          <p:cNvSpPr txBox="1"/>
+          <p:nvPr/>
+        </p:nvSpPr>
+        <p:spPr>
+          <a:xfrm>
+            <a:off x="8021246" y="2463800"/>
+            <a:ext cx="1270000" cy="381000"/>
+          </a:xfrm>
+          <a:prstGeom prst="rect">
+            <a:avLst/>
+          </a:prstGeom>
+          <a:noFill/>
+        </p:spPr>
+        <p:txBody>
+          <a:bodyPr vert="horz" wrap="square" lIns="0" tIns="0" rIns="0" bIns="0" rtlCol="0" anchor="ctr">
+            <a:noAutofit/>
+          </a:bodyPr>
+          <a:lstStyle/>
+          <a:p>
+            <a:r>
+              <a:rPr lang="en-IN" sz="1250" b="1">
+                <a:solidFill>
+                  <a:srgbClr val="1F497D"/>
+                </a:solidFill>
+                <a:latin typeface="Arial" panose="020B0604020202020204" pitchFamily="34" charset="0"/>
+              </a:rPr>
+              <a:t>USD 3.4 B</a:t>
+            </a:r>
+          </a:p>
+        </p:txBody>
+      </p:sp>
+      <p:sp>
+        <p:nvSpPr>
+          <p:cNvPr id="34" name="TextBox 33">
+            <a:extLst>
+              <a:ext uri="{FF2B5EF4-FFF2-40B4-BE49-F238E27FC236}">
+                <a16:creationId xmlns:a16="http://schemas.microsoft.com/office/drawing/2014/main" id="{E5407B91-26D9-FD83-F97F-E9F1F9711D8C}"/>
+              </a:ext>
+            </a:extLst>
+          </p:cNvPr>
+          <p:cNvSpPr txBox="1"/>
+          <p:nvPr/>
+        </p:nvSpPr>
+        <p:spPr>
+          <a:xfrm>
+            <a:off x="6527800" y="2946400"/>
+            <a:ext cx="558800" cy="381000"/>
+          </a:xfrm>
+          <a:prstGeom prst="rect">
+            <a:avLst/>
+          </a:prstGeom>
+          <a:noFill/>
+        </p:spPr>
+        <p:txBody>
+          <a:bodyPr vert="horz" wrap="square" lIns="0" tIns="0" rIns="0" bIns="0" rtlCol="0" anchor="ctr">
+            <a:noAutofit/>
+          </a:bodyPr>
+          <a:lstStyle/>
+          <a:p>
+            <a:r>
+              <a:rPr lang="en-IN" sz="1200" b="1">
+                <a:solidFill>
+                  <a:srgbClr val="1A1A1A"/>
+                </a:solidFill>
+                <a:latin typeface="Arial" panose="020B0604020202020204" pitchFamily="34" charset="0"/>
+              </a:rPr>
+              <a:t>2033</a:t>
+            </a:r>
+          </a:p>
+        </p:txBody>
+      </p:sp>
+      <p:sp>
+        <p:nvSpPr>
+          <p:cNvPr id="35" name="Rectangle: Rounded Corners 34">
+            <a:extLst>
+              <a:ext uri="{FF2B5EF4-FFF2-40B4-BE49-F238E27FC236}">
+                <a16:creationId xmlns:a16="http://schemas.microsoft.com/office/drawing/2014/main" id="{D7133F7A-15F1-F3C4-6EDE-8698EB785608}"/>
+              </a:ext>
+            </a:extLst>
+          </p:cNvPr>
+          <p:cNvSpPr/>
+          <p:nvPr/>
+        </p:nvSpPr>
+        <p:spPr>
+          <a:xfrm>
+            <a:off x="7137400" y="2984500"/>
+            <a:ext cx="3175000" cy="304800"/>
+          </a:xfrm>
+          <a:prstGeom prst="roundRect">
+            <a:avLst>
+              <a:gd name="adj" fmla="val 20833"/>
+            </a:avLst>
+          </a:prstGeom>
+          <a:solidFill>
+            <a:srgbClr val="6F4FB0"/>
+          </a:solidFill>
+          <a:ln w="25400" cap="flat" cmpd="sng" algn="ctr">
+            <a:noFill/>
+            <a:prstDash val="solid"/>
+          </a:ln>
+          <a:effectLst/>
+          <a:extLst>
+            <a:ext uri="{91240B29-F687-4F45-9708-019B960494DF}">
+              <a14:hiddenLine xmlns:a14="http://schemas.microsoft.com/office/drawing/2010/main" w="25400" cap="flat" cmpd="sng" algn="ctr">
+                <a:solidFill>
+                  <a:schemeClr val="accent1">
+                    <a:shade val="15000"/>
+                  </a:schemeClr>
+                </a:solidFill>
+                <a:prstDash val="solid"/>
+              </a14:hiddenLine>
+            </a:ext>
+          </a:extLst>
+        </p:spPr>
+        <p:style>
+          <a:lnRef idx="2">
+            <a:schemeClr val="accent1">
+              <a:shade val="15000"/>
+            </a:schemeClr>
+          </a:lnRef>
+          <a:fillRef idx="1">
+            <a:schemeClr val="accent1"/>
+          </a:fillRef>
+          <a:effectRef idx="0">
+            <a:schemeClr val="accent1"/>
+          </a:effectRef>
+          <a:fontRef idx="minor">
+            <a:schemeClr val="lt1"/>
+          </a:fontRef>
+        </p:style>
+        <p:txBody>
+          <a:bodyPr rtlCol="0" anchor="ctr"/>
+          <a:lstStyle/>
+          <a:p>
+            <a:pPr algn="ctr"/>
+            <a:endParaRPr lang="en-IN"/>
+          </a:p>
+        </p:txBody>
+      </p:sp>
+      <p:sp>
+        <p:nvSpPr>
+          <p:cNvPr id="36" name="TextBox 35">
+            <a:extLst>
+              <a:ext uri="{FF2B5EF4-FFF2-40B4-BE49-F238E27FC236}">
+                <a16:creationId xmlns:a16="http://schemas.microsoft.com/office/drawing/2014/main" id="{1C009BA8-4CD2-01FA-EF63-3624229CFAA4}"/>
+              </a:ext>
+            </a:extLst>
+          </p:cNvPr>
+          <p:cNvSpPr txBox="1"/>
+          <p:nvPr/>
+        </p:nvSpPr>
+        <p:spPr>
+          <a:xfrm>
+            <a:off x="10414000" y="2946400"/>
+            <a:ext cx="1270000" cy="381000"/>
+          </a:xfrm>
+          <a:prstGeom prst="rect">
+            <a:avLst/>
+          </a:prstGeom>
+          <a:noFill/>
+        </p:spPr>
+        <p:txBody>
+          <a:bodyPr vert="horz" wrap="square" lIns="0" tIns="0" rIns="0" bIns="0" rtlCol="0" anchor="ctr">
+            <a:noAutofit/>
+          </a:bodyPr>
+          <a:lstStyle/>
+          <a:p>
+            <a:r>
+              <a:rPr lang="en-IN" sz="1250" b="1">
+                <a:solidFill>
+                  <a:srgbClr val="1F497D"/>
+                </a:solidFill>
+                <a:latin typeface="Arial" panose="020B0604020202020204" pitchFamily="34" charset="0"/>
+              </a:rPr>
+              <a:t>USD 13.8 B</a:t>
+            </a:r>
+          </a:p>
+        </p:txBody>
+      </p:sp>
+      <p:sp>
+        <p:nvSpPr>
+          <p:cNvPr id="37" name="TextBox 36">
+            <a:extLst>
+              <a:ext uri="{FF2B5EF4-FFF2-40B4-BE49-F238E27FC236}">
+                <a16:creationId xmlns:a16="http://schemas.microsoft.com/office/drawing/2014/main" id="{9431C6FF-D77D-191F-6DEC-D4826D09DECB}"/>
+              </a:ext>
+            </a:extLst>
+          </p:cNvPr>
+          <p:cNvSpPr txBox="1"/>
+          <p:nvPr/>
+        </p:nvSpPr>
+        <p:spPr>
+          <a:xfrm>
+            <a:off x="6527800" y="3378200"/>
+            <a:ext cx="5130800" cy="177800"/>
+          </a:xfrm>
+          <a:prstGeom prst="rect">
+            <a:avLst/>
+          </a:prstGeom>
+          <a:noFill/>
+        </p:spPr>
+        <p:txBody>
+          <a:bodyPr vert="horz" wrap="square" lIns="0" tIns="0" rIns="0" bIns="0" rtlCol="0" anchor="ctr">
+            <a:noAutofit/>
+          </a:bodyPr>
+          <a:lstStyle/>
+          <a:p>
+            <a:r>
+              <a:rPr lang="en-IN" sz="900" i="1">
+                <a:solidFill>
+                  <a:srgbClr val="55606E"/>
+                </a:solidFill>
+                <a:latin typeface="Arial" panose="020B0604020202020204" pitchFamily="34" charset="0"/>
+              </a:rPr>
+              <a:t>About 4× growth in 8 years, driven by data-protection laws and AI adoption</a:t>
+            </a:r>
+          </a:p>
+        </p:txBody>
+      </p:sp>
+      <p:sp>
+        <p:nvSpPr>
+          <p:cNvPr id="38" name="Rectangle: Rounded Corners 37">
+            <a:extLst>
+              <a:ext uri="{FF2B5EF4-FFF2-40B4-BE49-F238E27FC236}">
+                <a16:creationId xmlns:a16="http://schemas.microsoft.com/office/drawing/2014/main" id="{B930186B-1DA1-5105-7969-978E78699BBC}"/>
+              </a:ext>
+            </a:extLst>
+          </p:cNvPr>
+          <p:cNvSpPr/>
+          <p:nvPr/>
+        </p:nvSpPr>
+        <p:spPr>
+          <a:xfrm>
+            <a:off x="6350000" y="3810000"/>
+            <a:ext cx="508000" cy="508000"/>
+          </a:xfrm>
+          <a:prstGeom prst="roundRect">
+            <a:avLst>
+              <a:gd name="adj" fmla="val 20000"/>
+            </a:avLst>
+          </a:prstGeom>
+          <a:solidFill>
+            <a:srgbClr val="5B5BD6"/>
+          </a:solidFill>
+          <a:ln w="25400" cap="flat" cmpd="sng" algn="ctr">
+            <a:noFill/>
+            <a:prstDash val="solid"/>
+          </a:ln>
+          <a:effectLst/>
+          <a:extLst>
+            <a:ext uri="{91240B29-F687-4F45-9708-019B960494DF}">
+              <a14:hiddenLine xmlns:a14="http://schemas.microsoft.com/office/drawing/2010/main" w="25400" cap="flat" cmpd="sng" algn="ctr">
+                <a:solidFill>
+                  <a:schemeClr val="accent1">
+                    <a:shade val="15000"/>
+                  </a:schemeClr>
+                </a:solidFill>
+                <a:prstDash val="solid"/>
+              </a14:hiddenLine>
+            </a:ext>
+          </a:extLst>
+        </p:spPr>
+        <p:style>
+          <a:lnRef idx="2">
+            <a:schemeClr val="accent1">
+              <a:shade val="15000"/>
+            </a:schemeClr>
+          </a:lnRef>
+          <a:fillRef idx="1">
+            <a:schemeClr val="accent1"/>
+          </a:fillRef>
+          <a:effectRef idx="0">
+            <a:schemeClr val="accent1"/>
+          </a:effectRef>
+          <a:fontRef idx="minor">
+            <a:schemeClr val="lt1"/>
+          </a:fontRef>
+        </p:style>
+        <p:txBody>
+          <a:bodyPr rtlCol="0" anchor="ctr"/>
+          <a:lstStyle/>
+          <a:p>
+            <a:pPr algn="ctr"/>
+            <a:endParaRPr lang="en-IN"/>
+          </a:p>
+        </p:txBody>
+      </p:sp>
       <p:pic>
         <p:nvPicPr>
-          <p:cNvPr id="19" name="Graphic 18" descr="file-text icon">
-            <a:extLst>
-              <a:ext uri="{FF2B5EF4-FFF2-40B4-BE49-F238E27FC236}">
-                <a16:creationId xmlns:a16="http://schemas.microsoft.com/office/drawing/2014/main" id="{07AD55A9-51B9-E705-7B44-3A3A69C1114C}"/>
+          <p:cNvPr id="40" name="Graphic 39" descr="eye-off icon">
+            <a:extLst>
+              <a:ext uri="{FF2B5EF4-FFF2-40B4-BE49-F238E27FC236}">
+                <a16:creationId xmlns:a16="http://schemas.microsoft.com/office/drawing/2014/main" id="{B5C1188B-E80E-0668-A2A4-08F01514561F}"/>
               </a:ext>
             </a:extLst>
           </p:cNvPr>
@@ -34878,7 +35651,7 @@
           <a:blip>
             <a:extLst>
               <a:ext uri="{96DAC541-7B7A-43D3-8B79-37D633B846F1}">
-                <asvg:svgBlip xmlns:asvg="http://schemas.microsoft.com/office/drawing/2016/SVG/main" r:embed="rId15"/>
+                <asvg:svgBlip xmlns:asvg="http://schemas.microsoft.com/office/drawing/2016/SVG/main" r:embed="rId11"/>
               </a:ext>
             </a:extLst>
           </a:blip>
@@ -34888,7 +35661,7 @@
         </p:blipFill>
         <p:spPr>
           <a:xfrm>
-            <a:off x="6311900" y="3873500"/>
+            <a:off x="6464300" y="3924300"/>
             <a:ext cx="279400" cy="279400"/>
           </a:xfrm>
           <a:prstGeom prst="rect">
@@ -34898,10 +35671,10 @@
       </p:pic>
       <p:sp>
         <p:nvSpPr>
-          <p:cNvPr id="20" name="TextBox 19">
-            <a:extLst>
-              <a:ext uri="{FF2B5EF4-FFF2-40B4-BE49-F238E27FC236}">
-                <a16:creationId xmlns:a16="http://schemas.microsoft.com/office/drawing/2014/main" id="{846E573B-B2A8-1631-48AD-4C4652CDB604}"/>
+          <p:cNvPr id="41" name="TextBox 40">
+            <a:extLst>
+              <a:ext uri="{FF2B5EF4-FFF2-40B4-BE49-F238E27FC236}">
+                <a16:creationId xmlns:a16="http://schemas.microsoft.com/office/drawing/2014/main" id="{E679CEF1-492E-4979-1D1C-952891B9F23E}"/>
               </a:ext>
             </a:extLst>
           </p:cNvPr>
@@ -34910,8 +35683,8 @@
         </p:nvSpPr>
         <p:spPr>
           <a:xfrm>
-            <a:off x="6667500" y="3835400"/>
-            <a:ext cx="5143500" cy="355600"/>
+            <a:off x="7010400" y="3759200"/>
+            <a:ext cx="4775200" cy="660400"/>
           </a:xfrm>
           <a:prstGeom prst="rect">
             <a:avLst/>
@@ -34924,75 +35697,50 @@
           </a:bodyPr>
           <a:lstStyle/>
           <a:p>
+            <a:pPr>
+              <a:spcAft>
+                <a:spcPts val="100"/>
+              </a:spcAft>
+            </a:pPr>
             <a:r>
-              <a:rPr lang="en-IN" sz="1700" b="1">
+              <a:rPr lang="en-IN" sz="1100" b="1">
+                <a:solidFill>
+                  <a:srgbClr val="A9D4FF"/>
+                </a:solidFill>
                 <a:latin typeface="Arial" panose="020B0604020202020204" pitchFamily="34" charset="0"/>
               </a:rPr>
-              <a:t>TECHNICAL DOCUMENTATION</a:t>
+              <a:t>Blind spot</a:t>
             </a:r>
           </a:p>
-        </p:txBody>
-      </p:sp>
-      <p:sp>
-        <p:nvSpPr>
-          <p:cNvPr id="21" name="TextBox 20">
-            <a:extLst>
-              <a:ext uri="{FF2B5EF4-FFF2-40B4-BE49-F238E27FC236}">
-                <a16:creationId xmlns:a16="http://schemas.microsoft.com/office/drawing/2014/main" id="{7C5DDF29-7560-82F8-8C3E-34B10CC9DC0B}"/>
-              </a:ext>
-            </a:extLst>
-          </p:cNvPr>
-          <p:cNvSpPr txBox="1"/>
-          <p:nvPr/>
-        </p:nvSpPr>
-        <p:spPr>
-          <a:xfrm>
-            <a:off x="6337300" y="4241800"/>
-            <a:ext cx="5461000" cy="1955800"/>
-          </a:xfrm>
-          <a:prstGeom prst="rect">
-            <a:avLst/>
-          </a:prstGeom>
-          <a:noFill/>
-        </p:spPr>
-        <p:txBody>
-          <a:bodyPr vert="horz" wrap="square" lIns="0" tIns="0" rIns="0" bIns="0" rtlCol="0" anchor="t">
-            <a:noAutofit/>
-          </a:bodyPr>
-          <a:lstStyle/>
-          <a:p>
-            <a:pPr marL="127000" indent="-127000">
-              <a:spcAft>
-                <a:spcPts val="500"/>
-              </a:spcAft>
-              <a:buSzPct val="100000"/>
-              <a:buFont typeface="Arial" panose="020B0604020202020204" pitchFamily="34" charset="0"/>
-              <a:buChar char="•"/>
+          <a:p>
+            <a:pPr>
+              <a:spcAft>
+                <a:spcPts val="100"/>
+              </a:spcAft>
             </a:pPr>
             <a:r>
-              <a:rPr lang="en-IN" sz="1000" b="1">
+              <a:rPr lang="en-IN" sz="1100">
+                <a:solidFill>
+                  <a:srgbClr val="FFFFFF"/>
+                </a:solidFill>
                 <a:latin typeface="Arial" panose="020B0604020202020204" pitchFamily="34" charset="0"/>
               </a:rPr>
-              <a:t>Chrome Prompt API</a:t>
+              <a:t>82% of AI pastes come from personal accounts that company network tools cannot see</a:t>
             </a:r>
+          </a:p>
+          <a:p>
+            <a:pPr>
+              <a:spcAft>
+                <a:spcPts val="100"/>
+              </a:spcAft>
+            </a:pPr>
             <a:r>
-              <a:rPr lang="en-IN" sz="1000">
+              <a:rPr lang="en-IN" sz="900">
+                <a:solidFill>
+                  <a:srgbClr val="A9D4FF"/>
+                </a:solidFill>
                 <a:latin typeface="Arial" panose="020B0604020202020204" pitchFamily="34" charset="0"/>
-              </a:rPr>
-              <a:t> (Gemini Nano, on-device) for extensions</a:t>
-            </a:r>
-            <a:br>
-              <a:rPr lang="en-IN" sz="1000">
-                <a:latin typeface="Arial" panose="020B0604020202020204" pitchFamily="34" charset="0"/>
-              </a:rPr>
-            </a:br>
-            <a:r>
-              <a:rPr lang="en-IN" sz="850">
-                <a:solidFill>
-                  <a:srgbClr val="1D3FA0"/>
-                </a:solidFill>
-                <a:latin typeface="Arial" panose="020B0604020202020204" pitchFamily="34" charset="0"/>
-                <a:hlinkClick r:id="rId16">
+                <a:hlinkClick r:id="rId5">
                   <a:extLst>
                     <a:ext uri="{A12FA001-AC4F-418D-AE19-62706E023703}">
                       <ahyp:hlinkClr xmlns:ahyp="http://schemas.microsoft.com/office/drawing/2018/hyperlinkcolor" val="tx"/>
@@ -35000,48 +35748,358 @@
                   </a:extLst>
                 </a:hlinkClick>
               </a:rPr>
-              <a:t>developer.chrome.com/docs/extensions/ai/prompt-api</a:t>
+              <a:t>LayerX 2025</a:t>
             </a:r>
-            <a:endParaRPr lang="en-IN" sz="850">
+            <a:endParaRPr lang="en-IN" sz="900">
               <a:solidFill>
-                <a:srgbClr val="1D3FA0"/>
+                <a:srgbClr val="A9D4FF"/>
               </a:solidFill>
               <a:latin typeface="Arial" panose="020B0604020202020204" pitchFamily="34" charset="0"/>
             </a:endParaRPr>
           </a:p>
-          <a:p>
-            <a:pPr marL="127000" indent="-127000">
-              <a:spcAft>
-                <a:spcPts val="500"/>
-              </a:spcAft>
-              <a:buSzPct val="100000"/>
-              <a:buFont typeface="Arial" panose="020B0604020202020204" pitchFamily="34" charset="0"/>
-              <a:buChar char="•"/>
+        </p:txBody>
+      </p:sp>
+      <p:sp>
+        <p:nvSpPr>
+          <p:cNvPr id="42" name="Rectangle: Rounded Corners 41">
+            <a:extLst>
+              <a:ext uri="{FF2B5EF4-FFF2-40B4-BE49-F238E27FC236}">
+                <a16:creationId xmlns:a16="http://schemas.microsoft.com/office/drawing/2014/main" id="{84BB2D31-5748-6B38-4CB0-EB85FB48A04F}"/>
+              </a:ext>
+            </a:extLst>
+          </p:cNvPr>
+          <p:cNvSpPr/>
+          <p:nvPr/>
+        </p:nvSpPr>
+        <p:spPr>
+          <a:xfrm>
+            <a:off x="6350000" y="4572000"/>
+            <a:ext cx="508000" cy="508000"/>
+          </a:xfrm>
+          <a:prstGeom prst="roundRect">
+            <a:avLst>
+              <a:gd name="adj" fmla="val 20000"/>
+            </a:avLst>
+          </a:prstGeom>
+          <a:solidFill>
+            <a:srgbClr val="5B5BD6"/>
+          </a:solidFill>
+          <a:ln w="25400" cap="flat" cmpd="sng" algn="ctr">
+            <a:noFill/>
+            <a:prstDash val="solid"/>
+          </a:ln>
+          <a:effectLst/>
+          <a:extLst>
+            <a:ext uri="{91240B29-F687-4F45-9708-019B960494DF}">
+              <a14:hiddenLine xmlns:a14="http://schemas.microsoft.com/office/drawing/2010/main" w="25400" cap="flat" cmpd="sng" algn="ctr">
+                <a:solidFill>
+                  <a:schemeClr val="accent1">
+                    <a:shade val="15000"/>
+                  </a:schemeClr>
+                </a:solidFill>
+                <a:prstDash val="solid"/>
+              </a14:hiddenLine>
+            </a:ext>
+          </a:extLst>
+        </p:spPr>
+        <p:style>
+          <a:lnRef idx="2">
+            <a:schemeClr val="accent1">
+              <a:shade val="15000"/>
+            </a:schemeClr>
+          </a:lnRef>
+          <a:fillRef idx="1">
+            <a:schemeClr val="accent1"/>
+          </a:fillRef>
+          <a:effectRef idx="0">
+            <a:schemeClr val="accent1"/>
+          </a:effectRef>
+          <a:fontRef idx="minor">
+            <a:schemeClr val="lt1"/>
+          </a:fontRef>
+        </p:style>
+        <p:txBody>
+          <a:bodyPr rtlCol="0" anchor="ctr"/>
+          <a:lstStyle/>
+          <a:p>
+            <a:pPr algn="ctr"/>
+            <a:endParaRPr lang="en-IN"/>
+          </a:p>
+        </p:txBody>
+      </p:sp>
+      <p:pic>
+        <p:nvPicPr>
+          <p:cNvPr id="44" name="Graphic 43" descr="puzzle icon">
+            <a:extLst>
+              <a:ext uri="{FF2B5EF4-FFF2-40B4-BE49-F238E27FC236}">
+                <a16:creationId xmlns:a16="http://schemas.microsoft.com/office/drawing/2014/main" id="{D91862DE-83A6-A4B0-ED89-F15821A5F458}"/>
+              </a:ext>
+            </a:extLst>
+          </p:cNvPr>
+          <p:cNvPicPr>
+            <a:picLocks/>
+          </p:cNvPicPr>
+          <p:nvPr/>
+        </p:nvPicPr>
+        <p:blipFill>
+          <a:blip>
+            <a:extLst>
+              <a:ext uri="{96DAC541-7B7A-43D3-8B79-37D633B846F1}">
+                <asvg:svgBlip xmlns:asvg="http://schemas.microsoft.com/office/drawing/2016/SVG/main" r:embed="rId12"/>
+              </a:ext>
+            </a:extLst>
+          </a:blip>
+          <a:stretch>
+            <a:fillRect/>
+          </a:stretch>
+        </p:blipFill>
+        <p:spPr>
+          <a:xfrm>
+            <a:off x="6464300" y="4686300"/>
+            <a:ext cx="279400" cy="279400"/>
+          </a:xfrm>
+          <a:prstGeom prst="rect">
+            <a:avLst/>
+          </a:prstGeom>
+        </p:spPr>
+      </p:pic>
+      <p:sp>
+        <p:nvSpPr>
+          <p:cNvPr id="45" name="TextBox 44">
+            <a:extLst>
+              <a:ext uri="{FF2B5EF4-FFF2-40B4-BE49-F238E27FC236}">
+                <a16:creationId xmlns:a16="http://schemas.microsoft.com/office/drawing/2014/main" id="{83EA9A5D-D1DF-DD1F-A585-E4E4BB1AEAF2}"/>
+              </a:ext>
+            </a:extLst>
+          </p:cNvPr>
+          <p:cNvSpPr txBox="1"/>
+          <p:nvPr/>
+        </p:nvSpPr>
+        <p:spPr>
+          <a:xfrm>
+            <a:off x="7010400" y="4521200"/>
+            <a:ext cx="4775200" cy="660400"/>
+          </a:xfrm>
+          <a:prstGeom prst="rect">
+            <a:avLst/>
+          </a:prstGeom>
+          <a:noFill/>
+        </p:spPr>
+        <p:txBody>
+          <a:bodyPr vert="horz" wrap="square" lIns="0" tIns="0" rIns="0" bIns="0" rtlCol="0" anchor="ctr">
+            <a:noAutofit/>
+          </a:bodyPr>
+          <a:lstStyle/>
+          <a:p>
+            <a:pPr>
+              <a:spcAft>
+                <a:spcPts val="100"/>
+              </a:spcAft>
             </a:pPr>
             <a:r>
-              <a:rPr lang="en-IN" sz="1000" b="1">
+              <a:rPr lang="en-IN" sz="1100" b="1">
+                <a:solidFill>
+                  <a:srgbClr val="A9D4FF"/>
+                </a:solidFill>
                 <a:latin typeface="Arial" panose="020B0604020202020204" pitchFamily="34" charset="0"/>
               </a:rPr>
-              <a:t>chrome.storage.managed</a:t>
+              <a:t>Gap we fill</a:t>
             </a:r>
+          </a:p>
+          <a:p>
+            <a:pPr>
+              <a:spcAft>
+                <a:spcPts val="100"/>
+              </a:spcAft>
+            </a:pPr>
             <a:r>
-              <a:rPr lang="en-IN" sz="1000">
+              <a:rPr lang="en-IN" sz="1100">
+                <a:solidFill>
+                  <a:srgbClr val="FFFFFF"/>
+                </a:solidFill>
                 <a:latin typeface="Arial" panose="020B0604020202020204" pitchFamily="34" charset="0"/>
               </a:rPr>
-              <a:t> – organization policy for extensions</a:t>
+              <a:t>Existing tools block AI or route prompts through a cloud proxy. P2Shield cleans them on the device, for free.</a:t>
             </a:r>
-            <a:br>
-              <a:rPr lang="en-IN" sz="1000">
+          </a:p>
+        </p:txBody>
+      </p:sp>
+      <p:sp>
+        <p:nvSpPr>
+          <p:cNvPr id="46" name="Rectangle: Rounded Corners 45">
+            <a:extLst>
+              <a:ext uri="{FF2B5EF4-FFF2-40B4-BE49-F238E27FC236}">
+                <a16:creationId xmlns:a16="http://schemas.microsoft.com/office/drawing/2014/main" id="{F8A85E45-AA1E-8FC3-302B-C1EA736B3FA7}"/>
+              </a:ext>
+            </a:extLst>
+          </p:cNvPr>
+          <p:cNvSpPr/>
+          <p:nvPr/>
+        </p:nvSpPr>
+        <p:spPr>
+          <a:xfrm>
+            <a:off x="6350000" y="5334000"/>
+            <a:ext cx="508000" cy="508000"/>
+          </a:xfrm>
+          <a:prstGeom prst="roundRect">
+            <a:avLst>
+              <a:gd name="adj" fmla="val 20000"/>
+            </a:avLst>
+          </a:prstGeom>
+          <a:solidFill>
+            <a:srgbClr val="5B5BD6"/>
+          </a:solidFill>
+          <a:ln w="25400" cap="flat" cmpd="sng" algn="ctr">
+            <a:noFill/>
+            <a:prstDash val="solid"/>
+          </a:ln>
+          <a:effectLst/>
+          <a:extLst>
+            <a:ext uri="{91240B29-F687-4F45-9708-019B960494DF}">
+              <a14:hiddenLine xmlns:a14="http://schemas.microsoft.com/office/drawing/2010/main" w="25400" cap="flat" cmpd="sng" algn="ctr">
+                <a:solidFill>
+                  <a:schemeClr val="accent1">
+                    <a:shade val="15000"/>
+                  </a:schemeClr>
+                </a:solidFill>
+                <a:prstDash val="solid"/>
+              </a14:hiddenLine>
+            </a:ext>
+          </a:extLst>
+        </p:spPr>
+        <p:style>
+          <a:lnRef idx="2">
+            <a:schemeClr val="accent1">
+              <a:shade val="15000"/>
+            </a:schemeClr>
+          </a:lnRef>
+          <a:fillRef idx="1">
+            <a:schemeClr val="accent1"/>
+          </a:fillRef>
+          <a:effectRef idx="0">
+            <a:schemeClr val="accent1"/>
+          </a:effectRef>
+          <a:fontRef idx="minor">
+            <a:schemeClr val="lt1"/>
+          </a:fontRef>
+        </p:style>
+        <p:txBody>
+          <a:bodyPr rtlCol="0" anchor="ctr"/>
+          <a:lstStyle/>
+          <a:p>
+            <a:pPr algn="ctr"/>
+            <a:endParaRPr lang="en-IN"/>
+          </a:p>
+        </p:txBody>
+      </p:sp>
+      <p:pic>
+        <p:nvPicPr>
+          <p:cNvPr id="48" name="Graphic 47" descr="gavel icon">
+            <a:extLst>
+              <a:ext uri="{FF2B5EF4-FFF2-40B4-BE49-F238E27FC236}">
+                <a16:creationId xmlns:a16="http://schemas.microsoft.com/office/drawing/2014/main" id="{6CE69170-3F2C-1757-6B1D-91DB9AA98CD1}"/>
+              </a:ext>
+            </a:extLst>
+          </p:cNvPr>
+          <p:cNvPicPr>
+            <a:picLocks/>
+          </p:cNvPicPr>
+          <p:nvPr/>
+        </p:nvPicPr>
+        <p:blipFill>
+          <a:blip>
+            <a:extLst>
+              <a:ext uri="{96DAC541-7B7A-43D3-8B79-37D633B846F1}">
+                <asvg:svgBlip xmlns:asvg="http://schemas.microsoft.com/office/drawing/2016/SVG/main" r:embed="rId13"/>
+              </a:ext>
+            </a:extLst>
+          </a:blip>
+          <a:stretch>
+            <a:fillRect/>
+          </a:stretch>
+        </p:blipFill>
+        <p:spPr>
+          <a:xfrm>
+            <a:off x="6464300" y="5448300"/>
+            <a:ext cx="279400" cy="279400"/>
+          </a:xfrm>
+          <a:prstGeom prst="rect">
+            <a:avLst/>
+          </a:prstGeom>
+        </p:spPr>
+      </p:pic>
+      <p:sp>
+        <p:nvSpPr>
+          <p:cNvPr id="49" name="TextBox 48">
+            <a:extLst>
+              <a:ext uri="{FF2B5EF4-FFF2-40B4-BE49-F238E27FC236}">
+                <a16:creationId xmlns:a16="http://schemas.microsoft.com/office/drawing/2014/main" id="{DA9B86E7-CCB8-141D-2426-C4B3EA47456F}"/>
+              </a:ext>
+            </a:extLst>
+          </p:cNvPr>
+          <p:cNvSpPr txBox="1"/>
+          <p:nvPr/>
+        </p:nvSpPr>
+        <p:spPr>
+          <a:xfrm>
+            <a:off x="7010400" y="5283200"/>
+            <a:ext cx="4775200" cy="660400"/>
+          </a:xfrm>
+          <a:prstGeom prst="rect">
+            <a:avLst/>
+          </a:prstGeom>
+          <a:noFill/>
+        </p:spPr>
+        <p:txBody>
+          <a:bodyPr vert="horz" wrap="square" lIns="0" tIns="0" rIns="0" bIns="0" rtlCol="0" anchor="ctr">
+            <a:noAutofit/>
+          </a:bodyPr>
+          <a:lstStyle/>
+          <a:p>
+            <a:pPr>
+              <a:spcAft>
+                <a:spcPts val="100"/>
+              </a:spcAft>
+            </a:pPr>
+            <a:r>
+              <a:rPr lang="en-IN" sz="1100" b="1">
+                <a:solidFill>
+                  <a:srgbClr val="A9D4FF"/>
+                </a:solidFill>
                 <a:latin typeface="Arial" panose="020B0604020202020204" pitchFamily="34" charset="0"/>
               </a:rPr>
-            </a:br>
+              <a:t>Why now</a:t>
+            </a:r>
+          </a:p>
+          <a:p>
+            <a:pPr>
+              <a:spcAft>
+                <a:spcPts val="100"/>
+              </a:spcAft>
+            </a:pPr>
             <a:r>
-              <a:rPr lang="en-IN" sz="850">
-                <a:solidFill>
-                  <a:srgbClr val="1D3FA0"/>
+              <a:rPr lang="en-IN" sz="1100">
+                <a:solidFill>
+                  <a:srgbClr val="FFFFFF"/>
                 </a:solidFill>
                 <a:latin typeface="Arial" panose="020B0604020202020204" pitchFamily="34" charset="0"/>
-                <a:hlinkClick r:id="rId17">
+              </a:rPr>
+              <a:t>DPDP Rules 2025: full compliance due May 2027, penalties up to ₹250 Cr</a:t>
+            </a:r>
+          </a:p>
+          <a:p>
+            <a:pPr>
+              <a:spcAft>
+                <a:spcPts val="100"/>
+              </a:spcAft>
+            </a:pPr>
+            <a:r>
+              <a:rPr lang="en-IN" sz="900">
+                <a:solidFill>
+                  <a:srgbClr val="A9D4FF"/>
+                </a:solidFill>
+                <a:latin typeface="Arial" panose="020B0604020202020204" pitchFamily="34" charset="0"/>
+                <a:hlinkClick r:id="rId14">
                   <a:extLst>
                     <a:ext uri="{A12FA001-AC4F-418D-AE19-62706E023703}">
                       <ahyp:hlinkClr xmlns:ahyp="http://schemas.microsoft.com/office/drawing/2018/hyperlinkcolor" val="tx"/>
@@ -35049,131 +36107,11 @@
                   </a:extLst>
                 </a:hlinkClick>
               </a:rPr>
-              <a:t>developer.chrome.com/docs/extensions/reference/api/storage</a:t>
+              <a:t>MeitY, Data Protection Framework</a:t>
             </a:r>
-            <a:endParaRPr lang="en-IN" sz="850">
+            <a:endParaRPr lang="en-IN" sz="900">
               <a:solidFill>
-                <a:srgbClr val="1D3FA0"/>
-              </a:solidFill>
-              <a:latin typeface="Arial" panose="020B0604020202020204" pitchFamily="34" charset="0"/>
-            </a:endParaRPr>
-          </a:p>
-          <a:p>
-            <a:pPr marL="127000" indent="-127000">
-              <a:spcAft>
-                <a:spcPts val="500"/>
-              </a:spcAft>
-              <a:buSzPct val="100000"/>
-              <a:buFont typeface="Arial" panose="020B0604020202020204" pitchFamily="34" charset="0"/>
-              <a:buChar char="•"/>
-            </a:pPr>
-            <a:r>
-              <a:rPr lang="en-IN" sz="1000" b="1">
-                <a:latin typeface="Arial" panose="020B0604020202020204" pitchFamily="34" charset="0"/>
-              </a:rPr>
-              <a:t>Microsoft Presidio</a:t>
-            </a:r>
-            <a:r>
-              <a:rPr lang="en-IN" sz="1000">
-                <a:latin typeface="Arial" panose="020B0604020202020204" pitchFamily="34" charset="0"/>
-              </a:rPr>
-              <a:t> – open-source PII detection and anonymization (reference design)</a:t>
-            </a:r>
-            <a:br>
-              <a:rPr lang="en-IN" sz="1000">
-                <a:latin typeface="Arial" panose="020B0604020202020204" pitchFamily="34" charset="0"/>
-              </a:rPr>
-            </a:br>
-            <a:r>
-              <a:rPr lang="en-IN" sz="850">
-                <a:solidFill>
-                  <a:srgbClr val="1D3FA0"/>
-                </a:solidFill>
-                <a:latin typeface="Arial" panose="020B0604020202020204" pitchFamily="34" charset="0"/>
-                <a:hlinkClick r:id="rId18">
-                  <a:extLst>
-                    <a:ext uri="{A12FA001-AC4F-418D-AE19-62706E023703}">
-                      <ahyp:hlinkClr xmlns:ahyp="http://schemas.microsoft.com/office/drawing/2018/hyperlinkcolor" val="tx"/>
-                    </a:ext>
-                  </a:extLst>
-                </a:hlinkClick>
-              </a:rPr>
-              <a:t>microsoft.github.io/presidio</a:t>
-            </a:r>
-            <a:endParaRPr lang="en-IN" sz="850">
-              <a:solidFill>
-                <a:srgbClr val="1D3FA0"/>
-              </a:solidFill>
-              <a:latin typeface="Arial" panose="020B0604020202020204" pitchFamily="34" charset="0"/>
-            </a:endParaRPr>
-          </a:p>
-          <a:p>
-            <a:pPr marL="127000" indent="-127000">
-              <a:spcAft>
-                <a:spcPts val="500"/>
-              </a:spcAft>
-              <a:buSzPct val="100000"/>
-              <a:buFont typeface="Arial" panose="020B0604020202020204" pitchFamily="34" charset="0"/>
-              <a:buChar char="•"/>
-            </a:pPr>
-            <a:r>
-              <a:rPr lang="en-IN" sz="1000" b="1">
-                <a:latin typeface="Arial" panose="020B0604020202020204" pitchFamily="34" charset="0"/>
-              </a:rPr>
-              <a:t>Checksums</a:t>
-            </a:r>
-            <a:r>
-              <a:rPr lang="en-IN" sz="1000">
-                <a:latin typeface="Arial" panose="020B0604020202020204" pitchFamily="34" charset="0"/>
-              </a:rPr>
-              <a:t>: Luhn (ISO/IEC 7812), Verhoeff (Aadhaar), IBAN mod-97 (ISO 13616)</a:t>
-            </a:r>
-          </a:p>
-          <a:p>
-            <a:pPr marL="127000" indent="-127000">
-              <a:spcAft>
-                <a:spcPts val="500"/>
-              </a:spcAft>
-              <a:buSzPct val="100000"/>
-              <a:buFont typeface="Arial" panose="020B0604020202020204" pitchFamily="34" charset="0"/>
-              <a:buChar char="•"/>
-            </a:pPr>
-            <a:r>
-              <a:rPr lang="en-IN" sz="1000" b="1">
-                <a:latin typeface="Arial" panose="020B0604020202020204" pitchFamily="34" charset="0"/>
-              </a:rPr>
-              <a:t>P2Shield prototype</a:t>
-            </a:r>
-            <a:r>
-              <a:rPr lang="en-IN" sz="1000">
-                <a:latin typeface="Arial" panose="020B0604020202020204" pitchFamily="34" charset="0"/>
-              </a:rPr>
-              <a:t> – source code, tests and demo page</a:t>
-            </a:r>
-            <a:br>
-              <a:rPr lang="en-IN" sz="1000">
-                <a:latin typeface="Arial" panose="020B0604020202020204" pitchFamily="34" charset="0"/>
-              </a:rPr>
-            </a:br>
-            <a:r>
-              <a:rPr lang="en-IN" sz="850">
-                <a:solidFill>
-                  <a:srgbClr val="1D3FA0"/>
-                </a:solidFill>
-                <a:latin typeface="Arial" panose="020B0604020202020204" pitchFamily="34" charset="0"/>
-                <a:hlinkClick r:id="rId19">
-                  <a:extLst>
-                    <a:ext uri="{A12FA001-AC4F-418D-AE19-62706E023703}">
-                      <ahyp:hlinkClr xmlns:ahyp="http://schemas.microsoft.com/office/drawing/2018/hyperlinkcolor" val="tx"/>
-                    </a:ext>
-                  </a:extLst>
-                </a:hlinkClick>
-              </a:rPr>
-              <a:t>github.com/Rohittiger99/Guardrail_hackathon</a:t>
-            </a:r>
-            <a:endParaRPr lang="en-IN" sz="850">
-              <a:solidFill>
-                <a:srgbClr val="1D3FA0"/>
+                <a:srgbClr val="A9D4FF"/>
               </a:solidFill>
               <a:latin typeface="Arial" panose="020B0604020202020204" pitchFamily="34" charset="0"/>
             </a:endParaRPr>
